--- a/Entregas/Nao-Teams/Apresentacoes/PSP2_Apresentacao_Final.pptx
+++ b/Entregas/Nao-Teams/Apresentacoes/PSP2_Apresentacao_Final.pptx
@@ -19,10 +19,9 @@
     <p:sldId id="267" r:id="rId13"/>
     <p:sldId id="268" r:id="rId14"/>
     <p:sldId id="269" r:id="rId15"/>
-    <p:sldId id="270" r:id="rId16"/>
   </p:sldIdLst>
   <p:notesMasterIdLst>
-    <p:notesMasterId r:id="rId17"/>
+    <p:notesMasterId r:id="rId16"/>
   </p:notesMasterIdLst>
   <p:sldSz cx="12192000" cy="6858000"/>
   <p:notesSz cx="6858000" cy="12192000"/>
@@ -998,94 +997,6 @@
 </p:notes>
 </file>
 
-<file path=ppt/notesSlides/notesSlide15.xml><?xml version="1.0" encoding="utf-8"?>
-<p:notes xmlns:a="http://schemas.openxmlformats.org/drawingml/2006/main" xmlns:r="http://schemas.openxmlformats.org/officeDocument/2006/relationships" xmlns:p="http://schemas.openxmlformats.org/presentationml/2006/main">
-  <p:cSld>
-    <p:spTree>
-      <p:nvGrpSpPr>
-        <p:cNvPr id="1" name=""/>
-        <p:cNvGrpSpPr/>
-        <p:nvPr/>
-      </p:nvGrpSpPr>
-      <p:grpSpPr>
-        <a:xfrm>
-          <a:off x="0" y="0"/>
-          <a:ext cx="0" cy="0"/>
-          <a:chOff x="0" y="0"/>
-          <a:chExt cx="0" cy="0"/>
-        </a:xfrm>
-      </p:grpSpPr>
-      <p:sp>
-        <p:nvSpPr>
-          <p:cNvPr id="2" name="Slide Image Placeholder 1"/>
-          <p:cNvSpPr>
-            <a:spLocks noGrp="1" noRot="1" noChangeAspect="1"/>
-          </p:cNvSpPr>
-          <p:nvPr>
-            <p:ph type="sldImg"/>
-          </p:nvPr>
-        </p:nvSpPr>
-        <p:spPr/>
-      </p:sp>
-      <p:sp>
-        <p:nvSpPr>
-          <p:cNvPr id="3" name="Notes Placeholder 2"/>
-          <p:cNvSpPr>
-            <a:spLocks noGrp="1"/>
-          </p:cNvSpPr>
-          <p:nvPr>
-            <p:ph type="body" idx="1"/>
-          </p:nvPr>
-        </p:nvSpPr>
-        <p:spPr/>
-        <p:txBody>
-          <a:bodyPr/>
-          <a:lstStyle/>
-          <a:p>
-            <a:r>
-              <a:rPr lang="en-US" dirty="0"/>
-              <a:t/>
-            </a:r>
-            <a:endParaRPr lang="en-US" dirty="0"/>
-          </a:p>
-        </p:txBody>
-      </p:sp>
-      <p:sp>
-        <p:nvSpPr>
-          <p:cNvPr id="4" name="Slide Number Placeholder 3"/>
-          <p:cNvSpPr>
-            <a:spLocks noGrp="1"/>
-          </p:cNvSpPr>
-          <p:nvPr>
-            <p:ph type="sldNum" sz="quarter" idx="10"/>
-          </p:nvPr>
-        </p:nvSpPr>
-        <p:spPr/>
-        <p:txBody>
-          <a:bodyPr/>
-          <a:lstStyle/>
-          <a:p>
-            <a:fld id="{F7021451-1387-4CA6-816F-3879F97B5CBC}" type="slidenum">
-              <a:rPr lang="en-US"/>
-              <a:t>15</a:t>
-            </a:fld>
-            <a:endParaRPr lang="en-US"/>
-          </a:p>
-        </p:txBody>
-      </p:sp>
-    </p:spTree>
-    <p:extLst>
-      <p:ext uri="{BB962C8B-B14F-4D97-AF65-F5344CB8AC3E}">
-        <p14:creationId xmlns:p14="http://schemas.microsoft.com/office/powerpoint/2010/main" val="1024086991"/>
-      </p:ext>
-    </p:extLst>
-  </p:cSld>
-  <p:clrMapOvr>
-    <a:masterClrMapping/>
-  </p:clrMapOvr>
-</p:notes>
-</file>
-
 <file path=ppt/notesSlides/notesSlide2.xml><?xml version="1.0" encoding="utf-8"?>
 <p:notes xmlns:a="http://schemas.openxmlformats.org/drawingml/2006/main" xmlns:r="http://schemas.openxmlformats.org/officeDocument/2006/relationships" xmlns:p="http://schemas.openxmlformats.org/presentationml/2006/main">
   <p:cSld>
@@ -2421,7 +2332,7 @@
         <p:spPr>
           <a:xfrm>
             <a:off x="502920" y="292608"/>
-            <a:ext cx="1463040" cy="402336"/>
+            <a:ext cx="1810512" cy="402336"/>
           </a:xfrm>
           <a:prstGeom prst="rect">
             <a:avLst/>
@@ -2448,7 +2359,7 @@
         <p:spPr>
           <a:xfrm>
             <a:off x="502920" y="292608"/>
-            <a:ext cx="1463040" cy="402336"/>
+            <a:ext cx="1810512" cy="402336"/>
           </a:xfrm>
           <a:prstGeom prst="rect">
             <a:avLst/>
@@ -2472,7 +2383,7 @@
                 <a:ea typeface="Calibri" pitchFamily="34" charset="-122"/>
                 <a:cs typeface="Calibri" pitchFamily="34" charset="-120"/>
               </a:rPr>
-              <a:t>EXTRAS</a:t>
+              <a:t>DIFICULDADES</a:t>
             </a:r>
             <a:endParaRPr lang="en-US" sz="1550" dirty="0"/>
           </a:p>
@@ -2521,7 +2432,7 @@
           </a:solidFill>
           <a:ln/>
           <a:effectLst>
-            <a:outerShdw sx="100000" sy="100000" kx="0" ky="0" algn="bl" rotWithShape="0" blurRad="1.7322254881290324e+259" dist="1.0393352928774194e+259" dir="9.501042999445996e+302">
+            <a:outerShdw sx="100000" sy="100000" kx="0" ky="0" algn="bl" rotWithShape="0" blurRad="1.1722876566739555e+292" dist="7.033725940043731e+291" dir="Infinity">
               <a:srgbClr val="9AA7B4">
                 <a:alpha val="Infinity"/>
               </a:srgbClr>
@@ -2602,7 +2513,7 @@
                 <a:ea typeface="Calibri" pitchFamily="34" charset="-122"/>
                 <a:cs typeface="Calibri" pitchFamily="34" charset="-120"/>
               </a:rPr>
-              <a:t>ALÉM DO ESCOPO · O PRODUTO É MAIOR QUE O PLANEJADO</a:t>
+              <a:t>OBSTÁCULOS · O QUE TRAVOU E O QUE FALTA</a:t>
             </a:r>
             <a:endParaRPr lang="en-US" sz="1650" dirty="0"/>
           </a:p>
@@ -2641,7 +2552,7 @@
                 <a:ea typeface="Calibri" pitchFamily="34" charset="-122"/>
                 <a:cs typeface="Calibri" pitchFamily="34" charset="-120"/>
               </a:rPr>
-              <a:t>O que cresceu durante a execução</a:t>
+              <a:t>Onde travamos — com honestidade</a:t>
             </a:r>
             <a:endParaRPr lang="en-US" sz="3700" dirty="0"/>
           </a:p>
@@ -2655,8 +2566,8 @@
         </p:nvSpPr>
         <p:spPr>
           <a:xfrm>
-            <a:off x="502920" y="2468880"/>
-            <a:ext cx="3575304" cy="1371600"/>
+            <a:off x="502920" y="2286000"/>
+            <a:ext cx="3544824" cy="2286000"/>
           </a:xfrm>
           <a:prstGeom prst="rect">
             <a:avLst/>
@@ -2671,7 +2582,7 @@
             <a:prstDash val="solid"/>
           </a:ln>
           <a:effectLst>
-            <a:outerShdw sx="100000" sy="100000" kx="0" ky="0" algn="bl" rotWithShape="0" blurRad="2.1999263699238713e+263" dist="1.3199558219543225e+263" dir="5.700625799667598e+307">
+            <a:outerShdw sx="100000" sy="100000" kx="0" ky="0" algn="bl" rotWithShape="0" blurRad="1.4888053239759236e+296" dist="8.932831943855538e+295" dir="Infinity">
               <a:srgbClr val="9AA7B4">
                 <a:alpha val="Infinity"/>
               </a:srgbClr>
@@ -2687,28 +2598,48 @@
         </p:nvSpPr>
         <p:spPr>
           <a:xfrm>
-            <a:off x="502920" y="2468880"/>
-            <a:ext cx="3575304" cy="54864"/>
-          </a:xfrm>
-          <a:prstGeom prst="rect">
-            <a:avLst/>
-          </a:prstGeom>
-          <a:solidFill>
-            <a:srgbClr val="008542"/>
-          </a:solidFill>
-          <a:ln/>
-        </p:spPr>
-      </p:sp>
-      <p:sp>
-        <p:nvSpPr>
-          <p:cNvPr id="12" name="Text 9"/>
-          <p:cNvSpPr/>
-          <p:nvPr/>
-        </p:nvSpPr>
-        <p:spPr>
-          <a:xfrm>
-            <a:off x="685800" y="2615184"/>
-            <a:ext cx="3209544" cy="365760"/>
+            <a:off x="502920" y="2286000"/>
+            <a:ext cx="68580" cy="2286000"/>
+          </a:xfrm>
+          <a:prstGeom prst="rect">
+            <a:avLst/>
+          </a:prstGeom>
+          <a:solidFill>
+            <a:srgbClr val="B85C00"/>
+          </a:solidFill>
+          <a:ln/>
+        </p:spPr>
+      </p:sp>
+      <p:sp>
+        <p:nvSpPr>
+          <p:cNvPr id="12" name="Shape 9"/>
+          <p:cNvSpPr/>
+          <p:nvPr/>
+        </p:nvSpPr>
+        <p:spPr>
+          <a:xfrm>
+            <a:off x="777240" y="2514600"/>
+            <a:ext cx="548640" cy="548640"/>
+          </a:xfrm>
+          <a:prstGeom prst="ellipse">
+            <a:avLst/>
+          </a:prstGeom>
+          <a:solidFill>
+            <a:srgbClr val="FBE9D3"/>
+          </a:solidFill>
+          <a:ln/>
+        </p:spPr>
+      </p:sp>
+      <p:sp>
+        <p:nvSpPr>
+          <p:cNvPr id="13" name="Text 10"/>
+          <p:cNvSpPr/>
+          <p:nvPr/>
+        </p:nvSpPr>
+        <p:spPr>
+          <a:xfrm>
+            <a:off x="777240" y="2514600"/>
+            <a:ext cx="548640" cy="548640"/>
           </a:xfrm>
           <a:prstGeom prst="rect">
             <a:avLst/>
@@ -2720,11 +2651,50 @@
           <a:bodyPr wrap="square" rtlCol="0" anchor="ctr"/>
           <a:lstStyle/>
           <a:p>
+            <a:pPr algn="ctr" indent="0" marL="0">
+              <a:buNone/>
+            </a:pPr>
+            <a:r>
+              <a:rPr lang="en-US" sz="2200" b="1" dirty="0">
+                <a:solidFill>
+                  <a:srgbClr val="B85C00"/>
+                </a:solidFill>
+                <a:latin typeface="Calibri" pitchFamily="34" charset="0"/>
+                <a:ea typeface="Calibri" pitchFamily="34" charset="-122"/>
+                <a:cs typeface="Calibri" pitchFamily="34" charset="-120"/>
+              </a:rPr>
+              <a:t>◆</a:t>
+            </a:r>
+            <a:endParaRPr lang="en-US" sz="2200" dirty="0"/>
+          </a:p>
+        </p:txBody>
+      </p:sp>
+      <p:sp>
+        <p:nvSpPr>
+          <p:cNvPr id="14" name="Text 11"/>
+          <p:cNvSpPr/>
+          <p:nvPr/>
+        </p:nvSpPr>
+        <p:spPr>
+          <a:xfrm>
+            <a:off x="777240" y="3154680"/>
+            <a:ext cx="3041904" cy="365760"/>
+          </a:xfrm>
+          <a:prstGeom prst="rect">
+            <a:avLst/>
+          </a:prstGeom>
+          <a:noFill/>
+          <a:ln/>
+        </p:spPr>
+        <p:txBody>
+          <a:bodyPr wrap="square" rtlCol="0" anchor="ctr"/>
+          <a:lstStyle/>
+          <a:p>
             <a:pPr indent="0" marL="0">
               <a:buNone/>
             </a:pPr>
             <a:r>
-              <a:rPr lang="en-US" sz="1600" b="1" dirty="0">
+              <a:rPr lang="en-US" sz="1700" b="1" dirty="0">
                 <a:solidFill>
                   <a:srgbClr val="003366"/>
                 </a:solidFill>
@@ -2732,22 +2702,61 @@
                 <a:ea typeface="Calibri" pitchFamily="34" charset="-122"/>
                 <a:cs typeface="Calibri" pitchFamily="34" charset="-120"/>
               </a:rPr>
-              <a:t>Experiência do aluno</a:t>
-            </a:r>
-            <a:endParaRPr lang="en-US" sz="1600" dirty="0"/>
-          </a:p>
-        </p:txBody>
-      </p:sp>
-      <p:sp>
-        <p:nvSpPr>
-          <p:cNvPr id="13" name="Text 10"/>
-          <p:cNvSpPr/>
-          <p:nvPr/>
-        </p:nvSpPr>
-        <p:spPr>
-          <a:xfrm>
-            <a:off x="685800" y="3035808"/>
-            <a:ext cx="3209544" cy="731520"/>
+              <a:t>Backlog rígida</a:t>
+            </a:r>
+            <a:endParaRPr lang="en-US" sz="1700" dirty="0"/>
+          </a:p>
+        </p:txBody>
+      </p:sp>
+      <p:sp>
+        <p:nvSpPr>
+          <p:cNvPr id="15" name="Text 12"/>
+          <p:cNvSpPr/>
+          <p:nvPr/>
+        </p:nvSpPr>
+        <p:spPr>
+          <a:xfrm>
+            <a:off x="777240" y="3493008"/>
+            <a:ext cx="3041904" cy="274320"/>
+          </a:xfrm>
+          <a:prstGeom prst="rect">
+            <a:avLst/>
+          </a:prstGeom>
+          <a:noFill/>
+          <a:ln/>
+        </p:spPr>
+        <p:txBody>
+          <a:bodyPr wrap="square" rtlCol="0" anchor="ctr"/>
+          <a:lstStyle/>
+          <a:p>
+            <a:pPr indent="0" marL="0">
+              <a:buNone/>
+            </a:pPr>
+            <a:r>
+              <a:rPr lang="en-US" sz="1200" i="1" dirty="0">
+                <a:solidFill>
+                  <a:srgbClr val="B85C00"/>
+                </a:solidFill>
+                <a:latin typeface="Calibri" pitchFamily="34" charset="0"/>
+                <a:ea typeface="Calibri" pitchFamily="34" charset="-122"/>
+                <a:cs typeface="Calibri" pitchFamily="34" charset="-120"/>
+              </a:rPr>
+              <a:t>Resolvida pelo replanejamento</a:t>
+            </a:r>
+            <a:endParaRPr lang="en-US" sz="1200" dirty="0"/>
+          </a:p>
+        </p:txBody>
+      </p:sp>
+      <p:sp>
+        <p:nvSpPr>
+          <p:cNvPr id="16" name="Text 13"/>
+          <p:cNvSpPr/>
+          <p:nvPr/>
+        </p:nvSpPr>
+        <p:spPr>
+          <a:xfrm>
+            <a:off x="777240" y="3767328"/>
+            <a:ext cx="2996184" cy="777240"/>
           </a:xfrm>
           <a:prstGeom prst="rect">
             <a:avLst/>
@@ -2763,30 +2772,30 @@
               <a:buNone/>
             </a:pPr>
             <a:r>
-              <a:rPr lang="en-US" sz="1250" dirty="0">
-                <a:solidFill>
-                  <a:srgbClr val="55606E"/>
-                </a:solidFill>
-                <a:latin typeface="Calibri" pitchFamily="34" charset="0"/>
-                <a:ea typeface="Calibri" pitchFamily="34" charset="-122"/>
-                <a:cs typeface="Calibri" pitchFamily="34" charset="-120"/>
-              </a:rPr>
-              <a:t>Identidade UnB, onboarding, busca/filtros, arquivar/excluir, tema escuro</a:t>
-            </a:r>
-            <a:endParaRPr lang="en-US" sz="1250" dirty="0"/>
-          </a:p>
-        </p:txBody>
-      </p:sp>
-      <p:sp>
-        <p:nvSpPr>
-          <p:cNvPr id="14" name="Shape 11"/>
-          <p:cNvSpPr/>
-          <p:nvPr/>
-        </p:nvSpPr>
-        <p:spPr>
-          <a:xfrm>
-            <a:off x="4306824" y="2468880"/>
-            <a:ext cx="3575304" cy="1371600"/>
+              <a:rPr lang="en-US" sz="1200" dirty="0">
+                <a:solidFill>
+                  <a:srgbClr val="1F2937"/>
+                </a:solidFill>
+                <a:latin typeface="Calibri" pitchFamily="34" charset="0"/>
+                <a:ea typeface="Calibri" pitchFamily="34" charset="-122"/>
+                <a:cs typeface="Calibri" pitchFamily="34" charset="-120"/>
+              </a:rPr>
+              <a:t>Fechada cedo demais; o que o produto pedia virava "extra". O plano em 5 sprints corrigiu isso.</a:t>
+            </a:r>
+            <a:endParaRPr lang="en-US" sz="1200" dirty="0"/>
+          </a:p>
+        </p:txBody>
+      </p:sp>
+      <p:sp>
+        <p:nvSpPr>
+          <p:cNvPr id="17" name="Shape 14"/>
+          <p:cNvSpPr/>
+          <p:nvPr/>
+        </p:nvSpPr>
+        <p:spPr>
+          <a:xfrm>
+            <a:off x="4322064" y="2286000"/>
+            <a:ext cx="3544824" cy="2286000"/>
           </a:xfrm>
           <a:prstGeom prst="rect">
             <a:avLst/>
@@ -2801,7 +2810,7 @@
             <a:prstDash val="solid"/>
           </a:ln>
           <a:effectLst>
-            <a:outerShdw sx="100000" sy="100000" kx="0" ky="0" algn="bl" rotWithShape="0" blurRad="2.7939064898033167e+267" dist="1.6763438938819895e+267" dir="Infinity">
+            <a:outerShdw sx="100000" sy="100000" kx="0" ky="0" algn="bl" rotWithShape="0" blurRad="1.890782761449423e+300" dist="1.1344696568696533e+300" dir="Infinity">
               <a:srgbClr val="9AA7B4">
                 <a:alpha val="Infinity"/>
               </a:srgbClr>
@@ -2811,34 +2820,54 @@
       </p:sp>
       <p:sp>
         <p:nvSpPr>
-          <p:cNvPr id="15" name="Shape 12"/>
-          <p:cNvSpPr/>
-          <p:nvPr/>
-        </p:nvSpPr>
-        <p:spPr>
-          <a:xfrm>
-            <a:off x="4306824" y="2468880"/>
-            <a:ext cx="3575304" cy="54864"/>
-          </a:xfrm>
-          <a:prstGeom prst="rect">
-            <a:avLst/>
-          </a:prstGeom>
-          <a:solidFill>
-            <a:srgbClr val="008542"/>
-          </a:solidFill>
-          <a:ln/>
-        </p:spPr>
-      </p:sp>
-      <p:sp>
-        <p:nvSpPr>
-          <p:cNvPr id="16" name="Text 13"/>
-          <p:cNvSpPr/>
-          <p:nvPr/>
-        </p:nvSpPr>
-        <p:spPr>
-          <a:xfrm>
-            <a:off x="4489704" y="2615184"/>
-            <a:ext cx="3209544" cy="365760"/>
+          <p:cNvPr id="18" name="Shape 15"/>
+          <p:cNvSpPr/>
+          <p:nvPr/>
+        </p:nvSpPr>
+        <p:spPr>
+          <a:xfrm>
+            <a:off x="4322064" y="2286000"/>
+            <a:ext cx="68580" cy="2286000"/>
+          </a:xfrm>
+          <a:prstGeom prst="rect">
+            <a:avLst/>
+          </a:prstGeom>
+          <a:solidFill>
+            <a:srgbClr val="B85C00"/>
+          </a:solidFill>
+          <a:ln/>
+        </p:spPr>
+      </p:sp>
+      <p:sp>
+        <p:nvSpPr>
+          <p:cNvPr id="19" name="Shape 16"/>
+          <p:cNvSpPr/>
+          <p:nvPr/>
+        </p:nvSpPr>
+        <p:spPr>
+          <a:xfrm>
+            <a:off x="4596384" y="2514600"/>
+            <a:ext cx="548640" cy="548640"/>
+          </a:xfrm>
+          <a:prstGeom prst="ellipse">
+            <a:avLst/>
+          </a:prstGeom>
+          <a:solidFill>
+            <a:srgbClr val="FBE9D3"/>
+          </a:solidFill>
+          <a:ln/>
+        </p:spPr>
+      </p:sp>
+      <p:sp>
+        <p:nvSpPr>
+          <p:cNvPr id="20" name="Text 17"/>
+          <p:cNvSpPr/>
+          <p:nvPr/>
+        </p:nvSpPr>
+        <p:spPr>
+          <a:xfrm>
+            <a:off x="4596384" y="2514600"/>
+            <a:ext cx="548640" cy="548640"/>
           </a:xfrm>
           <a:prstGeom prst="rect">
             <a:avLst/>
@@ -2850,11 +2879,50 @@
           <a:bodyPr wrap="square" rtlCol="0" anchor="ctr"/>
           <a:lstStyle/>
           <a:p>
+            <a:pPr algn="ctr" indent="0" marL="0">
+              <a:buNone/>
+            </a:pPr>
+            <a:r>
+              <a:rPr lang="en-US" sz="2200" b="1" dirty="0">
+                <a:solidFill>
+                  <a:srgbClr val="B85C00"/>
+                </a:solidFill>
+                <a:latin typeface="Calibri" pitchFamily="34" charset="0"/>
+                <a:ea typeface="Calibri" pitchFamily="34" charset="-122"/>
+                <a:cs typeface="Calibri" pitchFamily="34" charset="-120"/>
+              </a:rPr>
+              <a:t>$</a:t>
+            </a:r>
+            <a:endParaRPr lang="en-US" sz="2200" dirty="0"/>
+          </a:p>
+        </p:txBody>
+      </p:sp>
+      <p:sp>
+        <p:nvSpPr>
+          <p:cNvPr id="21" name="Text 18"/>
+          <p:cNvSpPr/>
+          <p:nvPr/>
+        </p:nvSpPr>
+        <p:spPr>
+          <a:xfrm>
+            <a:off x="4596384" y="3154680"/>
+            <a:ext cx="3041904" cy="365760"/>
+          </a:xfrm>
+          <a:prstGeom prst="rect">
+            <a:avLst/>
+          </a:prstGeom>
+          <a:noFill/>
+          <a:ln/>
+        </p:spPr>
+        <p:txBody>
+          <a:bodyPr wrap="square" rtlCol="0" anchor="ctr"/>
+          <a:lstStyle/>
+          <a:p>
             <a:pPr indent="0" marL="0">
               <a:buNone/>
             </a:pPr>
             <a:r>
-              <a:rPr lang="en-US" sz="1600" b="1" dirty="0">
+              <a:rPr lang="en-US" sz="1700" b="1" dirty="0">
                 <a:solidFill>
                   <a:srgbClr val="003366"/>
                 </a:solidFill>
@@ -2862,22 +2930,61 @@
                 <a:ea typeface="Calibri" pitchFamily="34" charset="-122"/>
                 <a:cs typeface="Calibri" pitchFamily="34" charset="-120"/>
               </a:rPr>
-              <a:t>Acompanhamento</a:t>
-            </a:r>
-            <a:endParaRPr lang="en-US" sz="1600" dirty="0"/>
-          </a:p>
-        </p:txBody>
-      </p:sp>
-      <p:sp>
-        <p:nvSpPr>
-          <p:cNvPr id="17" name="Text 14"/>
-          <p:cNvSpPr/>
-          <p:nvPr/>
-        </p:nvSpPr>
-        <p:spPr>
-          <a:xfrm>
-            <a:off x="4489704" y="3035808"/>
-            <a:ext cx="3209544" cy="731520"/>
+              <a:t>Sem verba para LLM</a:t>
+            </a:r>
+            <a:endParaRPr lang="en-US" sz="1700" dirty="0"/>
+          </a:p>
+        </p:txBody>
+      </p:sp>
+      <p:sp>
+        <p:nvSpPr>
+          <p:cNvPr id="22" name="Text 19"/>
+          <p:cNvSpPr/>
+          <p:nvPr/>
+        </p:nvSpPr>
+        <p:spPr>
+          <a:xfrm>
+            <a:off x="4596384" y="3493008"/>
+            <a:ext cx="3041904" cy="274320"/>
+          </a:xfrm>
+          <a:prstGeom prst="rect">
+            <a:avLst/>
+          </a:prstGeom>
+          <a:noFill/>
+          <a:ln/>
+        </p:spPr>
+        <p:txBody>
+          <a:bodyPr wrap="square" rtlCol="0" anchor="ctr"/>
+          <a:lstStyle/>
+          <a:p>
+            <a:pPr indent="0" marL="0">
+              <a:buNone/>
+            </a:pPr>
+            <a:r>
+              <a:rPr lang="en-US" sz="1200" i="1" dirty="0">
+                <a:solidFill>
+                  <a:srgbClr val="B85C00"/>
+                </a:solidFill>
+                <a:latin typeface="Calibri" pitchFamily="34" charset="0"/>
+                <a:ea typeface="Calibri" pitchFamily="34" charset="-122"/>
+                <a:cs typeface="Calibri" pitchFamily="34" charset="-120"/>
+              </a:rPr>
+              <a:t>Pipeline pronto, validação travada</a:t>
+            </a:r>
+            <a:endParaRPr lang="en-US" sz="1200" dirty="0"/>
+          </a:p>
+        </p:txBody>
+      </p:sp>
+      <p:sp>
+        <p:nvSpPr>
+          <p:cNvPr id="23" name="Text 20"/>
+          <p:cNvSpPr/>
+          <p:nvPr/>
+        </p:nvSpPr>
+        <p:spPr>
+          <a:xfrm>
+            <a:off x="4596384" y="3767328"/>
+            <a:ext cx="2996184" cy="777240"/>
           </a:xfrm>
           <a:prstGeom prst="rect">
             <a:avLst/>
@@ -2893,30 +3000,30 @@
               <a:buNone/>
             </a:pPr>
             <a:r>
-              <a:rPr lang="en-US" sz="1250" dirty="0">
-                <a:solidFill>
-                  <a:srgbClr val="55606E"/>
-                </a:solidFill>
-                <a:latin typeface="Calibri" pitchFamily="34" charset="0"/>
-                <a:ea typeface="Calibri" pitchFamily="34" charset="-122"/>
-                <a:cs typeface="Calibri" pitchFamily="34" charset="-120"/>
-              </a:rPr>
-              <a:t>Página de atividade, métricas pessoais, painel administrativo</a:t>
-            </a:r>
-            <a:endParaRPr lang="en-US" sz="1250" dirty="0"/>
-          </a:p>
-        </p:txBody>
-      </p:sp>
-      <p:sp>
-        <p:nvSpPr>
-          <p:cNvPr id="18" name="Shape 15"/>
-          <p:cNvSpPr/>
-          <p:nvPr/>
-        </p:nvSpPr>
-        <p:spPr>
-          <a:xfrm>
-            <a:off x="8110728" y="2468880"/>
-            <a:ext cx="3575304" cy="1371600"/>
+              <a:rPr lang="en-US" sz="1200" dirty="0">
+                <a:solidFill>
+                  <a:srgbClr val="1F2937"/>
+                </a:solidFill>
+                <a:latin typeface="Calibri" pitchFamily="34" charset="0"/>
+                <a:ea typeface="Calibri" pitchFamily="34" charset="-122"/>
+                <a:cs typeface="Calibri" pitchFamily="34" charset="-120"/>
+              </a:rPr>
+              <a:t>Rodar o teste de 50 documentos consome créditos de IA. Sem orçamento, a métrica oficial (≥80%) ficou em espera.</a:t>
+            </a:r>
+            <a:endParaRPr lang="en-US" sz="1200" dirty="0"/>
+          </a:p>
+        </p:txBody>
+      </p:sp>
+      <p:sp>
+        <p:nvSpPr>
+          <p:cNvPr id="24" name="Shape 21"/>
+          <p:cNvSpPr/>
+          <p:nvPr/>
+        </p:nvSpPr>
+        <p:spPr>
+          <a:xfrm>
+            <a:off x="8141208" y="2286000"/>
+            <a:ext cx="3544824" cy="2286000"/>
           </a:xfrm>
           <a:prstGeom prst="rect">
             <a:avLst/>
@@ -2931,7 +3038,7 @@
             <a:prstDash val="solid"/>
           </a:ln>
           <a:effectLst>
-            <a:outerShdw sx="100000" sy="100000" kx="0" ky="0" algn="bl" rotWithShape="0" blurRad="3.548261242050212e+271" dist="2.1289567452301266e+271" dir="Infinity">
+            <a:outerShdw sx="100000" sy="100000" kx="0" ky="0" algn="bl" rotWithShape="0" blurRad="2.4012941070407674e+304" dist="1.4407764642244596e+304" dir="Infinity">
               <a:srgbClr val="9AA7B4">
                 <a:alpha val="Infinity"/>
               </a:srgbClr>
@@ -2941,34 +3048,54 @@
       </p:sp>
       <p:sp>
         <p:nvSpPr>
-          <p:cNvPr id="19" name="Shape 16"/>
-          <p:cNvSpPr/>
-          <p:nvPr/>
-        </p:nvSpPr>
-        <p:spPr>
-          <a:xfrm>
-            <a:off x="8110728" y="2468880"/>
-            <a:ext cx="3575304" cy="54864"/>
-          </a:xfrm>
-          <a:prstGeom prst="rect">
-            <a:avLst/>
-          </a:prstGeom>
-          <a:solidFill>
-            <a:srgbClr val="008542"/>
-          </a:solidFill>
-          <a:ln/>
-        </p:spPr>
-      </p:sp>
-      <p:sp>
-        <p:nvSpPr>
-          <p:cNvPr id="20" name="Text 17"/>
-          <p:cNvSpPr/>
-          <p:nvPr/>
-        </p:nvSpPr>
-        <p:spPr>
-          <a:xfrm>
-            <a:off x="8293608" y="2615184"/>
-            <a:ext cx="3209544" cy="365760"/>
+          <p:cNvPr id="25" name="Shape 22"/>
+          <p:cNvSpPr/>
+          <p:nvPr/>
+        </p:nvSpPr>
+        <p:spPr>
+          <a:xfrm>
+            <a:off x="8141208" y="2286000"/>
+            <a:ext cx="68580" cy="2286000"/>
+          </a:xfrm>
+          <a:prstGeom prst="rect">
+            <a:avLst/>
+          </a:prstGeom>
+          <a:solidFill>
+            <a:srgbClr val="B85C00"/>
+          </a:solidFill>
+          <a:ln/>
+        </p:spPr>
+      </p:sp>
+      <p:sp>
+        <p:nvSpPr>
+          <p:cNvPr id="26" name="Shape 23"/>
+          <p:cNvSpPr/>
+          <p:nvPr/>
+        </p:nvSpPr>
+        <p:spPr>
+          <a:xfrm>
+            <a:off x="8415528" y="2514600"/>
+            <a:ext cx="548640" cy="548640"/>
+          </a:xfrm>
+          <a:prstGeom prst="ellipse">
+            <a:avLst/>
+          </a:prstGeom>
+          <a:solidFill>
+            <a:srgbClr val="FBE9D3"/>
+          </a:solidFill>
+          <a:ln/>
+        </p:spPr>
+      </p:sp>
+      <p:sp>
+        <p:nvSpPr>
+          <p:cNvPr id="27" name="Text 24"/>
+          <p:cNvSpPr/>
+          <p:nvPr/>
+        </p:nvSpPr>
+        <p:spPr>
+          <a:xfrm>
+            <a:off x="8415528" y="2514600"/>
+            <a:ext cx="548640" cy="548640"/>
           </a:xfrm>
           <a:prstGeom prst="rect">
             <a:avLst/>
@@ -2980,11 +3107,50 @@
           <a:bodyPr wrap="square" rtlCol="0" anchor="ctr"/>
           <a:lstStyle/>
           <a:p>
+            <a:pPr algn="ctr" indent="0" marL="0">
+              <a:buNone/>
+            </a:pPr>
+            <a:r>
+              <a:rPr lang="en-US" sz="2200" b="1" dirty="0">
+                <a:solidFill>
+                  <a:srgbClr val="B85C00"/>
+                </a:solidFill>
+                <a:latin typeface="Calibri" pitchFamily="34" charset="0"/>
+                <a:ea typeface="Calibri" pitchFamily="34" charset="-122"/>
+                <a:cs typeface="Calibri" pitchFamily="34" charset="-120"/>
+              </a:rPr>
+              <a:t>☁</a:t>
+            </a:r>
+            <a:endParaRPr lang="en-US" sz="2200" dirty="0"/>
+          </a:p>
+        </p:txBody>
+      </p:sp>
+      <p:sp>
+        <p:nvSpPr>
+          <p:cNvPr id="28" name="Text 25"/>
+          <p:cNvSpPr/>
+          <p:nvPr/>
+        </p:nvSpPr>
+        <p:spPr>
+          <a:xfrm>
+            <a:off x="8415528" y="3154680"/>
+            <a:ext cx="3041904" cy="365760"/>
+          </a:xfrm>
+          <a:prstGeom prst="rect">
+            <a:avLst/>
+          </a:prstGeom>
+          <a:noFill/>
+          <a:ln/>
+        </p:spPr>
+        <p:txBody>
+          <a:bodyPr wrap="square" rtlCol="0" anchor="ctr"/>
+          <a:lstStyle/>
+          <a:p>
             <a:pPr indent="0" marL="0">
               <a:buNone/>
             </a:pPr>
             <a:r>
-              <a:rPr lang="en-US" sz="1600" b="1" dirty="0">
+              <a:rPr lang="en-US" sz="1700" b="1" dirty="0">
                 <a:solidFill>
                   <a:srgbClr val="003366"/>
                 </a:solidFill>
@@ -2992,22 +3158,61 @@
                 <a:ea typeface="Calibri" pitchFamily="34" charset="-122"/>
                 <a:cs typeface="Calibri" pitchFamily="34" charset="-120"/>
               </a:rPr>
-              <a:t>Segurança &amp; privacidade</a:t>
-            </a:r>
-            <a:endParaRPr lang="en-US" sz="1600" dirty="0"/>
-          </a:p>
-        </p:txBody>
-      </p:sp>
-      <p:sp>
-        <p:nvSpPr>
-          <p:cNvPr id="21" name="Text 18"/>
-          <p:cNvSpPr/>
-          <p:nvPr/>
-        </p:nvSpPr>
-        <p:spPr>
-          <a:xfrm>
-            <a:off x="8293608" y="3035808"/>
-            <a:ext cx="3209544" cy="731520"/>
+              <a:t>Sem verba para deploy</a:t>
+            </a:r>
+            <a:endParaRPr lang="en-US" sz="1700" dirty="0"/>
+          </a:p>
+        </p:txBody>
+      </p:sp>
+      <p:sp>
+        <p:nvSpPr>
+          <p:cNvPr id="29" name="Text 26"/>
+          <p:cNvSpPr/>
+          <p:nvPr/>
+        </p:nvSpPr>
+        <p:spPr>
+          <a:xfrm>
+            <a:off x="8415528" y="3493008"/>
+            <a:ext cx="3041904" cy="274320"/>
+          </a:xfrm>
+          <a:prstGeom prst="rect">
+            <a:avLst/>
+          </a:prstGeom>
+          <a:noFill/>
+          <a:ln/>
+        </p:spPr>
+        <p:txBody>
+          <a:bodyPr wrap="square" rtlCol="0" anchor="ctr"/>
+          <a:lstStyle/>
+          <a:p>
+            <a:pPr indent="0" marL="0">
+              <a:buNone/>
+            </a:pPr>
+            <a:r>
+              <a:rPr lang="en-US" sz="1200" i="1" dirty="0">
+                <a:solidFill>
+                  <a:srgbClr val="B85C00"/>
+                </a:solidFill>
+                <a:latin typeface="Calibri" pitchFamily="34" charset="0"/>
+                <a:ea typeface="Calibri" pitchFamily="34" charset="-122"/>
+                <a:cs typeface="Calibri" pitchFamily="34" charset="-120"/>
+              </a:rPr>
+              <a:t>Produto pronto, público sem acesso</a:t>
+            </a:r>
+            <a:endParaRPr lang="en-US" sz="1200" dirty="0"/>
+          </a:p>
+        </p:txBody>
+      </p:sp>
+      <p:sp>
+        <p:nvSpPr>
+          <p:cNvPr id="30" name="Text 27"/>
+          <p:cNvSpPr/>
+          <p:nvPr/>
+        </p:nvSpPr>
+        <p:spPr>
+          <a:xfrm>
+            <a:off x="8415528" y="3767328"/>
+            <a:ext cx="2996184" cy="777240"/>
           </a:xfrm>
           <a:prstGeom prst="rect">
             <a:avLst/>
@@ -3023,36 +3228,38 @@
               <a:buNone/>
             </a:pPr>
             <a:r>
-              <a:rPr lang="en-US" sz="1250" dirty="0">
-                <a:solidFill>
-                  <a:srgbClr val="55606E"/>
-                </a:solidFill>
-                <a:latin typeface="Calibri" pitchFamily="34" charset="0"/>
-                <a:ea typeface="Calibri" pitchFamily="34" charset="-122"/>
-                <a:cs typeface="Calibri" pitchFamily="34" charset="-120"/>
-              </a:rPr>
-              <a:t>Hardening de acesso, sandbox anti-injeção, LGPD completa</a:t>
-            </a:r>
-            <a:endParaRPr lang="en-US" sz="1250" dirty="0"/>
-          </a:p>
-        </p:txBody>
-      </p:sp>
-      <p:sp>
-        <p:nvSpPr>
-          <p:cNvPr id="22" name="Shape 19"/>
-          <p:cNvSpPr/>
-          <p:nvPr/>
-        </p:nvSpPr>
-        <p:spPr>
-          <a:xfrm>
-            <a:off x="502920" y="4041648"/>
-            <a:ext cx="3575304" cy="1371600"/>
-          </a:xfrm>
-          <a:prstGeom prst="rect">
-            <a:avLst/>
-          </a:prstGeom>
-          <a:solidFill>
-            <a:srgbClr val="FFFFFF"/>
+              <a:rPr lang="en-US" sz="1200" dirty="0">
+                <a:solidFill>
+                  <a:srgbClr val="1F2937"/>
+                </a:solidFill>
+                <a:latin typeface="Calibri" pitchFamily="34" charset="0"/>
+                <a:ea typeface="Calibri" pitchFamily="34" charset="-122"/>
+                <a:cs typeface="Calibri" pitchFamily="34" charset="-120"/>
+              </a:rPr>
+              <a:t>Sem Supabase Pro + domínio, não há URL pública — e sem isso, os testes com alunos reais não rodam.</a:t>
+            </a:r>
+            <a:endParaRPr lang="en-US" sz="1200" dirty="0"/>
+          </a:p>
+        </p:txBody>
+      </p:sp>
+      <p:sp>
+        <p:nvSpPr>
+          <p:cNvPr id="31" name="Shape 28"/>
+          <p:cNvSpPr/>
+          <p:nvPr/>
+        </p:nvSpPr>
+        <p:spPr>
+          <a:xfrm>
+            <a:off x="502920" y="4937760"/>
+            <a:ext cx="11183112" cy="1463040"/>
+          </a:xfrm>
+          <a:prstGeom prst="roundRect">
+            <a:avLst>
+              <a:gd name="adj" fmla="val 3125"/>
+            </a:avLst>
+          </a:prstGeom>
+          <a:solidFill>
+            <a:srgbClr val="FBE9D3"/>
           </a:solidFill>
           <a:ln w="12700">
             <a:solidFill>
@@ -3061,7 +3268,7 @@
             <a:prstDash val="solid"/>
           </a:ln>
           <a:effectLst>
-            <a:outerShdw sx="100000" sy="100000" kx="0" ky="0" algn="bl" rotWithShape="0" blurRad="4.50629177740377e+275" dist="2.7037750664422608e+275" dir="Infinity">
+            <a:outerShdw sx="100000" sy="100000" kx="0" ky="0" algn="bl" rotWithShape="0" blurRad="Infinity" dist="Infinity" dir="Infinity">
               <a:srgbClr val="9AA7B4">
                 <a:alpha val="Infinity"/>
               </a:srgbClr>
@@ -3071,34 +3278,14 @@
       </p:sp>
       <p:sp>
         <p:nvSpPr>
-          <p:cNvPr id="23" name="Shape 20"/>
-          <p:cNvSpPr/>
-          <p:nvPr/>
-        </p:nvSpPr>
-        <p:spPr>
-          <a:xfrm>
-            <a:off x="502920" y="4041648"/>
-            <a:ext cx="3575304" cy="54864"/>
-          </a:xfrm>
-          <a:prstGeom prst="rect">
-            <a:avLst/>
-          </a:prstGeom>
-          <a:solidFill>
-            <a:srgbClr val="008542"/>
-          </a:solidFill>
-          <a:ln/>
-        </p:spPr>
-      </p:sp>
-      <p:sp>
-        <p:nvSpPr>
-          <p:cNvPr id="24" name="Text 21"/>
-          <p:cNvSpPr/>
-          <p:nvPr/>
-        </p:nvSpPr>
-        <p:spPr>
-          <a:xfrm>
-            <a:off x="685800" y="4187952"/>
-            <a:ext cx="3209544" cy="365760"/>
+          <p:cNvPr id="32" name="Text 29"/>
+          <p:cNvSpPr/>
+          <p:nvPr/>
+        </p:nvSpPr>
+        <p:spPr>
+          <a:xfrm>
+            <a:off x="777240" y="5074920"/>
+            <a:ext cx="10607040" cy="365760"/>
           </a:xfrm>
           <a:prstGeom prst="rect">
             <a:avLst/>
@@ -3114,7 +3301,7 @@
               <a:buNone/>
             </a:pPr>
             <a:r>
-              <a:rPr lang="en-US" sz="1600" b="1" dirty="0">
+              <a:rPr lang="en-US" sz="1500" b="1" dirty="0">
                 <a:solidFill>
                   <a:srgbClr val="003366"/>
                 </a:solidFill>
@@ -3122,22 +3309,22 @@
                 <a:ea typeface="Calibri" pitchFamily="34" charset="-122"/>
                 <a:cs typeface="Calibri" pitchFamily="34" charset="-120"/>
               </a:rPr>
-              <a:t>Inteligência do pipeline</a:t>
-            </a:r>
-            <a:endParaRPr lang="en-US" sz="1600" dirty="0"/>
-          </a:p>
-        </p:txBody>
-      </p:sp>
-      <p:sp>
-        <p:nvSpPr>
-          <p:cNvPr id="25" name="Text 22"/>
-          <p:cNvSpPr/>
-          <p:nvPr/>
-        </p:nvSpPr>
-        <p:spPr>
-          <a:xfrm>
-            <a:off x="685800" y="4608576"/>
-            <a:ext cx="3209544" cy="731520"/>
+              <a:t>Lacunas conhecidas — o que precisa ser endereçado</a:t>
+            </a:r>
+            <a:endParaRPr lang="en-US" sz="1500" dirty="0"/>
+          </a:p>
+        </p:txBody>
+      </p:sp>
+      <p:sp>
+        <p:nvSpPr>
+          <p:cNvPr id="33" name="Text 30"/>
+          <p:cNvSpPr/>
+          <p:nvPr/>
+        </p:nvSpPr>
+        <p:spPr>
+          <a:xfrm>
+            <a:off x="777240" y="5486400"/>
+            <a:ext cx="3361944" cy="822960"/>
           </a:xfrm>
           <a:prstGeom prst="rect">
             <a:avLst/>
@@ -3153,121 +3340,45 @@
               <a:buNone/>
             </a:pPr>
             <a:r>
-              <a:rPr lang="en-US" sz="1250" dirty="0">
-                <a:solidFill>
-                  <a:srgbClr val="55606E"/>
-                </a:solidFill>
-                <a:latin typeface="Calibri" pitchFamily="34" charset="0"/>
-                <a:ea typeface="Calibri" pitchFamily="34" charset="-122"/>
-                <a:cs typeface="Calibri" pitchFamily="34" charset="-120"/>
-              </a:rPr>
-              <a:t>Validação em 4 camadas (LLM-as-judge), import SIGAA, flashcards por IA</a:t>
-            </a:r>
-            <a:endParaRPr lang="en-US" sz="1250" dirty="0"/>
-          </a:p>
-        </p:txBody>
-      </p:sp>
-      <p:sp>
-        <p:nvSpPr>
-          <p:cNvPr id="26" name="Shape 23"/>
-          <p:cNvSpPr/>
-          <p:nvPr/>
-        </p:nvSpPr>
-        <p:spPr>
-          <a:xfrm>
-            <a:off x="4306824" y="4041648"/>
-            <a:ext cx="3575304" cy="1371600"/>
-          </a:xfrm>
-          <a:prstGeom prst="rect">
-            <a:avLst/>
-          </a:prstGeom>
-          <a:solidFill>
-            <a:srgbClr val="FFFFFF"/>
-          </a:solidFill>
-          <a:ln w="12700">
-            <a:solidFill>
-              <a:srgbClr val="E6E9EE"/>
-            </a:solidFill>
-            <a:prstDash val="solid"/>
-          </a:ln>
-          <a:effectLst>
-            <a:outerShdw sx="100000" sy="100000" kx="0" ky="0" algn="bl" rotWithShape="0" blurRad="5.722990557302787e+279" dist="3.433794334381671e+279" dir="Infinity">
-              <a:srgbClr val="9AA7B4">
-                <a:alpha val="Infinity"/>
-              </a:srgbClr>
-            </a:outerShdw>
-          </a:effectLst>
-        </p:spPr>
-      </p:sp>
-      <p:sp>
-        <p:nvSpPr>
-          <p:cNvPr id="27" name="Shape 24"/>
-          <p:cNvSpPr/>
-          <p:nvPr/>
-        </p:nvSpPr>
-        <p:spPr>
-          <a:xfrm>
-            <a:off x="4306824" y="4041648"/>
-            <a:ext cx="3575304" cy="54864"/>
-          </a:xfrm>
-          <a:prstGeom prst="rect">
-            <a:avLst/>
-          </a:prstGeom>
-          <a:solidFill>
-            <a:srgbClr val="008542"/>
-          </a:solidFill>
-          <a:ln/>
-        </p:spPr>
-      </p:sp>
-      <p:sp>
-        <p:nvSpPr>
-          <p:cNvPr id="28" name="Text 25"/>
-          <p:cNvSpPr/>
-          <p:nvPr/>
-        </p:nvSpPr>
-        <p:spPr>
-          <a:xfrm>
-            <a:off x="4489704" y="4187952"/>
-            <a:ext cx="3209544" cy="365760"/>
-          </a:xfrm>
-          <a:prstGeom prst="rect">
-            <a:avLst/>
-          </a:prstGeom>
-          <a:noFill/>
-          <a:ln/>
-        </p:spPr>
-        <p:txBody>
-          <a:bodyPr wrap="square" rtlCol="0" anchor="ctr"/>
-          <a:lstStyle/>
-          <a:p>
+              <a:rPr lang="en-US" sz="1350" b="1" dirty="0">
+                <a:solidFill>
+                  <a:srgbClr val="B85C00"/>
+                </a:solidFill>
+                <a:latin typeface="Calibri" pitchFamily="34" charset="0"/>
+                <a:ea typeface="Calibri" pitchFamily="34" charset="-122"/>
+                <a:cs typeface="Calibri" pitchFamily="34" charset="-120"/>
+              </a:rPr>
+              <a:t>1.  Logs &amp; observabilidade
+</a:t>
+            </a:r>
             <a:pPr indent="0" marL="0">
               <a:buNone/>
             </a:pPr>
             <a:r>
-              <a:rPr lang="en-US" sz="1600" b="1" dirty="0">
-                <a:solidFill>
-                  <a:srgbClr val="003366"/>
-                </a:solidFill>
-                <a:latin typeface="Calibri" pitchFamily="34" charset="0"/>
-                <a:ea typeface="Calibri" pitchFamily="34" charset="-122"/>
-                <a:cs typeface="Calibri" pitchFamily="34" charset="-120"/>
-              </a:rPr>
-              <a:t>Confiabilidade</a:t>
-            </a:r>
-            <a:endParaRPr lang="en-US" sz="1600" dirty="0"/>
-          </a:p>
-        </p:txBody>
-      </p:sp>
-      <p:sp>
-        <p:nvSpPr>
-          <p:cNvPr id="29" name="Text 26"/>
-          <p:cNvSpPr/>
-          <p:nvPr/>
-        </p:nvSpPr>
-        <p:spPr>
-          <a:xfrm>
-            <a:off x="4489704" y="4608576"/>
-            <a:ext cx="3209544" cy="731520"/>
+              <a:rPr lang="en-US" sz="1200" dirty="0">
+                <a:solidFill>
+                  <a:srgbClr val="1F2937"/>
+                </a:solidFill>
+                <a:latin typeface="Calibri" pitchFamily="34" charset="0"/>
+                <a:ea typeface="Calibri" pitchFamily="34" charset="-122"/>
+                <a:cs typeface="Calibri" pitchFamily="34" charset="-120"/>
+              </a:rPr>
+              <a:t>Falta painel central de erros, custo e latência</a:t>
+            </a:r>
+            <a:endParaRPr lang="en-US" sz="1350" dirty="0"/>
+          </a:p>
+        </p:txBody>
+      </p:sp>
+      <p:sp>
+        <p:nvSpPr>
+          <p:cNvPr id="34" name="Text 31"/>
+          <p:cNvSpPr/>
+          <p:nvPr/>
+        </p:nvSpPr>
+        <p:spPr>
+          <a:xfrm>
+            <a:off x="4322064" y="5486400"/>
+            <a:ext cx="3361944" cy="822960"/>
           </a:xfrm>
           <a:prstGeom prst="rect">
             <a:avLst/>
@@ -3283,121 +3394,45 @@
               <a:buNone/>
             </a:pPr>
             <a:r>
-              <a:rPr lang="en-US" sz="1250" dirty="0">
-                <a:solidFill>
-                  <a:srgbClr val="55606E"/>
-                </a:solidFill>
-                <a:latin typeface="Calibri" pitchFamily="34" charset="0"/>
-                <a:ea typeface="Calibri" pitchFamily="34" charset="-122"/>
-                <a:cs typeface="Calibri" pitchFamily="34" charset="-120"/>
-              </a:rPr>
-              <a:t>Logs sem PII, tempo real, CI/CD com gate, auditoria multi-frente</a:t>
-            </a:r>
-            <a:endParaRPr lang="en-US" sz="1250" dirty="0"/>
-          </a:p>
-        </p:txBody>
-      </p:sp>
-      <p:sp>
-        <p:nvSpPr>
-          <p:cNvPr id="30" name="Shape 27"/>
-          <p:cNvSpPr/>
-          <p:nvPr/>
-        </p:nvSpPr>
-        <p:spPr>
-          <a:xfrm>
-            <a:off x="8110728" y="4041648"/>
-            <a:ext cx="3575304" cy="1371600"/>
-          </a:xfrm>
-          <a:prstGeom prst="rect">
-            <a:avLst/>
-          </a:prstGeom>
-          <a:solidFill>
-            <a:srgbClr val="FFFFFF"/>
-          </a:solidFill>
-          <a:ln w="12700">
-            <a:solidFill>
-              <a:srgbClr val="E6E9EE"/>
-            </a:solidFill>
-            <a:prstDash val="solid"/>
-          </a:ln>
-          <a:effectLst>
-            <a:outerShdw sx="100000" sy="100000" kx="0" ky="0" algn="bl" rotWithShape="0" blurRad="7.26819800777454e+283" dist="4.360918804664722e+283" dir="Infinity">
-              <a:srgbClr val="9AA7B4">
-                <a:alpha val="Infinity"/>
-              </a:srgbClr>
-            </a:outerShdw>
-          </a:effectLst>
-        </p:spPr>
-      </p:sp>
-      <p:sp>
-        <p:nvSpPr>
-          <p:cNvPr id="31" name="Shape 28"/>
-          <p:cNvSpPr/>
-          <p:nvPr/>
-        </p:nvSpPr>
-        <p:spPr>
-          <a:xfrm>
-            <a:off x="8110728" y="4041648"/>
-            <a:ext cx="3575304" cy="54864"/>
-          </a:xfrm>
-          <a:prstGeom prst="rect">
-            <a:avLst/>
-          </a:prstGeom>
-          <a:solidFill>
-            <a:srgbClr val="008542"/>
-          </a:solidFill>
-          <a:ln/>
-        </p:spPr>
-      </p:sp>
-      <p:sp>
-        <p:nvSpPr>
-          <p:cNvPr id="32" name="Text 29"/>
-          <p:cNvSpPr/>
-          <p:nvPr/>
-        </p:nvSpPr>
-        <p:spPr>
-          <a:xfrm>
-            <a:off x="8293608" y="4187952"/>
-            <a:ext cx="3209544" cy="365760"/>
-          </a:xfrm>
-          <a:prstGeom prst="rect">
-            <a:avLst/>
-          </a:prstGeom>
-          <a:noFill/>
-          <a:ln/>
-        </p:spPr>
-        <p:txBody>
-          <a:bodyPr wrap="square" rtlCol="0" anchor="ctr"/>
-          <a:lstStyle/>
-          <a:p>
+              <a:rPr lang="en-US" sz="1350" b="1" dirty="0">
+                <a:solidFill>
+                  <a:srgbClr val="B85C00"/>
+                </a:solidFill>
+                <a:latin typeface="Calibri" pitchFamily="34" charset="0"/>
+                <a:ea typeface="Calibri" pitchFamily="34" charset="-122"/>
+                <a:cs typeface="Calibri" pitchFamily="34" charset="-120"/>
+              </a:rPr>
+              <a:t>2.  Segurança em produção
+</a:t>
+            </a:r>
             <a:pPr indent="0" marL="0">
               <a:buNone/>
             </a:pPr>
             <a:r>
-              <a:rPr lang="en-US" sz="1600" b="1" dirty="0">
-                <a:solidFill>
-                  <a:srgbClr val="003366"/>
-                </a:solidFill>
-                <a:latin typeface="Calibri" pitchFamily="34" charset="0"/>
-                <a:ea typeface="Calibri" pitchFamily="34" charset="-122"/>
-                <a:cs typeface="Calibri" pitchFamily="34" charset="-120"/>
-              </a:rPr>
-              <a:t>Flexibilidade</a:t>
-            </a:r>
-            <a:endParaRPr lang="en-US" sz="1600" dirty="0"/>
-          </a:p>
-        </p:txBody>
-      </p:sp>
-      <p:sp>
-        <p:nvSpPr>
-          <p:cNvPr id="33" name="Text 30"/>
-          <p:cNvSpPr/>
-          <p:nvPr/>
-        </p:nvSpPr>
-        <p:spPr>
-          <a:xfrm>
-            <a:off x="8293608" y="4608576"/>
-            <a:ext cx="3209544" cy="731520"/>
+              <a:rPr lang="en-US" sz="1200" dirty="0">
+                <a:solidFill>
+                  <a:srgbClr val="1F2937"/>
+                </a:solidFill>
+                <a:latin typeface="Calibri" pitchFamily="34" charset="0"/>
+                <a:ea typeface="Calibri" pitchFamily="34" charset="-122"/>
+                <a:cs typeface="Calibri" pitchFamily="34" charset="-120"/>
+              </a:rPr>
+              <a:t>Falta auditoria pós-deploy e ajuste com tráfego real</a:t>
+            </a:r>
+            <a:endParaRPr lang="en-US" sz="1350" dirty="0"/>
+          </a:p>
+        </p:txBody>
+      </p:sp>
+      <p:sp>
+        <p:nvSpPr>
+          <p:cNvPr id="35" name="Text 32"/>
+          <p:cNvSpPr/>
+          <p:nvPr/>
+        </p:nvSpPr>
+        <p:spPr>
+          <a:xfrm>
+            <a:off x="7866888" y="5486400"/>
+            <a:ext cx="3361944" cy="822960"/>
           </a:xfrm>
           <a:prstGeom prst="rect">
             <a:avLst/>
@@ -3413,94 +3448,22 @@
               <a:buNone/>
             </a:pPr>
             <a:r>
-              <a:rPr lang="en-US" sz="1250" dirty="0">
-                <a:solidFill>
-                  <a:srgbClr val="55606E"/>
-                </a:solidFill>
-                <a:latin typeface="Calibri" pitchFamily="34" charset="0"/>
-                <a:ea typeface="Calibri" pitchFamily="34" charset="-122"/>
-                <a:cs typeface="Calibri" pitchFamily="34" charset="-120"/>
-              </a:rPr>
-              <a:t>Troca de modelo sem deploy, multi-provider de IA, biblioteca de prompts</a:t>
-            </a:r>
-            <a:endParaRPr lang="en-US" sz="1250" dirty="0"/>
-          </a:p>
-        </p:txBody>
-      </p:sp>
-      <p:sp>
-        <p:nvSpPr>
-          <p:cNvPr id="34" name="Shape 31"/>
-          <p:cNvSpPr/>
-          <p:nvPr/>
-        </p:nvSpPr>
-        <p:spPr>
-          <a:xfrm>
-            <a:off x="502920" y="5989320"/>
-            <a:ext cx="11183112" cy="457200"/>
-          </a:xfrm>
-          <a:prstGeom prst="roundRect">
-            <a:avLst>
-              <a:gd name="adj" fmla="val 32000"/>
-            </a:avLst>
-          </a:prstGeom>
-          <a:solidFill>
-            <a:srgbClr val="DDF0E3"/>
-          </a:solidFill>
-          <a:ln w="12700">
-            <a:solidFill>
-              <a:srgbClr val="E6E9EE"/>
-            </a:solidFill>
-            <a:prstDash val="solid"/>
-          </a:ln>
-          <a:effectLst>
-            <a:outerShdw sx="100000" sy="100000" kx="0" ky="0" algn="bl" rotWithShape="0" blurRad="9.230611469873665e+287" dist="5.538366881924197e+287" dir="Infinity">
-              <a:srgbClr val="9AA7B4">
-                <a:alpha val="Infinity"/>
-              </a:srgbClr>
-            </a:outerShdw>
-          </a:effectLst>
-        </p:spPr>
-      </p:sp>
-      <p:sp>
-        <p:nvSpPr>
-          <p:cNvPr id="35" name="Text 32"/>
-          <p:cNvSpPr/>
-          <p:nvPr/>
-        </p:nvSpPr>
-        <p:spPr>
-          <a:xfrm>
-            <a:off x="502920" y="5989320"/>
-            <a:ext cx="11183112" cy="457200"/>
-          </a:xfrm>
-          <a:prstGeom prst="rect">
-            <a:avLst/>
-          </a:prstGeom>
-          <a:noFill/>
-          <a:ln/>
-        </p:spPr>
-        <p:txBody>
-          <a:bodyPr wrap="square" rtlCol="0" anchor="ctr"/>
-          <a:lstStyle/>
-          <a:p>
-            <a:pPr algn="ctr" indent="0" marL="0">
-              <a:buNone/>
-            </a:pPr>
-            <a:r>
-              <a:rPr lang="en-US" sz="1400" b="1" dirty="0">
-                <a:solidFill>
-                  <a:srgbClr val="005923"/>
-                </a:solidFill>
-                <a:latin typeface="Calibri" pitchFamily="34" charset="0"/>
-                <a:ea typeface="Calibri" pitchFamily="34" charset="-122"/>
-                <a:cs typeface="Calibri" pitchFamily="34" charset="-120"/>
-              </a:rPr>
-              <a:t>O produto cresceu — e o plano acompanhou. </a:t>
-            </a:r>
-            <a:pPr algn="ctr" indent="0" marL="0">
-              <a:buNone/>
-            </a:pPr>
-            <a:r>
-              <a:rPr lang="en-US" sz="1300" dirty="0">
+              <a:rPr lang="en-US" sz="1350" b="1" dirty="0">
+                <a:solidFill>
+                  <a:srgbClr val="B85C00"/>
+                </a:solidFill>
+                <a:latin typeface="Calibri" pitchFamily="34" charset="0"/>
+                <a:ea typeface="Calibri" pitchFamily="34" charset="-122"/>
+                <a:cs typeface="Calibri" pitchFamily="34" charset="-120"/>
+              </a:rPr>
+              <a:t>3.  Infraestrutura
+</a:t>
+            </a:r>
+            <a:pPr indent="0" marL="0">
+              <a:buNone/>
+            </a:pPr>
+            <a:r>
+              <a:rPr lang="en-US" sz="1200" dirty="0">
                 <a:solidFill>
                   <a:srgbClr val="1F2937"/>
                 </a:solidFill>
@@ -3508,9 +3471,9 @@
                 <a:ea typeface="Calibri" pitchFamily="34" charset="-122"/>
                 <a:cs typeface="Calibri" pitchFamily="34" charset="-120"/>
               </a:rPr>
-              <a:t>Mais de 25 entregas fora do backlog original.</a:t>
-            </a:r>
-            <a:endParaRPr lang="en-US" sz="1400" dirty="0"/>
+              <a:t>Falta domínio (psp2.unb.br), DNS, certificado, backup</a:t>
+            </a:r>
+            <a:endParaRPr lang="en-US" sz="1350" dirty="0"/>
           </a:p>
         </p:txBody>
       </p:sp>
@@ -3594,7 +3557,7 @@
         <p:spPr>
           <a:xfrm>
             <a:off x="502920" y="292608"/>
-            <a:ext cx="1810512" cy="402336"/>
+            <a:ext cx="1463040" cy="402336"/>
           </a:xfrm>
           <a:prstGeom prst="rect">
             <a:avLst/>
@@ -3621,7 +3584,7 @@
         <p:spPr>
           <a:xfrm>
             <a:off x="502920" y="292608"/>
-            <a:ext cx="1810512" cy="402336"/>
+            <a:ext cx="1463040" cy="402336"/>
           </a:xfrm>
           <a:prstGeom prst="rect">
             <a:avLst/>
@@ -3645,7 +3608,7 @@
                 <a:ea typeface="Calibri" pitchFamily="34" charset="-122"/>
                 <a:cs typeface="Calibri" pitchFamily="34" charset="-120"/>
               </a:rPr>
-              <a:t>DIFICULDADES</a:t>
+              <a:t>PESQUISA</a:t>
             </a:r>
             <a:endParaRPr lang="en-US" sz="1550" dirty="0"/>
           </a:p>
@@ -3694,7 +3657,7 @@
           </a:solidFill>
           <a:ln/>
           <a:effectLst>
-            <a:outerShdw sx="100000" sy="100000" kx="0" ky="0" algn="bl" rotWithShape="0" blurRad="1.1722876566739555e+292" dist="7.033725940043731e+291" dir="Infinity">
+            <a:outerShdw sx="100000" sy="100000" kx="0" ky="0" algn="bl" rotWithShape="0" blurRad="Infinity" dist="Infinity" dir="Infinity">
               <a:srgbClr val="9AA7B4">
                 <a:alpha val="Infinity"/>
               </a:srgbClr>
@@ -3775,7 +3738,7 @@
                 <a:ea typeface="Calibri" pitchFamily="34" charset="-122"/>
                 <a:cs typeface="Calibri" pitchFamily="34" charset="-120"/>
               </a:rPr>
-              <a:t>OBSTÁCULOS · O QUE TRAVOU E O QUE FALTA</a:t>
+              <a:t>SPRINT 4 · ARTIGO</a:t>
             </a:r>
             <a:endParaRPr lang="en-US" sz="1650" dirty="0"/>
           </a:p>
@@ -3814,7 +3777,7 @@
                 <a:ea typeface="Calibri" pitchFamily="34" charset="-122"/>
                 <a:cs typeface="Calibri" pitchFamily="34" charset="-120"/>
               </a:rPr>
-              <a:t>Onde travamos — com honestidade</a:t>
+              <a:t>Artigo ENEGEP 2026 — pronto e honesto</a:t>
             </a:r>
             <a:endParaRPr lang="en-US" sz="3700" dirty="0"/>
           </a:p>
@@ -3828,80 +3791,28 @@
         </p:nvSpPr>
         <p:spPr>
           <a:xfrm>
-            <a:off x="502920" y="2286000"/>
-            <a:ext cx="3544824" cy="2286000"/>
-          </a:xfrm>
-          <a:prstGeom prst="rect">
-            <a:avLst/>
-          </a:prstGeom>
-          <a:solidFill>
-            <a:srgbClr val="FFFFFF"/>
-          </a:solidFill>
-          <a:ln w="12700">
-            <a:solidFill>
-              <a:srgbClr val="E6E9EE"/>
-            </a:solidFill>
-            <a:prstDash val="solid"/>
-          </a:ln>
-          <a:effectLst>
-            <a:outerShdw sx="100000" sy="100000" kx="0" ky="0" algn="bl" rotWithShape="0" blurRad="1.4888053239759236e+296" dist="8.932831943855538e+295" dir="Infinity">
-              <a:srgbClr val="9AA7B4">
-                <a:alpha val="Infinity"/>
-              </a:srgbClr>
-            </a:outerShdw>
-          </a:effectLst>
-        </p:spPr>
-      </p:sp>
-      <p:sp>
-        <p:nvSpPr>
-          <p:cNvPr id="11" name="Shape 8"/>
-          <p:cNvSpPr/>
-          <p:nvPr/>
-        </p:nvSpPr>
-        <p:spPr>
-          <a:xfrm>
-            <a:off x="502920" y="2286000"/>
-            <a:ext cx="68580" cy="2286000"/>
-          </a:xfrm>
-          <a:prstGeom prst="rect">
-            <a:avLst/>
-          </a:prstGeom>
-          <a:solidFill>
-            <a:srgbClr val="B85C00"/>
-          </a:solidFill>
-          <a:ln/>
-        </p:spPr>
-      </p:sp>
-      <p:sp>
-        <p:nvSpPr>
-          <p:cNvPr id="12" name="Shape 9"/>
-          <p:cNvSpPr/>
-          <p:nvPr/>
-        </p:nvSpPr>
-        <p:spPr>
-          <a:xfrm>
-            <a:off x="777240" y="2514600"/>
-            <a:ext cx="548640" cy="548640"/>
+            <a:off x="548640" y="2468880"/>
+            <a:ext cx="438912" cy="438912"/>
           </a:xfrm>
           <a:prstGeom prst="ellipse">
             <a:avLst/>
           </a:prstGeom>
           <a:solidFill>
-            <a:srgbClr val="FBE9D3"/>
-          </a:solidFill>
-          <a:ln/>
-        </p:spPr>
-      </p:sp>
-      <p:sp>
-        <p:nvSpPr>
-          <p:cNvPr id="13" name="Text 10"/>
-          <p:cNvSpPr/>
-          <p:nvPr/>
-        </p:nvSpPr>
-        <p:spPr>
-          <a:xfrm>
-            <a:off x="777240" y="2514600"/>
-            <a:ext cx="548640" cy="548640"/>
+            <a:srgbClr val="003366"/>
+          </a:solidFill>
+          <a:ln/>
+        </p:spPr>
+      </p:sp>
+      <p:sp>
+        <p:nvSpPr>
+          <p:cNvPr id="11" name="Text 8"/>
+          <p:cNvSpPr/>
+          <p:nvPr/>
+        </p:nvSpPr>
+        <p:spPr>
+          <a:xfrm>
+            <a:off x="548640" y="2468880"/>
+            <a:ext cx="438912" cy="438912"/>
           </a:xfrm>
           <a:prstGeom prst="rect">
             <a:avLst/>
@@ -3917,19 +3828,93 @@
               <a:buNone/>
             </a:pPr>
             <a:r>
-              <a:rPr lang="en-US" sz="2200" b="1" dirty="0">
-                <a:solidFill>
-                  <a:srgbClr val="B85C00"/>
-                </a:solidFill>
-                <a:latin typeface="Calibri" pitchFamily="34" charset="0"/>
-                <a:ea typeface="Calibri" pitchFamily="34" charset="-122"/>
-                <a:cs typeface="Calibri" pitchFamily="34" charset="-120"/>
-              </a:rPr>
-              <a:t>◆</a:t>
-            </a:r>
-            <a:endParaRPr lang="en-US" sz="2200" dirty="0"/>
-          </a:p>
-        </p:txBody>
+              <a:rPr lang="en-US" sz="1800" b="1" dirty="0">
+                <a:solidFill>
+                  <a:srgbClr val="FFFFFF"/>
+                </a:solidFill>
+                <a:latin typeface="Calibri" pitchFamily="34" charset="0"/>
+                <a:ea typeface="Calibri" pitchFamily="34" charset="-122"/>
+                <a:cs typeface="Calibri" pitchFamily="34" charset="-120"/>
+              </a:rPr>
+              <a:t>1</a:t>
+            </a:r>
+            <a:endParaRPr lang="en-US" sz="1800" dirty="0"/>
+          </a:p>
+        </p:txBody>
+      </p:sp>
+      <p:sp>
+        <p:nvSpPr>
+          <p:cNvPr id="12" name="Text 9"/>
+          <p:cNvSpPr/>
+          <p:nvPr/>
+        </p:nvSpPr>
+        <p:spPr>
+          <a:xfrm>
+            <a:off x="1143000" y="2423160"/>
+            <a:ext cx="5760720" cy="777240"/>
+          </a:xfrm>
+          <a:prstGeom prst="rect">
+            <a:avLst/>
+          </a:prstGeom>
+          <a:noFill/>
+          <a:ln/>
+        </p:spPr>
+        <p:txBody>
+          <a:bodyPr wrap="square" rtlCol="0" anchor="t"/>
+          <a:lstStyle/>
+          <a:p>
+            <a:pPr indent="0" marL="0">
+              <a:buNone/>
+            </a:pPr>
+            <a:r>
+              <a:rPr lang="en-US" sz="1700" b="1" dirty="0">
+                <a:solidFill>
+                  <a:srgbClr val="003366"/>
+                </a:solidFill>
+                <a:latin typeface="Calibri" pitchFamily="34" charset="0"/>
+                <a:ea typeface="Calibri" pitchFamily="34" charset="-122"/>
+                <a:cs typeface="Calibri" pitchFamily="34" charset="-120"/>
+              </a:rPr>
+              <a:t>Método Design Science Research
+</a:t>
+            </a:r>
+            <a:pPr indent="0" marL="0">
+              <a:buNone/>
+            </a:pPr>
+            <a:r>
+              <a:rPr lang="en-US" sz="1400" dirty="0">
+                <a:solidFill>
+                  <a:srgbClr val="1F2937"/>
+                </a:solidFill>
+                <a:latin typeface="Calibri" pitchFamily="34" charset="0"/>
+                <a:ea typeface="Calibri" pitchFamily="34" charset="-122"/>
+                <a:cs typeface="Calibri" pitchFamily="34" charset="-120"/>
+              </a:rPr>
+              <a:t>Artigo científico completo, com o protótipo funcional como artefato — o resultado principal do ciclo.</a:t>
+            </a:r>
+            <a:endParaRPr lang="en-US" sz="1700" dirty="0"/>
+          </a:p>
+        </p:txBody>
+      </p:sp>
+      <p:sp>
+        <p:nvSpPr>
+          <p:cNvPr id="13" name="Shape 10"/>
+          <p:cNvSpPr/>
+          <p:nvPr/>
+        </p:nvSpPr>
+        <p:spPr>
+          <a:xfrm>
+            <a:off x="548640" y="3337560"/>
+            <a:ext cx="438912" cy="438912"/>
+          </a:xfrm>
+          <a:prstGeom prst="ellipse">
+            <a:avLst/>
+          </a:prstGeom>
+          <a:solidFill>
+            <a:srgbClr val="003366"/>
+          </a:solidFill>
+          <a:ln/>
+        </p:spPr>
       </p:sp>
       <p:sp>
         <p:nvSpPr>
@@ -3939,8 +3924,8 @@
         </p:nvSpPr>
         <p:spPr>
           <a:xfrm>
-            <a:off x="777240" y="3154680"/>
-            <a:ext cx="3041904" cy="365760"/>
+            <a:off x="548640" y="3337560"/>
+            <a:ext cx="438912" cy="438912"/>
           </a:xfrm>
           <a:prstGeom prst="rect">
             <a:avLst/>
@@ -3952,6 +3937,45 @@
           <a:bodyPr wrap="square" rtlCol="0" anchor="ctr"/>
           <a:lstStyle/>
           <a:p>
+            <a:pPr algn="ctr" indent="0" marL="0">
+              <a:buNone/>
+            </a:pPr>
+            <a:r>
+              <a:rPr lang="en-US" sz="1800" b="1" dirty="0">
+                <a:solidFill>
+                  <a:srgbClr val="FFFFFF"/>
+                </a:solidFill>
+                <a:latin typeface="Calibri" pitchFamily="34" charset="0"/>
+                <a:ea typeface="Calibri" pitchFamily="34" charset="-122"/>
+                <a:cs typeface="Calibri" pitchFamily="34" charset="-120"/>
+              </a:rPr>
+              <a:t>2</a:t>
+            </a:r>
+            <a:endParaRPr lang="en-US" sz="1800" dirty="0"/>
+          </a:p>
+        </p:txBody>
+      </p:sp>
+      <p:sp>
+        <p:nvSpPr>
+          <p:cNvPr id="15" name="Text 12"/>
+          <p:cNvSpPr/>
+          <p:nvPr/>
+        </p:nvSpPr>
+        <p:spPr>
+          <a:xfrm>
+            <a:off x="1143000" y="3291840"/>
+            <a:ext cx="5760720" cy="777240"/>
+          </a:xfrm>
+          <a:prstGeom prst="rect">
+            <a:avLst/>
+          </a:prstGeom>
+          <a:noFill/>
+          <a:ln/>
+        </p:spPr>
+        <p:txBody>
+          <a:bodyPr wrap="square" rtlCol="0" anchor="t"/>
+          <a:lstStyle/>
+          <a:p>
             <a:pPr indent="0" marL="0">
               <a:buNone/>
             </a:pPr>
@@ -3964,7 +3988,22 @@
                 <a:ea typeface="Calibri" pitchFamily="34" charset="-122"/>
                 <a:cs typeface="Calibri" pitchFamily="34" charset="-120"/>
               </a:rPr>
-              <a:t>Backlog rígida</a:t>
+              <a:t>Padrão ABNT NBR 14724
+</a:t>
+            </a:r>
+            <a:pPr indent="0" marL="0">
+              <a:buNone/>
+            </a:pPr>
+            <a:r>
+              <a:rPr lang="en-US" sz="1400" dirty="0">
+                <a:solidFill>
+                  <a:srgbClr val="1F2937"/>
+                </a:solidFill>
+                <a:latin typeface="Calibri" pitchFamily="34" charset="0"/>
+                <a:ea typeface="Calibri" pitchFamily="34" charset="-122"/>
+                <a:cs typeface="Calibri" pitchFamily="34" charset="-120"/>
+              </a:rPr>
+              <a:t>Seis seções, ~14 páginas, formatação acadêmica revisada e pronta para submissão.</a:t>
             </a:r>
             <a:endParaRPr lang="en-US" sz="1700" dirty="0"/>
           </a:p>
@@ -3972,14 +4011,34 @@
       </p:sp>
       <p:sp>
         <p:nvSpPr>
-          <p:cNvPr id="15" name="Text 12"/>
-          <p:cNvSpPr/>
-          <p:nvPr/>
-        </p:nvSpPr>
-        <p:spPr>
-          <a:xfrm>
-            <a:off x="777240" y="3493008"/>
-            <a:ext cx="3041904" cy="274320"/>
+          <p:cNvPr id="16" name="Shape 13"/>
+          <p:cNvSpPr/>
+          <p:nvPr/>
+        </p:nvSpPr>
+        <p:spPr>
+          <a:xfrm>
+            <a:off x="548640" y="4206240"/>
+            <a:ext cx="438912" cy="438912"/>
+          </a:xfrm>
+          <a:prstGeom prst="ellipse">
+            <a:avLst/>
+          </a:prstGeom>
+          <a:solidFill>
+            <a:srgbClr val="003366"/>
+          </a:solidFill>
+          <a:ln/>
+        </p:spPr>
+      </p:sp>
+      <p:sp>
+        <p:nvSpPr>
+          <p:cNvPr id="17" name="Text 14"/>
+          <p:cNvSpPr/>
+          <p:nvPr/>
+        </p:nvSpPr>
+        <p:spPr>
+          <a:xfrm>
+            <a:off x="548640" y="4206240"/>
+            <a:ext cx="438912" cy="438912"/>
           </a:xfrm>
           <a:prstGeom prst="rect">
             <a:avLst/>
@@ -3991,50 +4050,65 @@
           <a:bodyPr wrap="square" rtlCol="0" anchor="ctr"/>
           <a:lstStyle/>
           <a:p>
+            <a:pPr algn="ctr" indent="0" marL="0">
+              <a:buNone/>
+            </a:pPr>
+            <a:r>
+              <a:rPr lang="en-US" sz="1800" b="1" dirty="0">
+                <a:solidFill>
+                  <a:srgbClr val="FFFFFF"/>
+                </a:solidFill>
+                <a:latin typeface="Calibri" pitchFamily="34" charset="0"/>
+                <a:ea typeface="Calibri" pitchFamily="34" charset="-122"/>
+                <a:cs typeface="Calibri" pitchFamily="34" charset="-120"/>
+              </a:rPr>
+              <a:t>3</a:t>
+            </a:r>
+            <a:endParaRPr lang="en-US" sz="1800" dirty="0"/>
+          </a:p>
+        </p:txBody>
+      </p:sp>
+      <p:sp>
+        <p:nvSpPr>
+          <p:cNvPr id="18" name="Text 15"/>
+          <p:cNvSpPr/>
+          <p:nvPr/>
+        </p:nvSpPr>
+        <p:spPr>
+          <a:xfrm>
+            <a:off x="1143000" y="4160520"/>
+            <a:ext cx="5760720" cy="777240"/>
+          </a:xfrm>
+          <a:prstGeom prst="rect">
+            <a:avLst/>
+          </a:prstGeom>
+          <a:noFill/>
+          <a:ln/>
+        </p:spPr>
+        <p:txBody>
+          <a:bodyPr wrap="square" rtlCol="0" anchor="t"/>
+          <a:lstStyle/>
+          <a:p>
             <a:pPr indent="0" marL="0">
               <a:buNone/>
             </a:pPr>
             <a:r>
-              <a:rPr lang="en-US" sz="1200" i="1" dirty="0">
-                <a:solidFill>
-                  <a:srgbClr val="B85C00"/>
-                </a:solidFill>
-                <a:latin typeface="Calibri" pitchFamily="34" charset="0"/>
-                <a:ea typeface="Calibri" pitchFamily="34" charset="-122"/>
-                <a:cs typeface="Calibri" pitchFamily="34" charset="-120"/>
-              </a:rPr>
-              <a:t>Resolvida pelo replanejamento</a:t>
-            </a:r>
-            <a:endParaRPr lang="en-US" sz="1200" dirty="0"/>
-          </a:p>
-        </p:txBody>
-      </p:sp>
-      <p:sp>
-        <p:nvSpPr>
-          <p:cNvPr id="16" name="Text 13"/>
-          <p:cNvSpPr/>
-          <p:nvPr/>
-        </p:nvSpPr>
-        <p:spPr>
-          <a:xfrm>
-            <a:off x="777240" y="3767328"/>
-            <a:ext cx="2996184" cy="777240"/>
-          </a:xfrm>
-          <a:prstGeom prst="rect">
-            <a:avLst/>
-          </a:prstGeom>
-          <a:noFill/>
-          <a:ln/>
-        </p:spPr>
-        <p:txBody>
-          <a:bodyPr wrap="square" rtlCol="0" anchor="t"/>
-          <a:lstStyle/>
-          <a:p>
+              <a:rPr lang="en-US" sz="1700" b="1" dirty="0">
+                <a:solidFill>
+                  <a:srgbClr val="003366"/>
+                </a:solidFill>
+                <a:latin typeface="Calibri" pitchFamily="34" charset="0"/>
+                <a:ea typeface="Calibri" pitchFamily="34" charset="-122"/>
+                <a:cs typeface="Calibri" pitchFamily="34" charset="-120"/>
+              </a:rPr>
+              <a:t>Artefato sintetizado
+</a:t>
+            </a:r>
             <a:pPr indent="0" marL="0">
               <a:buNone/>
             </a:pPr>
             <a:r>
-              <a:rPr lang="en-US" sz="1200" dirty="0">
+              <a:rPr lang="en-US" sz="1400" dirty="0">
                 <a:solidFill>
                   <a:srgbClr val="1F2937"/>
                 </a:solidFill>
@@ -4042,63 +4116,11 @@
                 <a:ea typeface="Calibri" pitchFamily="34" charset="-122"/>
                 <a:cs typeface="Calibri" pitchFamily="34" charset="-120"/>
               </a:rPr>
-              <a:t>Fechada cedo demais; o que o produto pedia virava "extra". O plano em 5 sprints corrigiu isso.</a:t>
-            </a:r>
-            <a:endParaRPr lang="en-US" sz="1200" dirty="0"/>
-          </a:p>
-        </p:txBody>
-      </p:sp>
-      <p:sp>
-        <p:nvSpPr>
-          <p:cNvPr id="17" name="Shape 14"/>
-          <p:cNvSpPr/>
-          <p:nvPr/>
-        </p:nvSpPr>
-        <p:spPr>
-          <a:xfrm>
-            <a:off x="4322064" y="2286000"/>
-            <a:ext cx="3544824" cy="2286000"/>
-          </a:xfrm>
-          <a:prstGeom prst="rect">
-            <a:avLst/>
-          </a:prstGeom>
-          <a:solidFill>
-            <a:srgbClr val="FFFFFF"/>
-          </a:solidFill>
-          <a:ln w="12700">
-            <a:solidFill>
-              <a:srgbClr val="E6E9EE"/>
-            </a:solidFill>
-            <a:prstDash val="solid"/>
-          </a:ln>
-          <a:effectLst>
-            <a:outerShdw sx="100000" sy="100000" kx="0" ky="0" algn="bl" rotWithShape="0" blurRad="1.890782761449423e+300" dist="1.1344696568696533e+300" dir="Infinity">
-              <a:srgbClr val="9AA7B4">
-                <a:alpha val="Infinity"/>
-              </a:srgbClr>
-            </a:outerShdw>
-          </a:effectLst>
-        </p:spPr>
-      </p:sp>
-      <p:sp>
-        <p:nvSpPr>
-          <p:cNvPr id="18" name="Shape 15"/>
-          <p:cNvSpPr/>
-          <p:nvPr/>
-        </p:nvSpPr>
-        <p:spPr>
-          <a:xfrm>
-            <a:off x="4322064" y="2286000"/>
-            <a:ext cx="68580" cy="2286000"/>
-          </a:xfrm>
-          <a:prstGeom prst="rect">
-            <a:avLst/>
-          </a:prstGeom>
-          <a:solidFill>
-            <a:srgbClr val="B85C00"/>
-          </a:solidFill>
-          <a:ln/>
-        </p:spPr>
+              <a:t>Componentes do protótipo de ponta a ponta consolidados na Tabela 1 do artigo.</a:t>
+            </a:r>
+            <a:endParaRPr lang="en-US" sz="1700" dirty="0"/>
+          </a:p>
+        </p:txBody>
       </p:sp>
       <p:sp>
         <p:nvSpPr>
@@ -4108,420 +4130,16 @@
         </p:nvSpPr>
         <p:spPr>
           <a:xfrm>
-            <a:off x="4596384" y="2514600"/>
-            <a:ext cx="548640" cy="548640"/>
-          </a:xfrm>
-          <a:prstGeom prst="ellipse">
-            <a:avLst/>
-          </a:prstGeom>
-          <a:solidFill>
-            <a:srgbClr val="FBE9D3"/>
-          </a:solidFill>
-          <a:ln/>
-        </p:spPr>
-      </p:sp>
-      <p:sp>
-        <p:nvSpPr>
-          <p:cNvPr id="20" name="Text 17"/>
-          <p:cNvSpPr/>
-          <p:nvPr/>
-        </p:nvSpPr>
-        <p:spPr>
-          <a:xfrm>
-            <a:off x="4596384" y="2514600"/>
-            <a:ext cx="548640" cy="548640"/>
-          </a:xfrm>
-          <a:prstGeom prst="rect">
-            <a:avLst/>
-          </a:prstGeom>
-          <a:noFill/>
-          <a:ln/>
-        </p:spPr>
-        <p:txBody>
-          <a:bodyPr wrap="square" rtlCol="0" anchor="ctr"/>
-          <a:lstStyle/>
-          <a:p>
-            <a:pPr algn="ctr" indent="0" marL="0">
-              <a:buNone/>
-            </a:pPr>
-            <a:r>
-              <a:rPr lang="en-US" sz="2200" b="1" dirty="0">
-                <a:solidFill>
-                  <a:srgbClr val="B85C00"/>
-                </a:solidFill>
-                <a:latin typeface="Calibri" pitchFamily="34" charset="0"/>
-                <a:ea typeface="Calibri" pitchFamily="34" charset="-122"/>
-                <a:cs typeface="Calibri" pitchFamily="34" charset="-120"/>
-              </a:rPr>
-              <a:t>$</a:t>
-            </a:r>
-            <a:endParaRPr lang="en-US" sz="2200" dirty="0"/>
-          </a:p>
-        </p:txBody>
-      </p:sp>
-      <p:sp>
-        <p:nvSpPr>
-          <p:cNvPr id="21" name="Text 18"/>
-          <p:cNvSpPr/>
-          <p:nvPr/>
-        </p:nvSpPr>
-        <p:spPr>
-          <a:xfrm>
-            <a:off x="4596384" y="3154680"/>
-            <a:ext cx="3041904" cy="365760"/>
-          </a:xfrm>
-          <a:prstGeom prst="rect">
-            <a:avLst/>
-          </a:prstGeom>
-          <a:noFill/>
-          <a:ln/>
-        </p:spPr>
-        <p:txBody>
-          <a:bodyPr wrap="square" rtlCol="0" anchor="ctr"/>
-          <a:lstStyle/>
-          <a:p>
-            <a:pPr indent="0" marL="0">
-              <a:buNone/>
-            </a:pPr>
-            <a:r>
-              <a:rPr lang="en-US" sz="1700" b="1" dirty="0">
-                <a:solidFill>
-                  <a:srgbClr val="003366"/>
-                </a:solidFill>
-                <a:latin typeface="Calibri" pitchFamily="34" charset="0"/>
-                <a:ea typeface="Calibri" pitchFamily="34" charset="-122"/>
-                <a:cs typeface="Calibri" pitchFamily="34" charset="-120"/>
-              </a:rPr>
-              <a:t>Sem verba para LLM</a:t>
-            </a:r>
-            <a:endParaRPr lang="en-US" sz="1700" dirty="0"/>
-          </a:p>
-        </p:txBody>
-      </p:sp>
-      <p:sp>
-        <p:nvSpPr>
-          <p:cNvPr id="22" name="Text 19"/>
-          <p:cNvSpPr/>
-          <p:nvPr/>
-        </p:nvSpPr>
-        <p:spPr>
-          <a:xfrm>
-            <a:off x="4596384" y="3493008"/>
-            <a:ext cx="3041904" cy="274320"/>
-          </a:xfrm>
-          <a:prstGeom prst="rect">
-            <a:avLst/>
-          </a:prstGeom>
-          <a:noFill/>
-          <a:ln/>
-        </p:spPr>
-        <p:txBody>
-          <a:bodyPr wrap="square" rtlCol="0" anchor="ctr"/>
-          <a:lstStyle/>
-          <a:p>
-            <a:pPr indent="0" marL="0">
-              <a:buNone/>
-            </a:pPr>
-            <a:r>
-              <a:rPr lang="en-US" sz="1200" i="1" dirty="0">
-                <a:solidFill>
-                  <a:srgbClr val="B85C00"/>
-                </a:solidFill>
-                <a:latin typeface="Calibri" pitchFamily="34" charset="0"/>
-                <a:ea typeface="Calibri" pitchFamily="34" charset="-122"/>
-                <a:cs typeface="Calibri" pitchFamily="34" charset="-120"/>
-              </a:rPr>
-              <a:t>Pipeline pronto, validação travada</a:t>
-            </a:r>
-            <a:endParaRPr lang="en-US" sz="1200" dirty="0"/>
-          </a:p>
-        </p:txBody>
-      </p:sp>
-      <p:sp>
-        <p:nvSpPr>
-          <p:cNvPr id="23" name="Text 20"/>
-          <p:cNvSpPr/>
-          <p:nvPr/>
-        </p:nvSpPr>
-        <p:spPr>
-          <a:xfrm>
-            <a:off x="4596384" y="3767328"/>
-            <a:ext cx="2996184" cy="777240"/>
-          </a:xfrm>
-          <a:prstGeom prst="rect">
-            <a:avLst/>
-          </a:prstGeom>
-          <a:noFill/>
-          <a:ln/>
-        </p:spPr>
-        <p:txBody>
-          <a:bodyPr wrap="square" rtlCol="0" anchor="t"/>
-          <a:lstStyle/>
-          <a:p>
-            <a:pPr indent="0" marL="0">
-              <a:buNone/>
-            </a:pPr>
-            <a:r>
-              <a:rPr lang="en-US" sz="1200" dirty="0">
-                <a:solidFill>
-                  <a:srgbClr val="1F2937"/>
-                </a:solidFill>
-                <a:latin typeface="Calibri" pitchFamily="34" charset="0"/>
-                <a:ea typeface="Calibri" pitchFamily="34" charset="-122"/>
-                <a:cs typeface="Calibri" pitchFamily="34" charset="-120"/>
-              </a:rPr>
-              <a:t>Rodar o teste de 50 documentos consome créditos de IA. Sem orçamento, a métrica oficial (≥80%) ficou em espera.</a:t>
-            </a:r>
-            <a:endParaRPr lang="en-US" sz="1200" dirty="0"/>
-          </a:p>
-        </p:txBody>
-      </p:sp>
-      <p:sp>
-        <p:nvSpPr>
-          <p:cNvPr id="24" name="Shape 21"/>
-          <p:cNvSpPr/>
-          <p:nvPr/>
-        </p:nvSpPr>
-        <p:spPr>
-          <a:xfrm>
-            <a:off x="8141208" y="2286000"/>
-            <a:ext cx="3544824" cy="2286000"/>
-          </a:xfrm>
-          <a:prstGeom prst="rect">
-            <a:avLst/>
-          </a:prstGeom>
-          <a:solidFill>
-            <a:srgbClr val="FFFFFF"/>
-          </a:solidFill>
-          <a:ln w="12700">
-            <a:solidFill>
-              <a:srgbClr val="E6E9EE"/>
-            </a:solidFill>
-            <a:prstDash val="solid"/>
-          </a:ln>
-          <a:effectLst>
-            <a:outerShdw sx="100000" sy="100000" kx="0" ky="0" algn="bl" rotWithShape="0" blurRad="2.4012941070407674e+304" dist="1.4407764642244596e+304" dir="Infinity">
-              <a:srgbClr val="9AA7B4">
-                <a:alpha val="Infinity"/>
-              </a:srgbClr>
-            </a:outerShdw>
-          </a:effectLst>
-        </p:spPr>
-      </p:sp>
-      <p:sp>
-        <p:nvSpPr>
-          <p:cNvPr id="25" name="Shape 22"/>
-          <p:cNvSpPr/>
-          <p:nvPr/>
-        </p:nvSpPr>
-        <p:spPr>
-          <a:xfrm>
-            <a:off x="8141208" y="2286000"/>
-            <a:ext cx="68580" cy="2286000"/>
-          </a:xfrm>
-          <a:prstGeom prst="rect">
-            <a:avLst/>
-          </a:prstGeom>
-          <a:solidFill>
-            <a:srgbClr val="B85C00"/>
-          </a:solidFill>
-          <a:ln/>
-        </p:spPr>
-      </p:sp>
-      <p:sp>
-        <p:nvSpPr>
-          <p:cNvPr id="26" name="Shape 23"/>
-          <p:cNvSpPr/>
-          <p:nvPr/>
-        </p:nvSpPr>
-        <p:spPr>
-          <a:xfrm>
-            <a:off x="8415528" y="2514600"/>
-            <a:ext cx="548640" cy="548640"/>
-          </a:xfrm>
-          <a:prstGeom prst="ellipse">
-            <a:avLst/>
-          </a:prstGeom>
-          <a:solidFill>
-            <a:srgbClr val="FBE9D3"/>
-          </a:solidFill>
-          <a:ln/>
-        </p:spPr>
-      </p:sp>
-      <p:sp>
-        <p:nvSpPr>
-          <p:cNvPr id="27" name="Text 24"/>
-          <p:cNvSpPr/>
-          <p:nvPr/>
-        </p:nvSpPr>
-        <p:spPr>
-          <a:xfrm>
-            <a:off x="8415528" y="2514600"/>
-            <a:ext cx="548640" cy="548640"/>
-          </a:xfrm>
-          <a:prstGeom prst="rect">
-            <a:avLst/>
-          </a:prstGeom>
-          <a:noFill/>
-          <a:ln/>
-        </p:spPr>
-        <p:txBody>
-          <a:bodyPr wrap="square" rtlCol="0" anchor="ctr"/>
-          <a:lstStyle/>
-          <a:p>
-            <a:pPr algn="ctr" indent="0" marL="0">
-              <a:buNone/>
-            </a:pPr>
-            <a:r>
-              <a:rPr lang="en-US" sz="2200" b="1" dirty="0">
-                <a:solidFill>
-                  <a:srgbClr val="B85C00"/>
-                </a:solidFill>
-                <a:latin typeface="Calibri" pitchFamily="34" charset="0"/>
-                <a:ea typeface="Calibri" pitchFamily="34" charset="-122"/>
-                <a:cs typeface="Calibri" pitchFamily="34" charset="-120"/>
-              </a:rPr>
-              <a:t>☁</a:t>
-            </a:r>
-            <a:endParaRPr lang="en-US" sz="2200" dirty="0"/>
-          </a:p>
-        </p:txBody>
-      </p:sp>
-      <p:sp>
-        <p:nvSpPr>
-          <p:cNvPr id="28" name="Text 25"/>
-          <p:cNvSpPr/>
-          <p:nvPr/>
-        </p:nvSpPr>
-        <p:spPr>
-          <a:xfrm>
-            <a:off x="8415528" y="3154680"/>
-            <a:ext cx="3041904" cy="365760"/>
-          </a:xfrm>
-          <a:prstGeom prst="rect">
-            <a:avLst/>
-          </a:prstGeom>
-          <a:noFill/>
-          <a:ln/>
-        </p:spPr>
-        <p:txBody>
-          <a:bodyPr wrap="square" rtlCol="0" anchor="ctr"/>
-          <a:lstStyle/>
-          <a:p>
-            <a:pPr indent="0" marL="0">
-              <a:buNone/>
-            </a:pPr>
-            <a:r>
-              <a:rPr lang="en-US" sz="1700" b="1" dirty="0">
-                <a:solidFill>
-                  <a:srgbClr val="003366"/>
-                </a:solidFill>
-                <a:latin typeface="Calibri" pitchFamily="34" charset="0"/>
-                <a:ea typeface="Calibri" pitchFamily="34" charset="-122"/>
-                <a:cs typeface="Calibri" pitchFamily="34" charset="-120"/>
-              </a:rPr>
-              <a:t>Sem verba para deploy</a:t>
-            </a:r>
-            <a:endParaRPr lang="en-US" sz="1700" dirty="0"/>
-          </a:p>
-        </p:txBody>
-      </p:sp>
-      <p:sp>
-        <p:nvSpPr>
-          <p:cNvPr id="29" name="Text 26"/>
-          <p:cNvSpPr/>
-          <p:nvPr/>
-        </p:nvSpPr>
-        <p:spPr>
-          <a:xfrm>
-            <a:off x="8415528" y="3493008"/>
-            <a:ext cx="3041904" cy="274320"/>
-          </a:xfrm>
-          <a:prstGeom prst="rect">
-            <a:avLst/>
-          </a:prstGeom>
-          <a:noFill/>
-          <a:ln/>
-        </p:spPr>
-        <p:txBody>
-          <a:bodyPr wrap="square" rtlCol="0" anchor="ctr"/>
-          <a:lstStyle/>
-          <a:p>
-            <a:pPr indent="0" marL="0">
-              <a:buNone/>
-            </a:pPr>
-            <a:r>
-              <a:rPr lang="en-US" sz="1200" i="1" dirty="0">
-                <a:solidFill>
-                  <a:srgbClr val="B85C00"/>
-                </a:solidFill>
-                <a:latin typeface="Calibri" pitchFamily="34" charset="0"/>
-                <a:ea typeface="Calibri" pitchFamily="34" charset="-122"/>
-                <a:cs typeface="Calibri" pitchFamily="34" charset="-120"/>
-              </a:rPr>
-              <a:t>Produto pronto, público sem acesso</a:t>
-            </a:r>
-            <a:endParaRPr lang="en-US" sz="1200" dirty="0"/>
-          </a:p>
-        </p:txBody>
-      </p:sp>
-      <p:sp>
-        <p:nvSpPr>
-          <p:cNvPr id="30" name="Text 27"/>
-          <p:cNvSpPr/>
-          <p:nvPr/>
-        </p:nvSpPr>
-        <p:spPr>
-          <a:xfrm>
-            <a:off x="8415528" y="3767328"/>
-            <a:ext cx="2996184" cy="777240"/>
-          </a:xfrm>
-          <a:prstGeom prst="rect">
-            <a:avLst/>
-          </a:prstGeom>
-          <a:noFill/>
-          <a:ln/>
-        </p:spPr>
-        <p:txBody>
-          <a:bodyPr wrap="square" rtlCol="0" anchor="t"/>
-          <a:lstStyle/>
-          <a:p>
-            <a:pPr indent="0" marL="0">
-              <a:buNone/>
-            </a:pPr>
-            <a:r>
-              <a:rPr lang="en-US" sz="1200" dirty="0">
-                <a:solidFill>
-                  <a:srgbClr val="1F2937"/>
-                </a:solidFill>
-                <a:latin typeface="Calibri" pitchFamily="34" charset="0"/>
-                <a:ea typeface="Calibri" pitchFamily="34" charset="-122"/>
-                <a:cs typeface="Calibri" pitchFamily="34" charset="-120"/>
-              </a:rPr>
-              <a:t>Sem Supabase Pro + domínio, não há URL pública — e sem isso, os testes com alunos reais não rodam.</a:t>
-            </a:r>
-            <a:endParaRPr lang="en-US" sz="1200" dirty="0"/>
-          </a:p>
-        </p:txBody>
-      </p:sp>
-      <p:sp>
-        <p:nvSpPr>
-          <p:cNvPr id="31" name="Shape 28"/>
-          <p:cNvSpPr/>
-          <p:nvPr/>
-        </p:nvSpPr>
-        <p:spPr>
-          <a:xfrm>
-            <a:off x="502920" y="4937760"/>
-            <a:ext cx="11183112" cy="1463040"/>
+            <a:off x="7406640" y="2468880"/>
+            <a:ext cx="4279392" cy="2606040"/>
           </a:xfrm>
           <a:prstGeom prst="roundRect">
             <a:avLst>
-              <a:gd name="adj" fmla="val 3125"/>
+              <a:gd name="adj" fmla="val 2105"/>
             </a:avLst>
           </a:prstGeom>
           <a:solidFill>
-            <a:srgbClr val="FBE9D3"/>
+            <a:srgbClr val="DDF0E3"/>
           </a:solidFill>
           <a:ln w="12700">
             <a:solidFill>
@@ -4540,14 +4158,38 @@
       </p:sp>
       <p:sp>
         <p:nvSpPr>
-          <p:cNvPr id="32" name="Text 29"/>
-          <p:cNvSpPr/>
-          <p:nvPr/>
-        </p:nvSpPr>
-        <p:spPr>
-          <a:xfrm>
-            <a:off x="777240" y="5074920"/>
-            <a:ext cx="10607040" cy="365760"/>
+          <p:cNvPr id="20" name="Shape 17"/>
+          <p:cNvSpPr/>
+          <p:nvPr/>
+        </p:nvSpPr>
+        <p:spPr>
+          <a:xfrm>
+            <a:off x="7406640" y="2468880"/>
+            <a:ext cx="4279392" cy="2606040"/>
+          </a:xfrm>
+          <a:prstGeom prst="roundRect">
+            <a:avLst>
+              <a:gd name="adj" fmla="val 2105"/>
+            </a:avLst>
+          </a:prstGeom>
+          <a:ln w="19050">
+            <a:solidFill>
+              <a:srgbClr val="008542"/>
+            </a:solidFill>
+            <a:prstDash val="solid"/>
+          </a:ln>
+        </p:spPr>
+      </p:sp>
+      <p:sp>
+        <p:nvSpPr>
+          <p:cNvPr id="21" name="Text 18"/>
+          <p:cNvSpPr/>
+          <p:nvPr/>
+        </p:nvSpPr>
+        <p:spPr>
+          <a:xfrm>
+            <a:off x="7680960" y="2697480"/>
+            <a:ext cx="3749040" cy="365760"/>
           </a:xfrm>
           <a:prstGeom prst="rect">
             <a:avLst/>
@@ -4563,7 +4205,46 @@
               <a:buNone/>
             </a:pPr>
             <a:r>
-              <a:rPr lang="en-US" sz="1500" b="1" dirty="0">
+              <a:rPr lang="en-US" sz="1400" b="1" dirty="0">
+                <a:solidFill>
+                  <a:srgbClr val="005923"/>
+                </a:solidFill>
+                <a:latin typeface="Calibri" pitchFamily="34" charset="0"/>
+                <a:ea typeface="Calibri" pitchFamily="34" charset="-122"/>
+                <a:cs typeface="Calibri" pitchFamily="34" charset="-120"/>
+              </a:rPr>
+              <a:t>INTEGRIDADE METODOLÓGICA</a:t>
+            </a:r>
+            <a:endParaRPr lang="en-US" sz="1400" dirty="0"/>
+          </a:p>
+        </p:txBody>
+      </p:sp>
+      <p:sp>
+        <p:nvSpPr>
+          <p:cNvPr id="22" name="Text 19"/>
+          <p:cNvSpPr/>
+          <p:nvPr/>
+        </p:nvSpPr>
+        <p:spPr>
+          <a:xfrm>
+            <a:off x="7680960" y="3154680"/>
+            <a:ext cx="3749040" cy="914400"/>
+          </a:xfrm>
+          <a:prstGeom prst="rect">
+            <a:avLst/>
+          </a:prstGeom>
+          <a:noFill/>
+          <a:ln/>
+        </p:spPr>
+        <p:txBody>
+          <a:bodyPr wrap="square" rtlCol="0" anchor="t"/>
+          <a:lstStyle/>
+          <a:p>
+            <a:pPr indent="0" marL="0">
+              <a:buNone/>
+            </a:pPr>
+            <a:r>
+              <a:rPr lang="en-US" sz="1600" b="1" dirty="0">
                 <a:solidFill>
                   <a:srgbClr val="003366"/>
                 </a:solidFill>
@@ -4571,22 +4252,22 @@
                 <a:ea typeface="Calibri" pitchFamily="34" charset="-122"/>
                 <a:cs typeface="Calibri" pitchFamily="34" charset="-120"/>
               </a:rPr>
-              <a:t>Lacunas conhecidas — o que precisa ser endereçado</a:t>
-            </a:r>
-            <a:endParaRPr lang="en-US" sz="1500" dirty="0"/>
-          </a:p>
-        </p:txBody>
-      </p:sp>
-      <p:sp>
-        <p:nvSpPr>
-          <p:cNvPr id="33" name="Text 30"/>
-          <p:cNvSpPr/>
-          <p:nvPr/>
-        </p:nvSpPr>
-        <p:spPr>
-          <a:xfrm>
-            <a:off x="777240" y="5486400"/>
-            <a:ext cx="3361944" cy="822960"/>
+              <a:t>A avaliação com usuários (SUS, TAM) é reportada como planejada, não executada.</a:t>
+            </a:r>
+            <a:endParaRPr lang="en-US" sz="1600" dirty="0"/>
+          </a:p>
+        </p:txBody>
+      </p:sp>
+      <p:sp>
+        <p:nvSpPr>
+          <p:cNvPr id="23" name="Text 20"/>
+          <p:cNvSpPr/>
+          <p:nvPr/>
+        </p:nvSpPr>
+        <p:spPr>
+          <a:xfrm>
+            <a:off x="7680960" y="4160520"/>
+            <a:ext cx="3749040" cy="822960"/>
           </a:xfrm>
           <a:prstGeom prst="rect">
             <a:avLst/>
@@ -4602,146 +4283,82 @@
               <a:buNone/>
             </a:pPr>
             <a:r>
-              <a:rPr lang="en-US" sz="1350" b="1" dirty="0">
-                <a:solidFill>
-                  <a:srgbClr val="B85C00"/>
-                </a:solidFill>
-                <a:latin typeface="Calibri" pitchFamily="34" charset="0"/>
-                <a:ea typeface="Calibri" pitchFamily="34" charset="-122"/>
-                <a:cs typeface="Calibri" pitchFamily="34" charset="-120"/>
-              </a:rPr>
-              <a:t>1.  Logs &amp; observabilidade
-</a:t>
-            </a:r>
+              <a:rPr lang="en-US" sz="1300" dirty="0">
+                <a:solidFill>
+                  <a:srgbClr val="55606E"/>
+                </a:solidFill>
+                <a:latin typeface="Calibri" pitchFamily="34" charset="0"/>
+                <a:ea typeface="Calibri" pitchFamily="34" charset="-122"/>
+                <a:cs typeface="Calibri" pitchFamily="34" charset="-120"/>
+              </a:rPr>
+              <a:t>Sem dados fabricados — o que não foi medido não é apresentado como resultado.</a:t>
+            </a:r>
+            <a:endParaRPr lang="en-US" sz="1300" dirty="0"/>
+          </a:p>
+        </p:txBody>
+      </p:sp>
+      <p:sp>
+        <p:nvSpPr>
+          <p:cNvPr id="24" name="Shape 21"/>
+          <p:cNvSpPr/>
+          <p:nvPr/>
+        </p:nvSpPr>
+        <p:spPr>
+          <a:xfrm>
+            <a:off x="502920" y="6336792"/>
+            <a:ext cx="548640" cy="45720"/>
+          </a:xfrm>
+          <a:prstGeom prst="rect">
+            <a:avLst/>
+          </a:prstGeom>
+          <a:solidFill>
+            <a:srgbClr val="008542"/>
+          </a:solidFill>
+          <a:ln/>
+        </p:spPr>
+      </p:sp>
+      <p:sp>
+        <p:nvSpPr>
+          <p:cNvPr id="25" name="Text 22"/>
+          <p:cNvSpPr/>
+          <p:nvPr/>
+        </p:nvSpPr>
+        <p:spPr>
+          <a:xfrm>
+            <a:off x="502920" y="6400800"/>
+            <a:ext cx="10058400" cy="365760"/>
+          </a:xfrm>
+          <a:prstGeom prst="rect">
+            <a:avLst/>
+          </a:prstGeom>
+          <a:noFill/>
+          <a:ln/>
+        </p:spPr>
+        <p:txBody>
+          <a:bodyPr wrap="square" rtlCol="0" anchor="ctr"/>
+          <a:lstStyle/>
+          <a:p>
             <a:pPr indent="0" marL="0">
               <a:buNone/>
             </a:pPr>
             <a:r>
-              <a:rPr lang="en-US" sz="1200" dirty="0">
-                <a:solidFill>
-                  <a:srgbClr val="1F2937"/>
-                </a:solidFill>
-                <a:latin typeface="Calibri" pitchFamily="34" charset="0"/>
-                <a:ea typeface="Calibri" pitchFamily="34" charset="-122"/>
-                <a:cs typeface="Calibri" pitchFamily="34" charset="-120"/>
-              </a:rPr>
-              <a:t>Falta painel central de erros, custo e latência</a:t>
-            </a:r>
-            <a:endParaRPr lang="en-US" sz="1350" dirty="0"/>
-          </a:p>
-        </p:txBody>
-      </p:sp>
-      <p:sp>
-        <p:nvSpPr>
-          <p:cNvPr id="34" name="Text 31"/>
-          <p:cNvSpPr/>
-          <p:nvPr/>
-        </p:nvSpPr>
-        <p:spPr>
-          <a:xfrm>
-            <a:off x="4322064" y="5486400"/>
-            <a:ext cx="3361944" cy="822960"/>
-          </a:xfrm>
-          <a:prstGeom prst="rect">
-            <a:avLst/>
-          </a:prstGeom>
-          <a:noFill/>
-          <a:ln/>
-        </p:spPr>
-        <p:txBody>
-          <a:bodyPr wrap="square" rtlCol="0" anchor="t"/>
-          <a:lstStyle/>
-          <a:p>
-            <a:pPr indent="0" marL="0">
-              <a:buNone/>
-            </a:pPr>
-            <a:r>
-              <a:rPr lang="en-US" sz="1350" b="1" dirty="0">
-                <a:solidFill>
-                  <a:srgbClr val="B85C00"/>
-                </a:solidFill>
-                <a:latin typeface="Calibri" pitchFamily="34" charset="0"/>
-                <a:ea typeface="Calibri" pitchFamily="34" charset="-122"/>
-                <a:cs typeface="Calibri" pitchFamily="34" charset="-120"/>
-              </a:rPr>
-              <a:t>2.  Segurança em produção
-</a:t>
-            </a:r>
-            <a:pPr indent="0" marL="0">
-              <a:buNone/>
-            </a:pPr>
-            <a:r>
-              <a:rPr lang="en-US" sz="1200" dirty="0">
-                <a:solidFill>
-                  <a:srgbClr val="1F2937"/>
-                </a:solidFill>
-                <a:latin typeface="Calibri" pitchFamily="34" charset="0"/>
-                <a:ea typeface="Calibri" pitchFamily="34" charset="-122"/>
-                <a:cs typeface="Calibri" pitchFamily="34" charset="-120"/>
-              </a:rPr>
-              <a:t>Falta auditoria pós-deploy e ajuste com tráfego real</a:t>
-            </a:r>
-            <a:endParaRPr lang="en-US" sz="1350" dirty="0"/>
-          </a:p>
-        </p:txBody>
-      </p:sp>
-      <p:sp>
-        <p:nvSpPr>
-          <p:cNvPr id="35" name="Text 32"/>
-          <p:cNvSpPr/>
-          <p:nvPr/>
-        </p:nvSpPr>
-        <p:spPr>
-          <a:xfrm>
-            <a:off x="7866888" y="5486400"/>
-            <a:ext cx="3361944" cy="822960"/>
-          </a:xfrm>
-          <a:prstGeom prst="rect">
-            <a:avLst/>
-          </a:prstGeom>
-          <a:noFill/>
-          <a:ln/>
-        </p:spPr>
-        <p:txBody>
-          <a:bodyPr wrap="square" rtlCol="0" anchor="t"/>
-          <a:lstStyle/>
-          <a:p>
-            <a:pPr indent="0" marL="0">
-              <a:buNone/>
-            </a:pPr>
-            <a:r>
-              <a:rPr lang="en-US" sz="1350" b="1" dirty="0">
-                <a:solidFill>
-                  <a:srgbClr val="B85C00"/>
-                </a:solidFill>
-                <a:latin typeface="Calibri" pitchFamily="34" charset="0"/>
-                <a:ea typeface="Calibri" pitchFamily="34" charset="-122"/>
-                <a:cs typeface="Calibri" pitchFamily="34" charset="-120"/>
-              </a:rPr>
-              <a:t>3.  Infraestrutura
-</a:t>
-            </a:r>
-            <a:pPr indent="0" marL="0">
-              <a:buNone/>
-            </a:pPr>
-            <a:r>
-              <a:rPr lang="en-US" sz="1200" dirty="0">
-                <a:solidFill>
-                  <a:srgbClr val="1F2937"/>
-                </a:solidFill>
-                <a:latin typeface="Calibri" pitchFamily="34" charset="0"/>
-                <a:ea typeface="Calibri" pitchFamily="34" charset="-122"/>
-                <a:cs typeface="Calibri" pitchFamily="34" charset="-120"/>
-              </a:rPr>
-              <a:t>Falta domínio (psp2.unb.br), DNS, certificado, backup</a:t>
-            </a:r>
-            <a:endParaRPr lang="en-US" sz="1350" dirty="0"/>
-          </a:p>
-        </p:txBody>
-      </p:sp>
-      <p:sp>
-        <p:nvSpPr>
-          <p:cNvPr id="36" name="Text 33"/>
+              <a:rPr lang="en-US" sz="1700" b="1" dirty="0">
+                <a:solidFill>
+                  <a:srgbClr val="003366"/>
+                </a:solidFill>
+                <a:latin typeface="Calibri" pitchFamily="34" charset="0"/>
+                <a:ea typeface="Calibri" pitchFamily="34" charset="-122"/>
+                <a:cs typeface="Calibri" pitchFamily="34" charset="-120"/>
+              </a:rPr>
+              <a:t>Honestidade vale mais que número inventado.</a:t>
+            </a:r>
+            <a:endParaRPr lang="en-US" sz="1700" dirty="0"/>
+          </a:p>
+        </p:txBody>
+      </p:sp>
+      <p:sp>
+        <p:nvSpPr>
+          <p:cNvPr id="26" name="Text 23"/>
           <p:cNvSpPr/>
           <p:nvPr/>
         </p:nvSpPr>
@@ -4870,7 +4487,7 @@
                 <a:ea typeface="Calibri" pitchFamily="34" charset="-122"/>
                 <a:cs typeface="Calibri" pitchFamily="34" charset="-120"/>
               </a:rPr>
-              <a:t>PESQUISA</a:t>
+              <a:t>JORNADA</a:t>
             </a:r>
             <a:endParaRPr lang="en-US" sz="1550" dirty="0"/>
           </a:p>
@@ -5000,7 +4617,7 @@
                 <a:ea typeface="Calibri" pitchFamily="34" charset="-122"/>
                 <a:cs typeface="Calibri" pitchFamily="34" charset="-120"/>
               </a:rPr>
-              <a:t>SPRINT 4 · ARTIGO</a:t>
+              <a:t>SPRINT 5 · EXPERIÊNCIA DO ALUNO</a:t>
             </a:r>
             <a:endParaRPr lang="en-US" sz="1650" dirty="0"/>
           </a:p>
@@ -5039,7 +4656,7 @@
                 <a:ea typeface="Calibri" pitchFamily="34" charset="-122"/>
                 <a:cs typeface="Calibri" pitchFamily="34" charset="-120"/>
               </a:rPr>
-              <a:t>Artigo ENEGEP 2026 — pronto e honesto</a:t>
+              <a:t>A jornada completa do aluno, ponta a ponta</a:t>
             </a:r>
             <a:endParaRPr lang="en-US" sz="3700" dirty="0"/>
           </a:p>
@@ -5053,355 +4670,14 @@
         </p:nvSpPr>
         <p:spPr>
           <a:xfrm>
-            <a:off x="548640" y="2468880"/>
-            <a:ext cx="438912" cy="438912"/>
-          </a:xfrm>
-          <a:prstGeom prst="ellipse">
-            <a:avLst/>
-          </a:prstGeom>
-          <a:solidFill>
-            <a:srgbClr val="003366"/>
-          </a:solidFill>
-          <a:ln/>
-        </p:spPr>
-      </p:sp>
-      <p:sp>
-        <p:nvSpPr>
-          <p:cNvPr id="11" name="Text 8"/>
-          <p:cNvSpPr/>
-          <p:nvPr/>
-        </p:nvSpPr>
-        <p:spPr>
-          <a:xfrm>
-            <a:off x="548640" y="2468880"/>
-            <a:ext cx="438912" cy="438912"/>
-          </a:xfrm>
-          <a:prstGeom prst="rect">
-            <a:avLst/>
-          </a:prstGeom>
-          <a:noFill/>
-          <a:ln/>
-        </p:spPr>
-        <p:txBody>
-          <a:bodyPr wrap="square" rtlCol="0" anchor="ctr"/>
-          <a:lstStyle/>
-          <a:p>
-            <a:pPr algn="ctr" indent="0" marL="0">
-              <a:buNone/>
-            </a:pPr>
-            <a:r>
-              <a:rPr lang="en-US" sz="1800" b="1" dirty="0">
-                <a:solidFill>
-                  <a:srgbClr val="FFFFFF"/>
-                </a:solidFill>
-                <a:latin typeface="Calibri" pitchFamily="34" charset="0"/>
-                <a:ea typeface="Calibri" pitchFamily="34" charset="-122"/>
-                <a:cs typeface="Calibri" pitchFamily="34" charset="-120"/>
-              </a:rPr>
-              <a:t>1</a:t>
-            </a:r>
-            <a:endParaRPr lang="en-US" sz="1800" dirty="0"/>
-          </a:p>
-        </p:txBody>
-      </p:sp>
-      <p:sp>
-        <p:nvSpPr>
-          <p:cNvPr id="12" name="Text 9"/>
-          <p:cNvSpPr/>
-          <p:nvPr/>
-        </p:nvSpPr>
-        <p:spPr>
-          <a:xfrm>
-            <a:off x="1143000" y="2423160"/>
-            <a:ext cx="5760720" cy="777240"/>
-          </a:xfrm>
-          <a:prstGeom prst="rect">
-            <a:avLst/>
-          </a:prstGeom>
-          <a:noFill/>
-          <a:ln/>
-        </p:spPr>
-        <p:txBody>
-          <a:bodyPr wrap="square" rtlCol="0" anchor="t"/>
-          <a:lstStyle/>
-          <a:p>
-            <a:pPr indent="0" marL="0">
-              <a:buNone/>
-            </a:pPr>
-            <a:r>
-              <a:rPr lang="en-US" sz="1700" b="1" dirty="0">
-                <a:solidFill>
-                  <a:srgbClr val="003366"/>
-                </a:solidFill>
-                <a:latin typeface="Calibri" pitchFamily="34" charset="0"/>
-                <a:ea typeface="Calibri" pitchFamily="34" charset="-122"/>
-                <a:cs typeface="Calibri" pitchFamily="34" charset="-120"/>
-              </a:rPr>
-              <a:t>Método Design Science Research
-</a:t>
-            </a:r>
-            <a:pPr indent="0" marL="0">
-              <a:buNone/>
-            </a:pPr>
-            <a:r>
-              <a:rPr lang="en-US" sz="1400" dirty="0">
-                <a:solidFill>
-                  <a:srgbClr val="1F2937"/>
-                </a:solidFill>
-                <a:latin typeface="Calibri" pitchFamily="34" charset="0"/>
-                <a:ea typeface="Calibri" pitchFamily="34" charset="-122"/>
-                <a:cs typeface="Calibri" pitchFamily="34" charset="-120"/>
-              </a:rPr>
-              <a:t>Artigo científico completo, com o protótipo funcional como artefato — o resultado principal do ciclo.</a:t>
-            </a:r>
-            <a:endParaRPr lang="en-US" sz="1700" dirty="0"/>
-          </a:p>
-        </p:txBody>
-      </p:sp>
-      <p:sp>
-        <p:nvSpPr>
-          <p:cNvPr id="13" name="Shape 10"/>
-          <p:cNvSpPr/>
-          <p:nvPr/>
-        </p:nvSpPr>
-        <p:spPr>
-          <a:xfrm>
-            <a:off x="548640" y="3337560"/>
-            <a:ext cx="438912" cy="438912"/>
-          </a:xfrm>
-          <a:prstGeom prst="ellipse">
-            <a:avLst/>
-          </a:prstGeom>
-          <a:solidFill>
-            <a:srgbClr val="003366"/>
-          </a:solidFill>
-          <a:ln/>
-        </p:spPr>
-      </p:sp>
-      <p:sp>
-        <p:nvSpPr>
-          <p:cNvPr id="14" name="Text 11"/>
-          <p:cNvSpPr/>
-          <p:nvPr/>
-        </p:nvSpPr>
-        <p:spPr>
-          <a:xfrm>
-            <a:off x="548640" y="3337560"/>
-            <a:ext cx="438912" cy="438912"/>
-          </a:xfrm>
-          <a:prstGeom prst="rect">
-            <a:avLst/>
-          </a:prstGeom>
-          <a:noFill/>
-          <a:ln/>
-        </p:spPr>
-        <p:txBody>
-          <a:bodyPr wrap="square" rtlCol="0" anchor="ctr"/>
-          <a:lstStyle/>
-          <a:p>
-            <a:pPr algn="ctr" indent="0" marL="0">
-              <a:buNone/>
-            </a:pPr>
-            <a:r>
-              <a:rPr lang="en-US" sz="1800" b="1" dirty="0">
-                <a:solidFill>
-                  <a:srgbClr val="FFFFFF"/>
-                </a:solidFill>
-                <a:latin typeface="Calibri" pitchFamily="34" charset="0"/>
-                <a:ea typeface="Calibri" pitchFamily="34" charset="-122"/>
-                <a:cs typeface="Calibri" pitchFamily="34" charset="-120"/>
-              </a:rPr>
-              <a:t>2</a:t>
-            </a:r>
-            <a:endParaRPr lang="en-US" sz="1800" dirty="0"/>
-          </a:p>
-        </p:txBody>
-      </p:sp>
-      <p:sp>
-        <p:nvSpPr>
-          <p:cNvPr id="15" name="Text 12"/>
-          <p:cNvSpPr/>
-          <p:nvPr/>
-        </p:nvSpPr>
-        <p:spPr>
-          <a:xfrm>
-            <a:off x="1143000" y="3291840"/>
-            <a:ext cx="5760720" cy="777240"/>
-          </a:xfrm>
-          <a:prstGeom prst="rect">
-            <a:avLst/>
-          </a:prstGeom>
-          <a:noFill/>
-          <a:ln/>
-        </p:spPr>
-        <p:txBody>
-          <a:bodyPr wrap="square" rtlCol="0" anchor="t"/>
-          <a:lstStyle/>
-          <a:p>
-            <a:pPr indent="0" marL="0">
-              <a:buNone/>
-            </a:pPr>
-            <a:r>
-              <a:rPr lang="en-US" sz="1700" b="1" dirty="0">
-                <a:solidFill>
-                  <a:srgbClr val="003366"/>
-                </a:solidFill>
-                <a:latin typeface="Calibri" pitchFamily="34" charset="0"/>
-                <a:ea typeface="Calibri" pitchFamily="34" charset="-122"/>
-                <a:cs typeface="Calibri" pitchFamily="34" charset="-120"/>
-              </a:rPr>
-              <a:t>Padrão ABNT NBR 14724
-</a:t>
-            </a:r>
-            <a:pPr indent="0" marL="0">
-              <a:buNone/>
-            </a:pPr>
-            <a:r>
-              <a:rPr lang="en-US" sz="1400" dirty="0">
-                <a:solidFill>
-                  <a:srgbClr val="1F2937"/>
-                </a:solidFill>
-                <a:latin typeface="Calibri" pitchFamily="34" charset="0"/>
-                <a:ea typeface="Calibri" pitchFamily="34" charset="-122"/>
-                <a:cs typeface="Calibri" pitchFamily="34" charset="-120"/>
-              </a:rPr>
-              <a:t>Seis seções, ~14 páginas, formatação acadêmica revisada e pronta para submissão.</a:t>
-            </a:r>
-            <a:endParaRPr lang="en-US" sz="1700" dirty="0"/>
-          </a:p>
-        </p:txBody>
-      </p:sp>
-      <p:sp>
-        <p:nvSpPr>
-          <p:cNvPr id="16" name="Shape 13"/>
-          <p:cNvSpPr/>
-          <p:nvPr/>
-        </p:nvSpPr>
-        <p:spPr>
-          <a:xfrm>
-            <a:off x="548640" y="4206240"/>
-            <a:ext cx="438912" cy="438912"/>
-          </a:xfrm>
-          <a:prstGeom prst="ellipse">
-            <a:avLst/>
-          </a:prstGeom>
-          <a:solidFill>
-            <a:srgbClr val="003366"/>
-          </a:solidFill>
-          <a:ln/>
-        </p:spPr>
-      </p:sp>
-      <p:sp>
-        <p:nvSpPr>
-          <p:cNvPr id="17" name="Text 14"/>
-          <p:cNvSpPr/>
-          <p:nvPr/>
-        </p:nvSpPr>
-        <p:spPr>
-          <a:xfrm>
-            <a:off x="548640" y="4206240"/>
-            <a:ext cx="438912" cy="438912"/>
-          </a:xfrm>
-          <a:prstGeom prst="rect">
-            <a:avLst/>
-          </a:prstGeom>
-          <a:noFill/>
-          <a:ln/>
-        </p:spPr>
-        <p:txBody>
-          <a:bodyPr wrap="square" rtlCol="0" anchor="ctr"/>
-          <a:lstStyle/>
-          <a:p>
-            <a:pPr algn="ctr" indent="0" marL="0">
-              <a:buNone/>
-            </a:pPr>
-            <a:r>
-              <a:rPr lang="en-US" sz="1800" b="1" dirty="0">
-                <a:solidFill>
-                  <a:srgbClr val="FFFFFF"/>
-                </a:solidFill>
-                <a:latin typeface="Calibri" pitchFamily="34" charset="0"/>
-                <a:ea typeface="Calibri" pitchFamily="34" charset="-122"/>
-                <a:cs typeface="Calibri" pitchFamily="34" charset="-120"/>
-              </a:rPr>
-              <a:t>3</a:t>
-            </a:r>
-            <a:endParaRPr lang="en-US" sz="1800" dirty="0"/>
-          </a:p>
-        </p:txBody>
-      </p:sp>
-      <p:sp>
-        <p:nvSpPr>
-          <p:cNvPr id="18" name="Text 15"/>
-          <p:cNvSpPr/>
-          <p:nvPr/>
-        </p:nvSpPr>
-        <p:spPr>
-          <a:xfrm>
-            <a:off x="1143000" y="4160520"/>
-            <a:ext cx="5760720" cy="777240"/>
-          </a:xfrm>
-          <a:prstGeom prst="rect">
-            <a:avLst/>
-          </a:prstGeom>
-          <a:noFill/>
-          <a:ln/>
-        </p:spPr>
-        <p:txBody>
-          <a:bodyPr wrap="square" rtlCol="0" anchor="t"/>
-          <a:lstStyle/>
-          <a:p>
-            <a:pPr indent="0" marL="0">
-              <a:buNone/>
-            </a:pPr>
-            <a:r>
-              <a:rPr lang="en-US" sz="1700" b="1" dirty="0">
-                <a:solidFill>
-                  <a:srgbClr val="003366"/>
-                </a:solidFill>
-                <a:latin typeface="Calibri" pitchFamily="34" charset="0"/>
-                <a:ea typeface="Calibri" pitchFamily="34" charset="-122"/>
-                <a:cs typeface="Calibri" pitchFamily="34" charset="-120"/>
-              </a:rPr>
-              <a:t>Artefato sintetizado
-</a:t>
-            </a:r>
-            <a:pPr indent="0" marL="0">
-              <a:buNone/>
-            </a:pPr>
-            <a:r>
-              <a:rPr lang="en-US" sz="1400" dirty="0">
-                <a:solidFill>
-                  <a:srgbClr val="1F2937"/>
-                </a:solidFill>
-                <a:latin typeface="Calibri" pitchFamily="34" charset="0"/>
-                <a:ea typeface="Calibri" pitchFamily="34" charset="-122"/>
-                <a:cs typeface="Calibri" pitchFamily="34" charset="-120"/>
-              </a:rPr>
-              <a:t>Componentes do protótipo de ponta a ponta consolidados na Tabela 1 do artigo.</a:t>
-            </a:r>
-            <a:endParaRPr lang="en-US" sz="1700" dirty="0"/>
-          </a:p>
-        </p:txBody>
-      </p:sp>
-      <p:sp>
-        <p:nvSpPr>
-          <p:cNvPr id="19" name="Shape 16"/>
-          <p:cNvSpPr/>
-          <p:nvPr/>
-        </p:nvSpPr>
-        <p:spPr>
-          <a:xfrm>
-            <a:off x="7406640" y="2468880"/>
-            <a:ext cx="4279392" cy="2606040"/>
-          </a:xfrm>
-          <a:prstGeom prst="roundRect">
-            <a:avLst>
-              <a:gd name="adj" fmla="val 2105"/>
-            </a:avLst>
-          </a:prstGeom>
-          <a:solidFill>
-            <a:srgbClr val="DDF0E3"/>
+            <a:off x="502920" y="2697480"/>
+            <a:ext cx="2487168" cy="2880360"/>
+          </a:xfrm>
+          <a:prstGeom prst="rect">
+            <a:avLst/>
+          </a:prstGeom>
+          <a:solidFill>
+            <a:srgbClr val="FFFFFF"/>
           </a:solidFill>
           <a:ln w="12700">
             <a:solidFill>
@@ -5420,27 +4696,291 @@
       </p:sp>
       <p:sp>
         <p:nvSpPr>
-          <p:cNvPr id="20" name="Shape 17"/>
-          <p:cNvSpPr/>
-          <p:nvPr/>
-        </p:nvSpPr>
-        <p:spPr>
-          <a:xfrm>
-            <a:off x="7406640" y="2468880"/>
-            <a:ext cx="4279392" cy="2606040"/>
-          </a:xfrm>
-          <a:prstGeom prst="roundRect">
-            <a:avLst>
-              <a:gd name="adj" fmla="val 2105"/>
-            </a:avLst>
-          </a:prstGeom>
-          <a:ln w="19050">
+          <p:cNvPr id="11" name="Shape 8"/>
+          <p:cNvSpPr/>
+          <p:nvPr/>
+        </p:nvSpPr>
+        <p:spPr>
+          <a:xfrm>
+            <a:off x="502920" y="2697480"/>
+            <a:ext cx="2487168" cy="54864"/>
+          </a:xfrm>
+          <a:prstGeom prst="rect">
+            <a:avLst/>
+          </a:prstGeom>
+          <a:solidFill>
+            <a:srgbClr val="008542"/>
+          </a:solidFill>
+          <a:ln/>
+        </p:spPr>
+      </p:sp>
+      <p:sp>
+        <p:nvSpPr>
+          <p:cNvPr id="12" name="Shape 9"/>
+          <p:cNvSpPr/>
+          <p:nvPr/>
+        </p:nvSpPr>
+        <p:spPr>
+          <a:xfrm>
+            <a:off x="1426464" y="3081528"/>
+            <a:ext cx="640080" cy="640080"/>
+          </a:xfrm>
+          <a:prstGeom prst="ellipse">
+            <a:avLst/>
+          </a:prstGeom>
+          <a:solidFill>
+            <a:srgbClr val="003366"/>
+          </a:solidFill>
+          <a:ln/>
+        </p:spPr>
+      </p:sp>
+      <p:sp>
+        <p:nvSpPr>
+          <p:cNvPr id="13" name="Text 10"/>
+          <p:cNvSpPr/>
+          <p:nvPr/>
+        </p:nvSpPr>
+        <p:spPr>
+          <a:xfrm>
+            <a:off x="1426464" y="3081528"/>
+            <a:ext cx="640080" cy="640080"/>
+          </a:xfrm>
+          <a:prstGeom prst="rect">
+            <a:avLst/>
+          </a:prstGeom>
+          <a:noFill/>
+          <a:ln/>
+        </p:spPr>
+        <p:txBody>
+          <a:bodyPr wrap="square" rtlCol="0" anchor="ctr"/>
+          <a:lstStyle/>
+          <a:p>
+            <a:pPr algn="ctr" indent="0" marL="0">
+              <a:buNone/>
+            </a:pPr>
+            <a:r>
+              <a:rPr lang="en-US" sz="2400" b="1" dirty="0">
+                <a:solidFill>
+                  <a:srgbClr val="FFFFFF"/>
+                </a:solidFill>
+                <a:latin typeface="Calibri" pitchFamily="34" charset="0"/>
+                <a:ea typeface="Calibri" pitchFamily="34" charset="-122"/>
+                <a:cs typeface="Calibri" pitchFamily="34" charset="-120"/>
+              </a:rPr>
+              <a:t>1</a:t>
+            </a:r>
+            <a:endParaRPr lang="en-US" sz="2400" dirty="0"/>
+          </a:p>
+        </p:txBody>
+      </p:sp>
+      <p:sp>
+        <p:nvSpPr>
+          <p:cNvPr id="14" name="Text 11"/>
+          <p:cNvSpPr/>
+          <p:nvPr/>
+        </p:nvSpPr>
+        <p:spPr>
+          <a:xfrm>
+            <a:off x="640080" y="3886200"/>
+            <a:ext cx="2212848" cy="640080"/>
+          </a:xfrm>
+          <a:prstGeom prst="rect">
+            <a:avLst/>
+          </a:prstGeom>
+          <a:noFill/>
+          <a:ln/>
+        </p:spPr>
+        <p:txBody>
+          <a:bodyPr wrap="square" rtlCol="0" anchor="t"/>
+          <a:lstStyle/>
+          <a:p>
+            <a:pPr algn="ctr" indent="0" marL="0">
+              <a:buNone/>
+            </a:pPr>
+            <a:r>
+              <a:rPr lang="en-US" sz="1500" b="1" dirty="0">
+                <a:solidFill>
+                  <a:srgbClr val="003366"/>
+                </a:solidFill>
+                <a:latin typeface="Calibri" pitchFamily="34" charset="0"/>
+                <a:ea typeface="Calibri" pitchFamily="34" charset="-122"/>
+                <a:cs typeface="Calibri" pitchFamily="34" charset="-120"/>
+              </a:rPr>
+              <a:t>Aquisição &amp; Onboarding</a:t>
+            </a:r>
+            <a:endParaRPr lang="en-US" sz="1500" dirty="0"/>
+          </a:p>
+        </p:txBody>
+      </p:sp>
+      <p:sp>
+        <p:nvSpPr>
+          <p:cNvPr id="15" name="Text 12"/>
+          <p:cNvSpPr/>
+          <p:nvPr/>
+        </p:nvSpPr>
+        <p:spPr>
+          <a:xfrm>
+            <a:off x="685800" y="4526280"/>
+            <a:ext cx="2121408" cy="960120"/>
+          </a:xfrm>
+          <a:prstGeom prst="rect">
+            <a:avLst/>
+          </a:prstGeom>
+          <a:noFill/>
+          <a:ln/>
+        </p:spPr>
+        <p:txBody>
+          <a:bodyPr wrap="square" rtlCol="0" anchor="t"/>
+          <a:lstStyle/>
+          <a:p>
+            <a:pPr algn="ctr" indent="0" marL="0">
+              <a:buNone/>
+            </a:pPr>
+            <a:r>
+              <a:rPr lang="en-US" sz="1250" dirty="0">
+                <a:solidFill>
+                  <a:srgbClr val="55606E"/>
+                </a:solidFill>
+                <a:latin typeface="Calibri" pitchFamily="34" charset="0"/>
+                <a:ea typeface="Calibri" pitchFamily="34" charset="-122"/>
+                <a:cs typeface="Calibri" pitchFamily="34" charset="-120"/>
+              </a:rPr>
+              <a:t>Login + magic link, identidade UnB, consentimento LGPD, onboarding em 4 passos</a:t>
+            </a:r>
+            <a:endParaRPr lang="en-US" sz="1250" dirty="0"/>
+          </a:p>
+        </p:txBody>
+      </p:sp>
+      <p:sp>
+        <p:nvSpPr>
+          <p:cNvPr id="16" name="Shape 13"/>
+          <p:cNvSpPr/>
+          <p:nvPr/>
+        </p:nvSpPr>
+        <p:spPr>
+          <a:xfrm>
+            <a:off x="3044952" y="3991356"/>
+            <a:ext cx="301752" cy="292608"/>
+          </a:xfrm>
+          <a:prstGeom prst="rightArrow">
+            <a:avLst/>
+          </a:prstGeom>
+          <a:solidFill>
+            <a:srgbClr val="008542"/>
+          </a:solidFill>
+          <a:ln/>
+        </p:spPr>
+      </p:sp>
+      <p:sp>
+        <p:nvSpPr>
+          <p:cNvPr id="17" name="Shape 14"/>
+          <p:cNvSpPr/>
+          <p:nvPr/>
+        </p:nvSpPr>
+        <p:spPr>
+          <a:xfrm>
+            <a:off x="3401568" y="2697480"/>
+            <a:ext cx="2487168" cy="2880360"/>
+          </a:xfrm>
+          <a:prstGeom prst="rect">
+            <a:avLst/>
+          </a:prstGeom>
+          <a:solidFill>
+            <a:srgbClr val="FFFFFF"/>
+          </a:solidFill>
+          <a:ln w="12700">
             <a:solidFill>
-              <a:srgbClr val="008542"/>
+              <a:srgbClr val="E6E9EE"/>
             </a:solidFill>
             <a:prstDash val="solid"/>
           </a:ln>
-        </p:spPr>
+          <a:effectLst>
+            <a:outerShdw sx="100000" sy="100000" kx="0" ky="0" algn="bl" rotWithShape="0" blurRad="Infinity" dist="Infinity" dir="Infinity">
+              <a:srgbClr val="9AA7B4">
+                <a:alpha val="Infinity"/>
+              </a:srgbClr>
+            </a:outerShdw>
+          </a:effectLst>
+        </p:spPr>
+      </p:sp>
+      <p:sp>
+        <p:nvSpPr>
+          <p:cNvPr id="18" name="Shape 15"/>
+          <p:cNvSpPr/>
+          <p:nvPr/>
+        </p:nvSpPr>
+        <p:spPr>
+          <a:xfrm>
+            <a:off x="3401568" y="2697480"/>
+            <a:ext cx="2487168" cy="54864"/>
+          </a:xfrm>
+          <a:prstGeom prst="rect">
+            <a:avLst/>
+          </a:prstGeom>
+          <a:solidFill>
+            <a:srgbClr val="008542"/>
+          </a:solidFill>
+          <a:ln/>
+        </p:spPr>
+      </p:sp>
+      <p:sp>
+        <p:nvSpPr>
+          <p:cNvPr id="19" name="Shape 16"/>
+          <p:cNvSpPr/>
+          <p:nvPr/>
+        </p:nvSpPr>
+        <p:spPr>
+          <a:xfrm>
+            <a:off x="4325112" y="3081528"/>
+            <a:ext cx="640080" cy="640080"/>
+          </a:xfrm>
+          <a:prstGeom prst="ellipse">
+            <a:avLst/>
+          </a:prstGeom>
+          <a:solidFill>
+            <a:srgbClr val="003366"/>
+          </a:solidFill>
+          <a:ln/>
+        </p:spPr>
+      </p:sp>
+      <p:sp>
+        <p:nvSpPr>
+          <p:cNvPr id="20" name="Text 17"/>
+          <p:cNvSpPr/>
+          <p:nvPr/>
+        </p:nvSpPr>
+        <p:spPr>
+          <a:xfrm>
+            <a:off x="4325112" y="3081528"/>
+            <a:ext cx="640080" cy="640080"/>
+          </a:xfrm>
+          <a:prstGeom prst="rect">
+            <a:avLst/>
+          </a:prstGeom>
+          <a:noFill/>
+          <a:ln/>
+        </p:spPr>
+        <p:txBody>
+          <a:bodyPr wrap="square" rtlCol="0" anchor="ctr"/>
+          <a:lstStyle/>
+          <a:p>
+            <a:pPr algn="ctr" indent="0" marL="0">
+              <a:buNone/>
+            </a:pPr>
+            <a:r>
+              <a:rPr lang="en-US" sz="2400" b="1" dirty="0">
+                <a:solidFill>
+                  <a:srgbClr val="FFFFFF"/>
+                </a:solidFill>
+                <a:latin typeface="Calibri" pitchFamily="34" charset="0"/>
+                <a:ea typeface="Calibri" pitchFamily="34" charset="-122"/>
+                <a:cs typeface="Calibri" pitchFamily="34" charset="-120"/>
+              </a:rPr>
+              <a:t>2</a:t>
+            </a:r>
+            <a:endParaRPr lang="en-US" sz="2400" dirty="0"/>
+          </a:p>
+        </p:txBody>
       </p:sp>
       <p:sp>
         <p:nvSpPr>
@@ -5450,8 +4990,178 @@
         </p:nvSpPr>
         <p:spPr>
           <a:xfrm>
-            <a:off x="7680960" y="2697480"/>
-            <a:ext cx="3749040" cy="365760"/>
+            <a:off x="3538728" y="3886200"/>
+            <a:ext cx="2212848" cy="640080"/>
+          </a:xfrm>
+          <a:prstGeom prst="rect">
+            <a:avLst/>
+          </a:prstGeom>
+          <a:noFill/>
+          <a:ln/>
+        </p:spPr>
+        <p:txBody>
+          <a:bodyPr wrap="square" rtlCol="0" anchor="t"/>
+          <a:lstStyle/>
+          <a:p>
+            <a:pPr algn="ctr" indent="0" marL="0">
+              <a:buNone/>
+            </a:pPr>
+            <a:r>
+              <a:rPr lang="en-US" sz="1500" b="1" dirty="0">
+                <a:solidFill>
+                  <a:srgbClr val="003366"/>
+                </a:solidFill>
+                <a:latin typeface="Calibri" pitchFamily="34" charset="0"/>
+                <a:ea typeface="Calibri" pitchFamily="34" charset="-122"/>
+                <a:cs typeface="Calibri" pitchFamily="34" charset="-120"/>
+              </a:rPr>
+              <a:t>Perfil acadêmico</a:t>
+            </a:r>
+            <a:endParaRPr lang="en-US" sz="1500" dirty="0"/>
+          </a:p>
+        </p:txBody>
+      </p:sp>
+      <p:sp>
+        <p:nvSpPr>
+          <p:cNvPr id="22" name="Text 19"/>
+          <p:cNvSpPr/>
+          <p:nvPr/>
+        </p:nvSpPr>
+        <p:spPr>
+          <a:xfrm>
+            <a:off x="3584448" y="4526280"/>
+            <a:ext cx="2121408" cy="960120"/>
+          </a:xfrm>
+          <a:prstGeom prst="rect">
+            <a:avLst/>
+          </a:prstGeom>
+          <a:noFill/>
+          <a:ln/>
+        </p:spPr>
+        <p:txBody>
+          <a:bodyPr wrap="square" rtlCol="0" anchor="t"/>
+          <a:lstStyle/>
+          <a:p>
+            <a:pPr algn="ctr" indent="0" marL="0">
+              <a:buNone/>
+            </a:pPr>
+            <a:r>
+              <a:rPr lang="en-US" sz="1250" dirty="0">
+                <a:solidFill>
+                  <a:srgbClr val="55606E"/>
+                </a:solidFill>
+                <a:latin typeface="Calibri" pitchFamily="34" charset="0"/>
+                <a:ea typeface="Calibri" pitchFamily="34" charset="-122"/>
+                <a:cs typeface="Calibri" pitchFamily="34" charset="-120"/>
+              </a:rPr>
+              <a:t>Grade visual de horários, importação do SIGAA, conexão do Drive</a:t>
+            </a:r>
+            <a:endParaRPr lang="en-US" sz="1250" dirty="0"/>
+          </a:p>
+        </p:txBody>
+      </p:sp>
+      <p:sp>
+        <p:nvSpPr>
+          <p:cNvPr id="23" name="Shape 20"/>
+          <p:cNvSpPr/>
+          <p:nvPr/>
+        </p:nvSpPr>
+        <p:spPr>
+          <a:xfrm>
+            <a:off x="5943600" y="3991356"/>
+            <a:ext cx="301752" cy="292608"/>
+          </a:xfrm>
+          <a:prstGeom prst="rightArrow">
+            <a:avLst/>
+          </a:prstGeom>
+          <a:solidFill>
+            <a:srgbClr val="008542"/>
+          </a:solidFill>
+          <a:ln/>
+        </p:spPr>
+      </p:sp>
+      <p:sp>
+        <p:nvSpPr>
+          <p:cNvPr id="24" name="Shape 21"/>
+          <p:cNvSpPr/>
+          <p:nvPr/>
+        </p:nvSpPr>
+        <p:spPr>
+          <a:xfrm>
+            <a:off x="6300216" y="2697480"/>
+            <a:ext cx="2487168" cy="2880360"/>
+          </a:xfrm>
+          <a:prstGeom prst="rect">
+            <a:avLst/>
+          </a:prstGeom>
+          <a:solidFill>
+            <a:srgbClr val="FFFFFF"/>
+          </a:solidFill>
+          <a:ln w="12700">
+            <a:solidFill>
+              <a:srgbClr val="E6E9EE"/>
+            </a:solidFill>
+            <a:prstDash val="solid"/>
+          </a:ln>
+          <a:effectLst>
+            <a:outerShdw sx="100000" sy="100000" kx="0" ky="0" algn="bl" rotWithShape="0" blurRad="Infinity" dist="Infinity" dir="Infinity">
+              <a:srgbClr val="9AA7B4">
+                <a:alpha val="Infinity"/>
+              </a:srgbClr>
+            </a:outerShdw>
+          </a:effectLst>
+        </p:spPr>
+      </p:sp>
+      <p:sp>
+        <p:nvSpPr>
+          <p:cNvPr id="25" name="Shape 22"/>
+          <p:cNvSpPr/>
+          <p:nvPr/>
+        </p:nvSpPr>
+        <p:spPr>
+          <a:xfrm>
+            <a:off x="6300216" y="2697480"/>
+            <a:ext cx="2487168" cy="54864"/>
+          </a:xfrm>
+          <a:prstGeom prst="rect">
+            <a:avLst/>
+          </a:prstGeom>
+          <a:solidFill>
+            <a:srgbClr val="008542"/>
+          </a:solidFill>
+          <a:ln/>
+        </p:spPr>
+      </p:sp>
+      <p:sp>
+        <p:nvSpPr>
+          <p:cNvPr id="26" name="Shape 23"/>
+          <p:cNvSpPr/>
+          <p:nvPr/>
+        </p:nvSpPr>
+        <p:spPr>
+          <a:xfrm>
+            <a:off x="7223760" y="3081528"/>
+            <a:ext cx="640080" cy="640080"/>
+          </a:xfrm>
+          <a:prstGeom prst="ellipse">
+            <a:avLst/>
+          </a:prstGeom>
+          <a:solidFill>
+            <a:srgbClr val="003366"/>
+          </a:solidFill>
+          <a:ln/>
+        </p:spPr>
+      </p:sp>
+      <p:sp>
+        <p:nvSpPr>
+          <p:cNvPr id="27" name="Text 24"/>
+          <p:cNvSpPr/>
+          <p:nvPr/>
+        </p:nvSpPr>
+        <p:spPr>
+          <a:xfrm>
+            <a:off x="7223760" y="3081528"/>
+            <a:ext cx="640080" cy="640080"/>
           </a:xfrm>
           <a:prstGeom prst="rect">
             <a:avLst/>
@@ -5463,34 +5173,34 @@
           <a:bodyPr wrap="square" rtlCol="0" anchor="ctr"/>
           <a:lstStyle/>
           <a:p>
-            <a:pPr indent="0" marL="0">
-              <a:buNone/>
-            </a:pPr>
-            <a:r>
-              <a:rPr lang="en-US" sz="1400" b="1" dirty="0">
-                <a:solidFill>
-                  <a:srgbClr val="005923"/>
-                </a:solidFill>
-                <a:latin typeface="Calibri" pitchFamily="34" charset="0"/>
-                <a:ea typeface="Calibri" pitchFamily="34" charset="-122"/>
-                <a:cs typeface="Calibri" pitchFamily="34" charset="-120"/>
-              </a:rPr>
-              <a:t>INTEGRIDADE METODOLÓGICA</a:t>
-            </a:r>
-            <a:endParaRPr lang="en-US" sz="1400" dirty="0"/>
-          </a:p>
-        </p:txBody>
-      </p:sp>
-      <p:sp>
-        <p:nvSpPr>
-          <p:cNvPr id="22" name="Text 19"/>
-          <p:cNvSpPr/>
-          <p:nvPr/>
-        </p:nvSpPr>
-        <p:spPr>
-          <a:xfrm>
-            <a:off x="7680960" y="3154680"/>
-            <a:ext cx="3749040" cy="914400"/>
+            <a:pPr algn="ctr" indent="0" marL="0">
+              <a:buNone/>
+            </a:pPr>
+            <a:r>
+              <a:rPr lang="en-US" sz="2400" b="1" dirty="0">
+                <a:solidFill>
+                  <a:srgbClr val="FFFFFF"/>
+                </a:solidFill>
+                <a:latin typeface="Calibri" pitchFamily="34" charset="0"/>
+                <a:ea typeface="Calibri" pitchFamily="34" charset="-122"/>
+                <a:cs typeface="Calibri" pitchFamily="34" charset="-120"/>
+              </a:rPr>
+              <a:t>3</a:t>
+            </a:r>
+            <a:endParaRPr lang="en-US" sz="2400" dirty="0"/>
+          </a:p>
+        </p:txBody>
+      </p:sp>
+      <p:sp>
+        <p:nvSpPr>
+          <p:cNvPr id="28" name="Text 25"/>
+          <p:cNvSpPr/>
+          <p:nvPr/>
+        </p:nvSpPr>
+        <p:spPr>
+          <a:xfrm>
+            <a:off x="6437376" y="3886200"/>
+            <a:ext cx="2212848" cy="640080"/>
           </a:xfrm>
           <a:prstGeom prst="rect">
             <a:avLst/>
@@ -5502,11 +5212,11 @@
           <a:bodyPr wrap="square" rtlCol="0" anchor="t"/>
           <a:lstStyle/>
           <a:p>
-            <a:pPr indent="0" marL="0">
-              <a:buNone/>
-            </a:pPr>
-            <a:r>
-              <a:rPr lang="en-US" sz="1600" b="1" dirty="0">
+            <a:pPr algn="ctr" indent="0" marL="0">
+              <a:buNone/>
+            </a:pPr>
+            <a:r>
+              <a:rPr lang="en-US" sz="1500" b="1" dirty="0">
                 <a:solidFill>
                   <a:srgbClr val="003366"/>
                 </a:solidFill>
@@ -5514,22 +5224,22 @@
                 <a:ea typeface="Calibri" pitchFamily="34" charset="-122"/>
                 <a:cs typeface="Calibri" pitchFamily="34" charset="-120"/>
               </a:rPr>
-              <a:t>A avaliação com usuários (SUS, TAM) é reportada como planejada, não executada.</a:t>
-            </a:r>
-            <a:endParaRPr lang="en-US" sz="1600" dirty="0"/>
-          </a:p>
-        </p:txBody>
-      </p:sp>
-      <p:sp>
-        <p:nvSpPr>
-          <p:cNvPr id="23" name="Text 20"/>
-          <p:cNvSpPr/>
-          <p:nvPr/>
-        </p:nvSpPr>
-        <p:spPr>
-          <a:xfrm>
-            <a:off x="7680960" y="4160520"/>
-            <a:ext cx="3749040" cy="822960"/>
+              <a:t>Uso diário</a:t>
+            </a:r>
+            <a:endParaRPr lang="en-US" sz="1500" dirty="0"/>
+          </a:p>
+        </p:txBody>
+      </p:sp>
+      <p:sp>
+        <p:nvSpPr>
+          <p:cNvPr id="29" name="Text 26"/>
+          <p:cNvSpPr/>
+          <p:nvPr/>
+        </p:nvSpPr>
+        <p:spPr>
+          <a:xfrm>
+            <a:off x="6483096" y="4526280"/>
+            <a:ext cx="2121408" cy="960120"/>
           </a:xfrm>
           <a:prstGeom prst="rect">
             <a:avLst/>
@@ -5541,11 +5251,11 @@
           <a:bodyPr wrap="square" rtlCol="0" anchor="t"/>
           <a:lstStyle/>
           <a:p>
-            <a:pPr indent="0" marL="0">
-              <a:buNone/>
-            </a:pPr>
-            <a:r>
-              <a:rPr lang="en-US" sz="1300" dirty="0">
+            <a:pPr algn="ctr" indent="0" marL="0">
+              <a:buNone/>
+            </a:pPr>
+            <a:r>
+              <a:rPr lang="en-US" sz="1250" dirty="0">
                 <a:solidFill>
                   <a:srgbClr val="55606E"/>
                 </a:solidFill>
@@ -5553,15 +5263,224 @@
                 <a:ea typeface="Calibri" pitchFamily="34" charset="-122"/>
                 <a:cs typeface="Calibri" pitchFamily="34" charset="-120"/>
               </a:rPr>
-              <a:t>Sem dados fabricados — o que não foi medido não é apresentado como resultado.</a:t>
-            </a:r>
-            <a:endParaRPr lang="en-US" sz="1300" dirty="0"/>
-          </a:p>
-        </p:txBody>
-      </p:sp>
-      <p:sp>
-        <p:nvSpPr>
-          <p:cNvPr id="24" name="Shape 21"/>
+              <a:t>Dashboard em tempo real, gestão de documentos, transparência total</a:t>
+            </a:r>
+            <a:endParaRPr lang="en-US" sz="1250" dirty="0"/>
+          </a:p>
+        </p:txBody>
+      </p:sp>
+      <p:sp>
+        <p:nvSpPr>
+          <p:cNvPr id="30" name="Shape 27"/>
+          <p:cNvSpPr/>
+          <p:nvPr/>
+        </p:nvSpPr>
+        <p:spPr>
+          <a:xfrm>
+            <a:off x="8842248" y="3991356"/>
+            <a:ext cx="301752" cy="292608"/>
+          </a:xfrm>
+          <a:prstGeom prst="rightArrow">
+            <a:avLst/>
+          </a:prstGeom>
+          <a:solidFill>
+            <a:srgbClr val="008542"/>
+          </a:solidFill>
+          <a:ln/>
+        </p:spPr>
+      </p:sp>
+      <p:sp>
+        <p:nvSpPr>
+          <p:cNvPr id="31" name="Shape 28"/>
+          <p:cNvSpPr/>
+          <p:nvPr/>
+        </p:nvSpPr>
+        <p:spPr>
+          <a:xfrm>
+            <a:off x="9198864" y="2697480"/>
+            <a:ext cx="2487168" cy="2880360"/>
+          </a:xfrm>
+          <a:prstGeom prst="rect">
+            <a:avLst/>
+          </a:prstGeom>
+          <a:solidFill>
+            <a:srgbClr val="FFFFFF"/>
+          </a:solidFill>
+          <a:ln w="12700">
+            <a:solidFill>
+              <a:srgbClr val="E6E9EE"/>
+            </a:solidFill>
+            <a:prstDash val="solid"/>
+          </a:ln>
+          <a:effectLst>
+            <a:outerShdw sx="100000" sy="100000" kx="0" ky="0" algn="bl" rotWithShape="0" blurRad="Infinity" dist="Infinity" dir="Infinity">
+              <a:srgbClr val="9AA7B4">
+                <a:alpha val="Infinity"/>
+              </a:srgbClr>
+            </a:outerShdw>
+          </a:effectLst>
+        </p:spPr>
+      </p:sp>
+      <p:sp>
+        <p:nvSpPr>
+          <p:cNvPr id="32" name="Shape 29"/>
+          <p:cNvSpPr/>
+          <p:nvPr/>
+        </p:nvSpPr>
+        <p:spPr>
+          <a:xfrm>
+            <a:off x="9198864" y="2697480"/>
+            <a:ext cx="2487168" cy="54864"/>
+          </a:xfrm>
+          <a:prstGeom prst="rect">
+            <a:avLst/>
+          </a:prstGeom>
+          <a:solidFill>
+            <a:srgbClr val="008542"/>
+          </a:solidFill>
+          <a:ln/>
+        </p:spPr>
+      </p:sp>
+      <p:sp>
+        <p:nvSpPr>
+          <p:cNvPr id="33" name="Shape 30"/>
+          <p:cNvSpPr/>
+          <p:nvPr/>
+        </p:nvSpPr>
+        <p:spPr>
+          <a:xfrm>
+            <a:off x="10122408" y="3081528"/>
+            <a:ext cx="640080" cy="640080"/>
+          </a:xfrm>
+          <a:prstGeom prst="ellipse">
+            <a:avLst/>
+          </a:prstGeom>
+          <a:solidFill>
+            <a:srgbClr val="003366"/>
+          </a:solidFill>
+          <a:ln/>
+        </p:spPr>
+      </p:sp>
+      <p:sp>
+        <p:nvSpPr>
+          <p:cNvPr id="34" name="Text 31"/>
+          <p:cNvSpPr/>
+          <p:nvPr/>
+        </p:nvSpPr>
+        <p:spPr>
+          <a:xfrm>
+            <a:off x="10122408" y="3081528"/>
+            <a:ext cx="640080" cy="640080"/>
+          </a:xfrm>
+          <a:prstGeom prst="rect">
+            <a:avLst/>
+          </a:prstGeom>
+          <a:noFill/>
+          <a:ln/>
+        </p:spPr>
+        <p:txBody>
+          <a:bodyPr wrap="square" rtlCol="0" anchor="ctr"/>
+          <a:lstStyle/>
+          <a:p>
+            <a:pPr algn="ctr" indent="0" marL="0">
+              <a:buNone/>
+            </a:pPr>
+            <a:r>
+              <a:rPr lang="en-US" sz="2400" b="1" dirty="0">
+                <a:solidFill>
+                  <a:srgbClr val="FFFFFF"/>
+                </a:solidFill>
+                <a:latin typeface="Calibri" pitchFamily="34" charset="0"/>
+                <a:ea typeface="Calibri" pitchFamily="34" charset="-122"/>
+                <a:cs typeface="Calibri" pitchFamily="34" charset="-120"/>
+              </a:rPr>
+              <a:t>4</a:t>
+            </a:r>
+            <a:endParaRPr lang="en-US" sz="2400" dirty="0"/>
+          </a:p>
+        </p:txBody>
+      </p:sp>
+      <p:sp>
+        <p:nvSpPr>
+          <p:cNvPr id="35" name="Text 32"/>
+          <p:cNvSpPr/>
+          <p:nvPr/>
+        </p:nvSpPr>
+        <p:spPr>
+          <a:xfrm>
+            <a:off x="9336024" y="3886200"/>
+            <a:ext cx="2212848" cy="640080"/>
+          </a:xfrm>
+          <a:prstGeom prst="rect">
+            <a:avLst/>
+          </a:prstGeom>
+          <a:noFill/>
+          <a:ln/>
+        </p:spPr>
+        <p:txBody>
+          <a:bodyPr wrap="square" rtlCol="0" anchor="t"/>
+          <a:lstStyle/>
+          <a:p>
+            <a:pPr algn="ctr" indent="0" marL="0">
+              <a:buNone/>
+            </a:pPr>
+            <a:r>
+              <a:rPr lang="en-US" sz="1500" b="1" dirty="0">
+                <a:solidFill>
+                  <a:srgbClr val="003366"/>
+                </a:solidFill>
+                <a:latin typeface="Calibri" pitchFamily="34" charset="0"/>
+                <a:ea typeface="Calibri" pitchFamily="34" charset="-122"/>
+                <a:cs typeface="Calibri" pitchFamily="34" charset="-120"/>
+              </a:rPr>
+              <a:t>Voz do cliente</a:t>
+            </a:r>
+            <a:endParaRPr lang="en-US" sz="1500" dirty="0"/>
+          </a:p>
+        </p:txBody>
+      </p:sp>
+      <p:sp>
+        <p:nvSpPr>
+          <p:cNvPr id="36" name="Text 33"/>
+          <p:cNvSpPr/>
+          <p:nvPr/>
+        </p:nvSpPr>
+        <p:spPr>
+          <a:xfrm>
+            <a:off x="9381744" y="4526280"/>
+            <a:ext cx="2121408" cy="960120"/>
+          </a:xfrm>
+          <a:prstGeom prst="rect">
+            <a:avLst/>
+          </a:prstGeom>
+          <a:noFill/>
+          <a:ln/>
+        </p:spPr>
+        <p:txBody>
+          <a:bodyPr wrap="square" rtlCol="0" anchor="t"/>
+          <a:lstStyle/>
+          <a:p>
+            <a:pPr algn="ctr" indent="0" marL="0">
+              <a:buNone/>
+            </a:pPr>
+            <a:r>
+              <a:rPr lang="en-US" sz="1250" dirty="0">
+                <a:solidFill>
+                  <a:srgbClr val="55606E"/>
+                </a:solidFill>
+                <a:latin typeface="Calibri" pitchFamily="34" charset="0"/>
+                <a:ea typeface="Calibri" pitchFamily="34" charset="-122"/>
+                <a:cs typeface="Calibri" pitchFamily="34" charset="-120"/>
+              </a:rPr>
+              <a:t>Biblioteca de prompts + system prompt portátil, feedback, direitos LGPD</a:t>
+            </a:r>
+            <a:endParaRPr lang="en-US" sz="1250" dirty="0"/>
+          </a:p>
+        </p:txBody>
+      </p:sp>
+      <p:sp>
+        <p:nvSpPr>
+          <p:cNvPr id="37" name="Shape 34"/>
           <p:cNvSpPr/>
           <p:nvPr/>
         </p:nvSpPr>
@@ -5581,7 +5500,7 @@
       </p:sp>
       <p:sp>
         <p:nvSpPr>
-          <p:cNvPr id="25" name="Text 22"/>
+          <p:cNvPr id="38" name="Text 35"/>
           <p:cNvSpPr/>
           <p:nvPr/>
         </p:nvSpPr>
@@ -5612,7 +5531,7 @@
                 <a:ea typeface="Calibri" pitchFamily="34" charset="-122"/>
                 <a:cs typeface="Calibri" pitchFamily="34" charset="-120"/>
               </a:rPr>
-              <a:t>Honestidade vale mais que número inventado.</a:t>
+              <a:t>Da primeira tela ao hábito de estudo — mapeada para guiar as próximas decisões de produto.</a:t>
             </a:r>
             <a:endParaRPr lang="en-US" sz="1700" dirty="0"/>
           </a:p>
@@ -5620,7 +5539,7 @@
       </p:sp>
       <p:sp>
         <p:nvSpPr>
-          <p:cNvPr id="26" name="Text 23"/>
+          <p:cNvPr id="39" name="Text 36"/>
           <p:cNvSpPr/>
           <p:nvPr/>
         </p:nvSpPr>
@@ -5671,7 +5590,7 @@
     <p:bg>
       <p:bgPr>
         <a:solidFill>
-          <a:srgbClr val="FFFFFF"/>
+          <a:srgbClr val="003366"/>
         </a:solidFill>
       </p:bgPr>
     </p:bg>
@@ -5697,14 +5616,14 @@
         </p:nvSpPr>
         <p:spPr>
           <a:xfrm>
-            <a:off x="502920" y="292608"/>
-            <a:ext cx="1463040" cy="402336"/>
-          </a:xfrm>
-          <a:prstGeom prst="rect">
-            <a:avLst/>
-          </a:prstGeom>
-          <a:solidFill>
-            <a:srgbClr val="003366"/>
+            <a:off x="502920" y="457200"/>
+            <a:ext cx="2441448" cy="420624"/>
+          </a:xfrm>
+          <a:prstGeom prst="rect">
+            <a:avLst/>
+          </a:prstGeom>
+          <a:solidFill>
+            <a:srgbClr val="008542"/>
           </a:solidFill>
           <a:ln/>
           <a:effectLst>
@@ -5724,8 +5643,8 @@
         </p:nvSpPr>
         <p:spPr>
           <a:xfrm>
-            <a:off x="502920" y="292608"/>
-            <a:ext cx="1463040" cy="402336"/>
+            <a:off x="502920" y="457200"/>
+            <a:ext cx="2441448" cy="420624"/>
           </a:xfrm>
           <a:prstGeom prst="rect">
             <a:avLst/>
@@ -5749,7 +5668,7 @@
                 <a:ea typeface="Calibri" pitchFamily="34" charset="-122"/>
                 <a:cs typeface="Calibri" pitchFamily="34" charset="-120"/>
               </a:rPr>
-              <a:t>JORNADA</a:t>
+              <a:t>ALÉM DA DISCIPLINA</a:t>
             </a:r>
             <a:endParaRPr lang="en-US" sz="1550" dirty="0"/>
           </a:p>
@@ -5757,7 +5676,7 @@
       </p:sp>
       <p:pic>
         <p:nvPicPr>
-          <p:cNvPr id="4" name="Image 0" descr="/tmp/psp2_pres/unb_color.png">    </p:cNvPr>
+          <p:cNvPr id="4" name="Image 0" descr="/tmp/psp2_pres/unb_white.png">    </p:cNvPr>
           <p:cNvPicPr>
             <a:picLocks noChangeAspect="1"/>
           </p:cNvPicPr>
@@ -5771,8 +5690,8 @@
         </p:blipFill>
         <p:spPr>
           <a:xfrm>
-            <a:off x="11475720" y="164592"/>
-            <a:ext cx="566928" cy="566928"/>
+            <a:off x="11430000" y="310896"/>
+            <a:ext cx="548640" cy="502920"/>
           </a:xfrm>
           <a:prstGeom prst="rect">
             <a:avLst/>
@@ -5781,50 +5700,81 @@
       </p:pic>
       <p:sp>
         <p:nvSpPr>
-          <p:cNvPr id="5" name="Shape 2"/>
-          <p:cNvSpPr/>
-          <p:nvPr/>
-        </p:nvSpPr>
-        <p:spPr>
-          <a:xfrm>
-            <a:off x="502920" y="932688"/>
-            <a:ext cx="11183112" cy="16459"/>
-          </a:xfrm>
-          <a:prstGeom prst="rect">
-            <a:avLst/>
-          </a:prstGeom>
-          <a:solidFill>
-            <a:srgbClr val="E6E9EE"/>
-          </a:solidFill>
-          <a:ln/>
-          <a:effectLst>
-            <a:outerShdw sx="100000" sy="100000" kx="0" ky="0" algn="bl" rotWithShape="0" blurRad="Infinity" dist="Infinity" dir="Infinity">
-              <a:srgbClr val="9AA7B4">
-                <a:alpha val="Infinity"/>
-              </a:srgbClr>
-            </a:outerShdw>
-          </a:effectLst>
-        </p:spPr>
-      </p:sp>
-      <p:sp>
-        <p:nvSpPr>
-          <p:cNvPr id="6" name="Shape 3"/>
-          <p:cNvSpPr/>
-          <p:nvPr/>
-        </p:nvSpPr>
-        <p:spPr>
-          <a:xfrm>
-            <a:off x="502920" y="914400"/>
-            <a:ext cx="1371600" cy="45720"/>
-          </a:xfrm>
-          <a:prstGeom prst="rect">
-            <a:avLst/>
-          </a:prstGeom>
-          <a:solidFill>
-            <a:srgbClr val="008542"/>
-          </a:solidFill>
-          <a:ln/>
-        </p:spPr>
+          <p:cNvPr id="5" name="Text 2"/>
+          <p:cNvSpPr/>
+          <p:nvPr/>
+        </p:nvSpPr>
+        <p:spPr>
+          <a:xfrm>
+            <a:off x="502920" y="1097280"/>
+            <a:ext cx="11183112" cy="777240"/>
+          </a:xfrm>
+          <a:prstGeom prst="rect">
+            <a:avLst/>
+          </a:prstGeom>
+          <a:noFill/>
+          <a:ln/>
+        </p:spPr>
+        <p:txBody>
+          <a:bodyPr wrap="square" rtlCol="0" anchor="ctr"/>
+          <a:lstStyle/>
+          <a:p>
+            <a:pPr indent="0" marL="0">
+              <a:buNone/>
+            </a:pPr>
+            <a:r>
+              <a:rPr lang="en-US" sz="3800" b="1" dirty="0">
+                <a:solidFill>
+                  <a:srgbClr val="FFFFFF"/>
+                </a:solidFill>
+                <a:latin typeface="Calibri" pitchFamily="34" charset="0"/>
+                <a:ea typeface="Calibri" pitchFamily="34" charset="-122"/>
+                <a:cs typeface="Calibri" pitchFamily="34" charset="-120"/>
+              </a:rPr>
+              <a:t>Sistema inteligente unificado do estudante</a:t>
+            </a:r>
+            <a:endParaRPr lang="en-US" sz="3800" dirty="0"/>
+          </a:p>
+        </p:txBody>
+      </p:sp>
+      <p:sp>
+        <p:nvSpPr>
+          <p:cNvPr id="6" name="Text 3"/>
+          <p:cNvSpPr/>
+          <p:nvPr/>
+        </p:nvSpPr>
+        <p:spPr>
+          <a:xfrm>
+            <a:off x="502920" y="1938528"/>
+            <a:ext cx="11183112" cy="365760"/>
+          </a:xfrm>
+          <a:prstGeom prst="rect">
+            <a:avLst/>
+          </a:prstGeom>
+          <a:noFill/>
+          <a:ln/>
+        </p:spPr>
+        <p:txBody>
+          <a:bodyPr wrap="square" rtlCol="0" anchor="ctr"/>
+          <a:lstStyle/>
+          <a:p>
+            <a:pPr indent="0" marL="0">
+              <a:buNone/>
+            </a:pPr>
+            <a:r>
+              <a:rPr lang="en-US" sz="1800" dirty="0">
+                <a:solidFill>
+                  <a:srgbClr val="BFD0E6"/>
+                </a:solidFill>
+                <a:latin typeface="Calibri" pitchFamily="34" charset="0"/>
+                <a:ea typeface="Calibri" pitchFamily="34" charset="-122"/>
+                <a:cs typeface="Calibri" pitchFamily="34" charset="-120"/>
+              </a:rPr>
+              <a:t>O hub único onde o aluno UnB centraliza tudo que importa pro semestre.</a:t>
+            </a:r>
+            <a:endParaRPr lang="en-US" sz="1800" dirty="0"/>
+          </a:p>
+        </p:txBody>
       </p:sp>
       <p:sp>
         <p:nvSpPr>
@@ -5834,138 +5784,35 @@
         </p:nvSpPr>
         <p:spPr>
           <a:xfrm>
-            <a:off x="502920" y="914400"/>
-            <a:ext cx="384048" cy="45720"/>
-          </a:xfrm>
-          <a:prstGeom prst="rect">
-            <a:avLst/>
-          </a:prstGeom>
-          <a:solidFill>
-            <a:srgbClr val="FFB81C"/>
-          </a:solidFill>
-          <a:ln/>
-        </p:spPr>
-      </p:sp>
-      <p:sp>
-        <p:nvSpPr>
-          <p:cNvPr id="8" name="Text 5"/>
-          <p:cNvSpPr/>
-          <p:nvPr/>
-        </p:nvSpPr>
-        <p:spPr>
-          <a:xfrm>
-            <a:off x="502920" y="1060704"/>
-            <a:ext cx="11183112" cy="310896"/>
-          </a:xfrm>
-          <a:prstGeom prst="rect">
-            <a:avLst/>
-          </a:prstGeom>
-          <a:noFill/>
-          <a:ln/>
-        </p:spPr>
-        <p:txBody>
-          <a:bodyPr wrap="square" rtlCol="0" anchor="ctr"/>
-          <a:lstStyle/>
-          <a:p>
-            <a:pPr indent="0" marL="0">
-              <a:buNone/>
-            </a:pPr>
-            <a:r>
-              <a:rPr lang="en-US" sz="1650" b="1" dirty="0">
-                <a:solidFill>
-                  <a:srgbClr val="008542"/>
-                </a:solidFill>
-                <a:latin typeface="Calibri" pitchFamily="34" charset="0"/>
-                <a:ea typeface="Calibri" pitchFamily="34" charset="-122"/>
-                <a:cs typeface="Calibri" pitchFamily="34" charset="-120"/>
-              </a:rPr>
-              <a:t>SPRINT 5 · EXPERIÊNCIA DO ALUNO</a:t>
-            </a:r>
-            <a:endParaRPr lang="en-US" sz="1650" dirty="0"/>
-          </a:p>
-        </p:txBody>
-      </p:sp>
-      <p:sp>
-        <p:nvSpPr>
-          <p:cNvPr id="9" name="Text 6"/>
-          <p:cNvSpPr/>
-          <p:nvPr/>
-        </p:nvSpPr>
-        <p:spPr>
-          <a:xfrm>
-            <a:off x="502920" y="1389888"/>
-            <a:ext cx="11183112" cy="960120"/>
-          </a:xfrm>
-          <a:prstGeom prst="rect">
-            <a:avLst/>
-          </a:prstGeom>
-          <a:noFill/>
-          <a:ln/>
-        </p:spPr>
-        <p:txBody>
-          <a:bodyPr wrap="square" rtlCol="0" anchor="ctr"/>
-          <a:lstStyle/>
-          <a:p>
-            <a:pPr indent="0" marL="0">
-              <a:buNone/>
-            </a:pPr>
-            <a:r>
-              <a:rPr lang="en-US" sz="3700" b="1" dirty="0">
-                <a:solidFill>
-                  <a:srgbClr val="003366"/>
-                </a:solidFill>
-                <a:latin typeface="Calibri" pitchFamily="34" charset="0"/>
-                <a:ea typeface="Calibri" pitchFamily="34" charset="-122"/>
-                <a:cs typeface="Calibri" pitchFamily="34" charset="-120"/>
-              </a:rPr>
-              <a:t>A jornada completa do aluno, ponta a ponta</a:t>
-            </a:r>
-            <a:endParaRPr lang="en-US" sz="3700" dirty="0"/>
-          </a:p>
-        </p:txBody>
-      </p:sp>
-      <p:sp>
-        <p:nvSpPr>
-          <p:cNvPr id="10" name="Shape 7"/>
-          <p:cNvSpPr/>
-          <p:nvPr/>
-        </p:nvSpPr>
-        <p:spPr>
-          <a:xfrm>
-            <a:off x="502920" y="2697480"/>
-            <a:ext cx="2487168" cy="2880360"/>
-          </a:xfrm>
-          <a:prstGeom prst="rect">
-            <a:avLst/>
-          </a:prstGeom>
-          <a:solidFill>
-            <a:srgbClr val="FFFFFF"/>
+            <a:off x="502920" y="2560320"/>
+            <a:ext cx="5409590" cy="2743200"/>
+          </a:xfrm>
+          <a:prstGeom prst="roundRect">
+            <a:avLst>
+              <a:gd name="adj" fmla="val 2333"/>
+            </a:avLst>
+          </a:prstGeom>
+          <a:solidFill>
+            <a:srgbClr val="0A2A4A"/>
           </a:solidFill>
           <a:ln w="12700">
             <a:solidFill>
-              <a:srgbClr val="E6E9EE"/>
+              <a:srgbClr val="2A527E"/>
             </a:solidFill>
             <a:prstDash val="solid"/>
           </a:ln>
-          <a:effectLst>
-            <a:outerShdw sx="100000" sy="100000" kx="0" ky="0" algn="bl" rotWithShape="0" blurRad="Infinity" dist="Infinity" dir="Infinity">
-              <a:srgbClr val="9AA7B4">
-                <a:alpha val="Infinity"/>
-              </a:srgbClr>
-            </a:outerShdw>
-          </a:effectLst>
-        </p:spPr>
-      </p:sp>
-      <p:sp>
-        <p:nvSpPr>
-          <p:cNvPr id="11" name="Shape 8"/>
-          <p:cNvSpPr/>
-          <p:nvPr/>
-        </p:nvSpPr>
-        <p:spPr>
-          <a:xfrm>
-            <a:off x="502920" y="2697480"/>
-            <a:ext cx="2487168" cy="54864"/>
+        </p:spPr>
+      </p:sp>
+      <p:sp>
+        <p:nvSpPr>
+          <p:cNvPr id="8" name="Shape 5"/>
+          <p:cNvSpPr/>
+          <p:nvPr/>
+        </p:nvSpPr>
+        <p:spPr>
+          <a:xfrm>
+            <a:off x="502920" y="2560320"/>
+            <a:ext cx="5409590" cy="54864"/>
           </a:xfrm>
           <a:prstGeom prst="rect">
             <a:avLst/>
@@ -5978,20 +5825,118 @@
       </p:sp>
       <p:sp>
         <p:nvSpPr>
+          <p:cNvPr id="9" name="Text 6"/>
+          <p:cNvSpPr/>
+          <p:nvPr/>
+        </p:nvSpPr>
+        <p:spPr>
+          <a:xfrm>
+            <a:off x="777240" y="2743200"/>
+            <a:ext cx="4864608" cy="320040"/>
+          </a:xfrm>
+          <a:prstGeom prst="rect">
+            <a:avLst/>
+          </a:prstGeom>
+          <a:noFill/>
+          <a:ln/>
+        </p:spPr>
+        <p:txBody>
+          <a:bodyPr wrap="square" rtlCol="0" anchor="ctr"/>
+          <a:lstStyle/>
+          <a:p>
+            <a:pPr indent="0" marL="0">
+              <a:buNone/>
+            </a:pPr>
+            <a:r>
+              <a:rPr lang="en-US" sz="1500" b="1" dirty="0">
+                <a:solidFill>
+                  <a:srgbClr val="008542"/>
+                </a:solidFill>
+                <a:latin typeface="Calibri" pitchFamily="34" charset="0"/>
+                <a:ea typeface="Calibri" pitchFamily="34" charset="-122"/>
+                <a:cs typeface="Calibri" pitchFamily="34" charset="-120"/>
+              </a:rPr>
+              <a:t>TUDO EM UM LUGAR SÓ</a:t>
+            </a:r>
+            <a:endParaRPr lang="en-US" sz="1500" dirty="0"/>
+          </a:p>
+        </p:txBody>
+      </p:sp>
+      <p:sp>
+        <p:nvSpPr>
+          <p:cNvPr id="10" name="Shape 7"/>
+          <p:cNvSpPr/>
+          <p:nvPr/>
+        </p:nvSpPr>
+        <p:spPr>
+          <a:xfrm>
+            <a:off x="795528" y="3346704"/>
+            <a:ext cx="118872" cy="118872"/>
+          </a:xfrm>
+          <a:prstGeom prst="ellipse">
+            <a:avLst/>
+          </a:prstGeom>
+          <a:solidFill>
+            <a:srgbClr val="008542"/>
+          </a:solidFill>
+          <a:ln/>
+        </p:spPr>
+      </p:sp>
+      <p:sp>
+        <p:nvSpPr>
+          <p:cNvPr id="11" name="Text 8"/>
+          <p:cNvSpPr/>
+          <p:nvPr/>
+        </p:nvSpPr>
+        <p:spPr>
+          <a:xfrm>
+            <a:off x="1033272" y="3255264"/>
+            <a:ext cx="4572000" cy="594360"/>
+          </a:xfrm>
+          <a:prstGeom prst="rect">
+            <a:avLst/>
+          </a:prstGeom>
+          <a:noFill/>
+          <a:ln/>
+        </p:spPr>
+        <p:txBody>
+          <a:bodyPr wrap="square" rtlCol="0" anchor="t"/>
+          <a:lstStyle/>
+          <a:p>
+            <a:pPr indent="0" marL="0">
+              <a:buNone/>
+            </a:pPr>
+            <a:r>
+              <a:rPr lang="en-US" sz="1400" dirty="0">
+                <a:solidFill>
+                  <a:srgbClr val="FFFFFF"/>
+                </a:solidFill>
+                <a:latin typeface="Calibri" pitchFamily="34" charset="0"/>
+                <a:ea typeface="Calibri" pitchFamily="34" charset="-122"/>
+                <a:cs typeface="Calibri" pitchFamily="34" charset="-120"/>
+              </a:rPr>
+              <a:t>Plataformas acadêmicas: universidade, fórum, Drive, e-mail e calendário</a:t>
+            </a:r>
+            <a:endParaRPr lang="en-US" sz="1400" dirty="0"/>
+          </a:p>
+        </p:txBody>
+      </p:sp>
+      <p:sp>
+        <p:nvSpPr>
           <p:cNvPr id="12" name="Shape 9"/>
           <p:cNvSpPr/>
           <p:nvPr/>
         </p:nvSpPr>
         <p:spPr>
           <a:xfrm>
-            <a:off x="1426464" y="3081528"/>
-            <a:ext cx="640080" cy="640080"/>
+            <a:off x="795528" y="3950208"/>
+            <a:ext cx="118872" cy="118872"/>
           </a:xfrm>
           <a:prstGeom prst="ellipse">
             <a:avLst/>
           </a:prstGeom>
           <a:solidFill>
-            <a:srgbClr val="003366"/>
+            <a:srgbClr val="008542"/>
           </a:solidFill>
           <a:ln/>
         </p:spPr>
@@ -6004,24 +5949,24 @@
         </p:nvSpPr>
         <p:spPr>
           <a:xfrm>
-            <a:off x="1426464" y="3081528"/>
-            <a:ext cx="640080" cy="640080"/>
-          </a:xfrm>
-          <a:prstGeom prst="rect">
-            <a:avLst/>
-          </a:prstGeom>
-          <a:noFill/>
-          <a:ln/>
-        </p:spPr>
-        <p:txBody>
-          <a:bodyPr wrap="square" rtlCol="0" anchor="ctr"/>
-          <a:lstStyle/>
-          <a:p>
-            <a:pPr algn="ctr" indent="0" marL="0">
-              <a:buNone/>
-            </a:pPr>
-            <a:r>
-              <a:rPr lang="en-US" sz="2400" b="1" dirty="0">
+            <a:off x="1033272" y="3858768"/>
+            <a:ext cx="4572000" cy="594360"/>
+          </a:xfrm>
+          <a:prstGeom prst="rect">
+            <a:avLst/>
+          </a:prstGeom>
+          <a:noFill/>
+          <a:ln/>
+        </p:spPr>
+        <p:txBody>
+          <a:bodyPr wrap="square" rtlCol="0" anchor="t"/>
+          <a:lstStyle/>
+          <a:p>
+            <a:pPr indent="0" marL="0">
+              <a:buNone/>
+            </a:pPr>
+            <a:r>
+              <a:rPr lang="en-US" sz="1400" dirty="0">
                 <a:solidFill>
                   <a:srgbClr val="FFFFFF"/>
                 </a:solidFill>
@@ -6029,22 +5974,42 @@
                 <a:ea typeface="Calibri" pitchFamily="34" charset="-122"/>
                 <a:cs typeface="Calibri" pitchFamily="34" charset="-120"/>
               </a:rPr>
-              <a:t>1</a:t>
-            </a:r>
-            <a:endParaRPr lang="en-US" sz="2400" dirty="0"/>
-          </a:p>
-        </p:txBody>
-      </p:sp>
-      <p:sp>
-        <p:nvSpPr>
-          <p:cNvPr id="14" name="Text 11"/>
-          <p:cNvSpPr/>
-          <p:nvPr/>
-        </p:nvSpPr>
-        <p:spPr>
-          <a:xfrm>
-            <a:off x="640080" y="3886200"/>
-            <a:ext cx="2212848" cy="640080"/>
+              <a:t>Caixa de entrada única: avisos, prazos e mensagens consolidados</a:t>
+            </a:r>
+            <a:endParaRPr lang="en-US" sz="1400" dirty="0"/>
+          </a:p>
+        </p:txBody>
+      </p:sp>
+      <p:sp>
+        <p:nvSpPr>
+          <p:cNvPr id="14" name="Shape 11"/>
+          <p:cNvSpPr/>
+          <p:nvPr/>
+        </p:nvSpPr>
+        <p:spPr>
+          <a:xfrm>
+            <a:off x="795528" y="4553712"/>
+            <a:ext cx="118872" cy="118872"/>
+          </a:xfrm>
+          <a:prstGeom prst="ellipse">
+            <a:avLst/>
+          </a:prstGeom>
+          <a:solidFill>
+            <a:srgbClr val="008542"/>
+          </a:solidFill>
+          <a:ln/>
+        </p:spPr>
+      </p:sp>
+      <p:sp>
+        <p:nvSpPr>
+          <p:cNvPr id="15" name="Text 12"/>
+          <p:cNvSpPr/>
+          <p:nvPr/>
+        </p:nvSpPr>
+        <p:spPr>
+          <a:xfrm>
+            <a:off x="1033272" y="4462272"/>
+            <a:ext cx="4572000" cy="594360"/>
           </a:xfrm>
           <a:prstGeom prst="rect">
             <a:avLst/>
@@ -6056,60 +6021,21 @@
           <a:bodyPr wrap="square" rtlCol="0" anchor="t"/>
           <a:lstStyle/>
           <a:p>
-            <a:pPr algn="ctr" indent="0" marL="0">
-              <a:buNone/>
-            </a:pPr>
-            <a:r>
-              <a:rPr lang="en-US" sz="1500" b="1" dirty="0">
-                <a:solidFill>
-                  <a:srgbClr val="003366"/>
-                </a:solidFill>
-                <a:latin typeface="Calibri" pitchFamily="34" charset="0"/>
-                <a:ea typeface="Calibri" pitchFamily="34" charset="-122"/>
-                <a:cs typeface="Calibri" pitchFamily="34" charset="-120"/>
-              </a:rPr>
-              <a:t>Aquisição &amp; Onboarding</a:t>
-            </a:r>
-            <a:endParaRPr lang="en-US" sz="1500" dirty="0"/>
-          </a:p>
-        </p:txBody>
-      </p:sp>
-      <p:sp>
-        <p:nvSpPr>
-          <p:cNvPr id="15" name="Text 12"/>
-          <p:cNvSpPr/>
-          <p:nvPr/>
-        </p:nvSpPr>
-        <p:spPr>
-          <a:xfrm>
-            <a:off x="685800" y="4526280"/>
-            <a:ext cx="2121408" cy="960120"/>
-          </a:xfrm>
-          <a:prstGeom prst="rect">
-            <a:avLst/>
-          </a:prstGeom>
-          <a:noFill/>
-          <a:ln/>
-        </p:spPr>
-        <p:txBody>
-          <a:bodyPr wrap="square" rtlCol="0" anchor="t"/>
-          <a:lstStyle/>
-          <a:p>
-            <a:pPr algn="ctr" indent="0" marL="0">
-              <a:buNone/>
-            </a:pPr>
-            <a:r>
-              <a:rPr lang="en-US" sz="1250" dirty="0">
-                <a:solidFill>
-                  <a:srgbClr val="55606E"/>
-                </a:solidFill>
-                <a:latin typeface="Calibri" pitchFamily="34" charset="0"/>
-                <a:ea typeface="Calibri" pitchFamily="34" charset="-122"/>
-                <a:cs typeface="Calibri" pitchFamily="34" charset="-120"/>
-              </a:rPr>
-              <a:t>Login + magic link, identidade UnB, consentimento LGPD, onboarding em 4 passos</a:t>
-            </a:r>
-            <a:endParaRPr lang="en-US" sz="1250" dirty="0"/>
+            <a:pPr indent="0" marL="0">
+              <a:buNone/>
+            </a:pPr>
+            <a:r>
+              <a:rPr lang="en-US" sz="1400" dirty="0">
+                <a:solidFill>
+                  <a:srgbClr val="FFFFFF"/>
+                </a:solidFill>
+                <a:latin typeface="Calibri" pitchFamily="34" charset="0"/>
+                <a:ea typeface="Calibri" pitchFamily="34" charset="-122"/>
+                <a:cs typeface="Calibri" pitchFamily="34" charset="-120"/>
+              </a:rPr>
+              <a:t>Painel do semestre: matérias, notas, grade e progresso</a:t>
+            </a:r>
+            <a:endParaRPr lang="en-US" sz="1400" dirty="0"/>
           </a:p>
         </p:txBody>
       </p:sp>
@@ -6121,62 +6047,96 @@
         </p:nvSpPr>
         <p:spPr>
           <a:xfrm>
-            <a:off x="3044952" y="3991356"/>
-            <a:ext cx="301752" cy="292608"/>
-          </a:xfrm>
-          <a:prstGeom prst="rightArrow">
-            <a:avLst/>
-          </a:prstGeom>
-          <a:solidFill>
-            <a:srgbClr val="008542"/>
-          </a:solidFill>
-          <a:ln/>
-        </p:spPr>
-      </p:sp>
-      <p:sp>
-        <p:nvSpPr>
-          <p:cNvPr id="17" name="Shape 14"/>
-          <p:cNvSpPr/>
-          <p:nvPr/>
-        </p:nvSpPr>
-        <p:spPr>
-          <a:xfrm>
-            <a:off x="3401568" y="2697480"/>
-            <a:ext cx="2487168" cy="2880360"/>
-          </a:xfrm>
-          <a:prstGeom prst="rect">
-            <a:avLst/>
-          </a:prstGeom>
-          <a:solidFill>
-            <a:srgbClr val="FFFFFF"/>
+            <a:off x="6278270" y="2560320"/>
+            <a:ext cx="5409590" cy="2743200"/>
+          </a:xfrm>
+          <a:prstGeom prst="roundRect">
+            <a:avLst>
+              <a:gd name="adj" fmla="val 2333"/>
+            </a:avLst>
+          </a:prstGeom>
+          <a:solidFill>
+            <a:srgbClr val="0A2A4A"/>
           </a:solidFill>
           <a:ln w="12700">
             <a:solidFill>
-              <a:srgbClr val="E6E9EE"/>
+              <a:srgbClr val="2A527E"/>
             </a:solidFill>
             <a:prstDash val="solid"/>
           </a:ln>
-          <a:effectLst>
-            <a:outerShdw sx="100000" sy="100000" kx="0" ky="0" algn="bl" rotWithShape="0" blurRad="Infinity" dist="Infinity" dir="Infinity">
-              <a:srgbClr val="9AA7B4">
-                <a:alpha val="Infinity"/>
-              </a:srgbClr>
-            </a:outerShdw>
-          </a:effectLst>
-        </p:spPr>
-      </p:sp>
-      <p:sp>
-        <p:nvSpPr>
-          <p:cNvPr id="18" name="Shape 15"/>
-          <p:cNvSpPr/>
-          <p:nvPr/>
-        </p:nvSpPr>
-        <p:spPr>
-          <a:xfrm>
-            <a:off x="3401568" y="2697480"/>
-            <a:ext cx="2487168" cy="54864"/>
-          </a:xfrm>
-          <a:prstGeom prst="rect">
+        </p:spPr>
+      </p:sp>
+      <p:sp>
+        <p:nvSpPr>
+          <p:cNvPr id="17" name="Shape 14"/>
+          <p:cNvSpPr/>
+          <p:nvPr/>
+        </p:nvSpPr>
+        <p:spPr>
+          <a:xfrm>
+            <a:off x="6278270" y="2560320"/>
+            <a:ext cx="5409590" cy="54864"/>
+          </a:xfrm>
+          <a:prstGeom prst="rect">
+            <a:avLst/>
+          </a:prstGeom>
+          <a:solidFill>
+            <a:srgbClr val="FFB81C"/>
+          </a:solidFill>
+          <a:ln/>
+        </p:spPr>
+      </p:sp>
+      <p:sp>
+        <p:nvSpPr>
+          <p:cNvPr id="18" name="Text 15"/>
+          <p:cNvSpPr/>
+          <p:nvPr/>
+        </p:nvSpPr>
+        <p:spPr>
+          <a:xfrm>
+            <a:off x="6552590" y="2743200"/>
+            <a:ext cx="4864608" cy="320040"/>
+          </a:xfrm>
+          <a:prstGeom prst="rect">
+            <a:avLst/>
+          </a:prstGeom>
+          <a:noFill/>
+          <a:ln/>
+        </p:spPr>
+        <p:txBody>
+          <a:bodyPr wrap="square" rtlCol="0" anchor="ctr"/>
+          <a:lstStyle/>
+          <a:p>
+            <a:pPr indent="0" marL="0">
+              <a:buNone/>
+            </a:pPr>
+            <a:r>
+              <a:rPr lang="en-US" sz="1500" b="1" dirty="0">
+                <a:solidFill>
+                  <a:srgbClr val="FFB81C"/>
+                </a:solidFill>
+                <a:latin typeface="Calibri" pitchFamily="34" charset="0"/>
+                <a:ea typeface="Calibri" pitchFamily="34" charset="-122"/>
+                <a:cs typeface="Calibri" pitchFamily="34" charset="-120"/>
+              </a:rPr>
+              <a:t>IA QUE CONHECE O ALUNO</a:t>
+            </a:r>
+            <a:endParaRPr lang="en-US" sz="1500" dirty="0"/>
+          </a:p>
+        </p:txBody>
+      </p:sp>
+      <p:sp>
+        <p:nvSpPr>
+          <p:cNvPr id="19" name="Shape 16"/>
+          <p:cNvSpPr/>
+          <p:nvPr/>
+        </p:nvSpPr>
+        <p:spPr>
+          <a:xfrm>
+            <a:off x="6570878" y="3346704"/>
+            <a:ext cx="118872" cy="118872"/>
+          </a:xfrm>
+          <a:prstGeom prst="ellipse">
             <a:avLst/>
           </a:prstGeom>
           <a:solidFill>
@@ -6187,34 +6147,171 @@
       </p:sp>
       <p:sp>
         <p:nvSpPr>
-          <p:cNvPr id="19" name="Shape 16"/>
-          <p:cNvSpPr/>
-          <p:nvPr/>
-        </p:nvSpPr>
-        <p:spPr>
-          <a:xfrm>
-            <a:off x="4325112" y="3081528"/>
-            <a:ext cx="640080" cy="640080"/>
+          <p:cNvPr id="20" name="Text 17"/>
+          <p:cNvSpPr/>
+          <p:nvPr/>
+        </p:nvSpPr>
+        <p:spPr>
+          <a:xfrm>
+            <a:off x="6808622" y="3255264"/>
+            <a:ext cx="4572000" cy="594360"/>
+          </a:xfrm>
+          <a:prstGeom prst="rect">
+            <a:avLst/>
+          </a:prstGeom>
+          <a:noFill/>
+          <a:ln/>
+        </p:spPr>
+        <p:txBody>
+          <a:bodyPr wrap="square" rtlCol="0" anchor="t"/>
+          <a:lstStyle/>
+          <a:p>
+            <a:pPr indent="0" marL="0">
+              <a:buNone/>
+            </a:pPr>
+            <a:r>
+              <a:rPr lang="en-US" sz="1400" dirty="0">
+                <a:solidFill>
+                  <a:srgbClr val="FFFFFF"/>
+                </a:solidFill>
+                <a:latin typeface="Calibri" pitchFamily="34" charset="0"/>
+                <a:ea typeface="Calibri" pitchFamily="34" charset="-122"/>
+                <a:cs typeface="Calibri" pitchFamily="34" charset="-120"/>
+              </a:rPr>
+              <a:t>Plano de estudo personalizado, sob medida pra carga do semestre</a:t>
+            </a:r>
+            <a:endParaRPr lang="en-US" sz="1400" dirty="0"/>
+          </a:p>
+        </p:txBody>
+      </p:sp>
+      <p:sp>
+        <p:nvSpPr>
+          <p:cNvPr id="21" name="Shape 18"/>
+          <p:cNvSpPr/>
+          <p:nvPr/>
+        </p:nvSpPr>
+        <p:spPr>
+          <a:xfrm>
+            <a:off x="6570878" y="3950208"/>
+            <a:ext cx="118872" cy="118872"/>
           </a:xfrm>
           <a:prstGeom prst="ellipse">
             <a:avLst/>
           </a:prstGeom>
           <a:solidFill>
-            <a:srgbClr val="003366"/>
-          </a:solidFill>
-          <a:ln/>
-        </p:spPr>
-      </p:sp>
-      <p:sp>
-        <p:nvSpPr>
-          <p:cNvPr id="20" name="Text 17"/>
-          <p:cNvSpPr/>
-          <p:nvPr/>
-        </p:nvSpPr>
-        <p:spPr>
-          <a:xfrm>
-            <a:off x="4325112" y="3081528"/>
-            <a:ext cx="640080" cy="640080"/>
+            <a:srgbClr val="008542"/>
+          </a:solidFill>
+          <a:ln/>
+        </p:spPr>
+      </p:sp>
+      <p:sp>
+        <p:nvSpPr>
+          <p:cNvPr id="22" name="Text 19"/>
+          <p:cNvSpPr/>
+          <p:nvPr/>
+        </p:nvSpPr>
+        <p:spPr>
+          <a:xfrm>
+            <a:off x="6808622" y="3858768"/>
+            <a:ext cx="4572000" cy="594360"/>
+          </a:xfrm>
+          <a:prstGeom prst="rect">
+            <a:avLst/>
+          </a:prstGeom>
+          <a:noFill/>
+          <a:ln/>
+        </p:spPr>
+        <p:txBody>
+          <a:bodyPr wrap="square" rtlCol="0" anchor="t"/>
+          <a:lstStyle/>
+          <a:p>
+            <a:pPr indent="0" marL="0">
+              <a:buNone/>
+            </a:pPr>
+            <a:r>
+              <a:rPr lang="en-US" sz="1400" dirty="0">
+                <a:solidFill>
+                  <a:srgbClr val="FFFFFF"/>
+                </a:solidFill>
+                <a:latin typeface="Calibri" pitchFamily="34" charset="0"/>
+                <a:ea typeface="Calibri" pitchFamily="34" charset="-122"/>
+                <a:cs typeface="Calibri" pitchFamily="34" charset="-120"/>
+              </a:rPr>
+              <a:t>Reforço retroativo: identifica lacunas de semestres passados</a:t>
+            </a:r>
+            <a:endParaRPr lang="en-US" sz="1400" dirty="0"/>
+          </a:p>
+        </p:txBody>
+      </p:sp>
+      <p:sp>
+        <p:nvSpPr>
+          <p:cNvPr id="23" name="Shape 20"/>
+          <p:cNvSpPr/>
+          <p:nvPr/>
+        </p:nvSpPr>
+        <p:spPr>
+          <a:xfrm>
+            <a:off x="6570878" y="4553712"/>
+            <a:ext cx="118872" cy="118872"/>
+          </a:xfrm>
+          <a:prstGeom prst="ellipse">
+            <a:avLst/>
+          </a:prstGeom>
+          <a:solidFill>
+            <a:srgbClr val="008542"/>
+          </a:solidFill>
+          <a:ln/>
+        </p:spPr>
+      </p:sp>
+      <p:sp>
+        <p:nvSpPr>
+          <p:cNvPr id="24" name="Text 21"/>
+          <p:cNvSpPr/>
+          <p:nvPr/>
+        </p:nvSpPr>
+        <p:spPr>
+          <a:xfrm>
+            <a:off x="6808622" y="4462272"/>
+            <a:ext cx="4572000" cy="594360"/>
+          </a:xfrm>
+          <a:prstGeom prst="rect">
+            <a:avLst/>
+          </a:prstGeom>
+          <a:noFill/>
+          <a:ln/>
+        </p:spPr>
+        <p:txBody>
+          <a:bodyPr wrap="square" rtlCol="0" anchor="t"/>
+          <a:lstStyle/>
+          <a:p>
+            <a:pPr indent="0" marL="0">
+              <a:buNone/>
+            </a:pPr>
+            <a:r>
+              <a:rPr lang="en-US" sz="1400" dirty="0">
+                <a:solidFill>
+                  <a:srgbClr val="FFFFFF"/>
+                </a:solidFill>
+                <a:latin typeface="Calibri" pitchFamily="34" charset="0"/>
+                <a:ea typeface="Calibri" pitchFamily="34" charset="-122"/>
+                <a:cs typeface="Calibri" pitchFamily="34" charset="-120"/>
+              </a:rPr>
+              <a:t>Tutor pessoal por matéria, no nível do aluno</a:t>
+            </a:r>
+            <a:endParaRPr lang="en-US" sz="1400" dirty="0"/>
+          </a:p>
+        </p:txBody>
+      </p:sp>
+      <p:sp>
+        <p:nvSpPr>
+          <p:cNvPr id="25" name="Text 22"/>
+          <p:cNvSpPr/>
+          <p:nvPr/>
+        </p:nvSpPr>
+        <p:spPr>
+          <a:xfrm>
+            <a:off x="502920" y="5532120"/>
+            <a:ext cx="11183112" cy="365760"/>
           </a:xfrm>
           <a:prstGeom prst="rect">
             <a:avLst/>
@@ -6226,523 +6323,41 @@
           <a:bodyPr wrap="square" rtlCol="0" anchor="ctr"/>
           <a:lstStyle/>
           <a:p>
-            <a:pPr algn="ctr" indent="0" marL="0">
-              <a:buNone/>
-            </a:pPr>
-            <a:r>
-              <a:rPr lang="en-US" sz="2400" b="1" dirty="0">
-                <a:solidFill>
-                  <a:srgbClr val="FFFFFF"/>
-                </a:solidFill>
-                <a:latin typeface="Calibri" pitchFamily="34" charset="0"/>
-                <a:ea typeface="Calibri" pitchFamily="34" charset="-122"/>
-                <a:cs typeface="Calibri" pitchFamily="34" charset="-120"/>
-              </a:rPr>
-              <a:t>2</a:t>
-            </a:r>
-            <a:endParaRPr lang="en-US" sz="2400" dirty="0"/>
-          </a:p>
-        </p:txBody>
-      </p:sp>
-      <p:sp>
-        <p:nvSpPr>
-          <p:cNvPr id="21" name="Text 18"/>
-          <p:cNvSpPr/>
-          <p:nvPr/>
-        </p:nvSpPr>
-        <p:spPr>
-          <a:xfrm>
-            <a:off x="3538728" y="3886200"/>
-            <a:ext cx="2212848" cy="640080"/>
-          </a:xfrm>
-          <a:prstGeom prst="rect">
-            <a:avLst/>
-          </a:prstGeom>
-          <a:noFill/>
-          <a:ln/>
-        </p:spPr>
-        <p:txBody>
-          <a:bodyPr wrap="square" rtlCol="0" anchor="t"/>
-          <a:lstStyle/>
-          <a:p>
-            <a:pPr algn="ctr" indent="0" marL="0">
-              <a:buNone/>
-            </a:pPr>
-            <a:r>
-              <a:rPr lang="en-US" sz="1500" b="1" dirty="0">
-                <a:solidFill>
-                  <a:srgbClr val="003366"/>
-                </a:solidFill>
-                <a:latin typeface="Calibri" pitchFamily="34" charset="0"/>
-                <a:ea typeface="Calibri" pitchFamily="34" charset="-122"/>
-                <a:cs typeface="Calibri" pitchFamily="34" charset="-120"/>
-              </a:rPr>
-              <a:t>Perfil acadêmico</a:t>
-            </a:r>
-            <a:endParaRPr lang="en-US" sz="1500" dirty="0"/>
-          </a:p>
-        </p:txBody>
-      </p:sp>
-      <p:sp>
-        <p:nvSpPr>
-          <p:cNvPr id="22" name="Text 19"/>
-          <p:cNvSpPr/>
-          <p:nvPr/>
-        </p:nvSpPr>
-        <p:spPr>
-          <a:xfrm>
-            <a:off x="3584448" y="4526280"/>
-            <a:ext cx="2121408" cy="960120"/>
-          </a:xfrm>
-          <a:prstGeom prst="rect">
-            <a:avLst/>
-          </a:prstGeom>
-          <a:noFill/>
-          <a:ln/>
-        </p:spPr>
-        <p:txBody>
-          <a:bodyPr wrap="square" rtlCol="0" anchor="t"/>
-          <a:lstStyle/>
-          <a:p>
-            <a:pPr algn="ctr" indent="0" marL="0">
-              <a:buNone/>
-            </a:pPr>
-            <a:r>
-              <a:rPr lang="en-US" sz="1250" dirty="0">
-                <a:solidFill>
-                  <a:srgbClr val="55606E"/>
-                </a:solidFill>
-                <a:latin typeface="Calibri" pitchFamily="34" charset="0"/>
-                <a:ea typeface="Calibri" pitchFamily="34" charset="-122"/>
-                <a:cs typeface="Calibri" pitchFamily="34" charset="-120"/>
-              </a:rPr>
-              <a:t>Grade visual de horários, importação do SIGAA, conexão do Drive</a:t>
-            </a:r>
-            <a:endParaRPr lang="en-US" sz="1250" dirty="0"/>
-          </a:p>
-        </p:txBody>
-      </p:sp>
-      <p:sp>
-        <p:nvSpPr>
-          <p:cNvPr id="23" name="Shape 20"/>
-          <p:cNvSpPr/>
-          <p:nvPr/>
-        </p:nvSpPr>
-        <p:spPr>
-          <a:xfrm>
-            <a:off x="5943600" y="3991356"/>
-            <a:ext cx="301752" cy="292608"/>
-          </a:xfrm>
-          <a:prstGeom prst="rightArrow">
-            <a:avLst/>
-          </a:prstGeom>
-          <a:solidFill>
-            <a:srgbClr val="008542"/>
-          </a:solidFill>
-          <a:ln/>
-        </p:spPr>
-      </p:sp>
-      <p:sp>
-        <p:nvSpPr>
-          <p:cNvPr id="24" name="Shape 21"/>
-          <p:cNvSpPr/>
-          <p:nvPr/>
-        </p:nvSpPr>
-        <p:spPr>
-          <a:xfrm>
-            <a:off x="6300216" y="2697480"/>
-            <a:ext cx="2487168" cy="2880360"/>
-          </a:xfrm>
-          <a:prstGeom prst="rect">
-            <a:avLst/>
-          </a:prstGeom>
-          <a:solidFill>
-            <a:srgbClr val="FFFFFF"/>
-          </a:solidFill>
-          <a:ln w="12700">
-            <a:solidFill>
-              <a:srgbClr val="E6E9EE"/>
-            </a:solidFill>
-            <a:prstDash val="solid"/>
-          </a:ln>
-          <a:effectLst>
-            <a:outerShdw sx="100000" sy="100000" kx="0" ky="0" algn="bl" rotWithShape="0" blurRad="Infinity" dist="Infinity" dir="Infinity">
-              <a:srgbClr val="9AA7B4">
-                <a:alpha val="Infinity"/>
-              </a:srgbClr>
-            </a:outerShdw>
-          </a:effectLst>
-        </p:spPr>
-      </p:sp>
-      <p:sp>
-        <p:nvSpPr>
-          <p:cNvPr id="25" name="Shape 22"/>
-          <p:cNvSpPr/>
-          <p:nvPr/>
-        </p:nvSpPr>
-        <p:spPr>
-          <a:xfrm>
-            <a:off x="6300216" y="2697480"/>
-            <a:ext cx="2487168" cy="54864"/>
-          </a:xfrm>
-          <a:prstGeom prst="rect">
-            <a:avLst/>
-          </a:prstGeom>
-          <a:solidFill>
-            <a:srgbClr val="008542"/>
-          </a:solidFill>
-          <a:ln/>
-        </p:spPr>
+            <a:pPr indent="0" marL="0">
+              <a:buNone/>
+            </a:pPr>
+            <a:r>
+              <a:rPr lang="en-US" sz="1400" b="1" dirty="0">
+                <a:solidFill>
+                  <a:srgbClr val="BFD0E6"/>
+                </a:solidFill>
+                <a:latin typeface="Calibri" pitchFamily="34" charset="0"/>
+                <a:ea typeface="Calibri" pitchFamily="34" charset="-122"/>
+                <a:cs typeface="Calibri" pitchFamily="34" charset="-120"/>
+              </a:rPr>
+              <a:t>Também à frente: </a:t>
+            </a:r>
+            <a:pPr indent="0" marL="0">
+              <a:buNone/>
+            </a:pPr>
+            <a:r>
+              <a:rPr lang="en-US" sz="1400" dirty="0">
+                <a:solidFill>
+                  <a:srgbClr val="BFD0E6"/>
+                </a:solidFill>
+                <a:latin typeface="Calibri" pitchFamily="34" charset="0"/>
+                <a:ea typeface="Calibri" pitchFamily="34" charset="-122"/>
+                <a:cs typeface="Calibri" pitchFamily="34" charset="-120"/>
+              </a:rPr>
+              <a:t>planejamento e produtividade · acessibilidade · privacidade avançada · monetização sustentável.</a:t>
+            </a:r>
+            <a:endParaRPr lang="en-US" sz="1400" dirty="0"/>
+          </a:p>
+        </p:txBody>
       </p:sp>
       <p:sp>
         <p:nvSpPr>
           <p:cNvPr id="26" name="Shape 23"/>
-          <p:cNvSpPr/>
-          <p:nvPr/>
-        </p:nvSpPr>
-        <p:spPr>
-          <a:xfrm>
-            <a:off x="7223760" y="3081528"/>
-            <a:ext cx="640080" cy="640080"/>
-          </a:xfrm>
-          <a:prstGeom prst="ellipse">
-            <a:avLst/>
-          </a:prstGeom>
-          <a:solidFill>
-            <a:srgbClr val="003366"/>
-          </a:solidFill>
-          <a:ln/>
-        </p:spPr>
-      </p:sp>
-      <p:sp>
-        <p:nvSpPr>
-          <p:cNvPr id="27" name="Text 24"/>
-          <p:cNvSpPr/>
-          <p:nvPr/>
-        </p:nvSpPr>
-        <p:spPr>
-          <a:xfrm>
-            <a:off x="7223760" y="3081528"/>
-            <a:ext cx="640080" cy="640080"/>
-          </a:xfrm>
-          <a:prstGeom prst="rect">
-            <a:avLst/>
-          </a:prstGeom>
-          <a:noFill/>
-          <a:ln/>
-        </p:spPr>
-        <p:txBody>
-          <a:bodyPr wrap="square" rtlCol="0" anchor="ctr"/>
-          <a:lstStyle/>
-          <a:p>
-            <a:pPr algn="ctr" indent="0" marL="0">
-              <a:buNone/>
-            </a:pPr>
-            <a:r>
-              <a:rPr lang="en-US" sz="2400" b="1" dirty="0">
-                <a:solidFill>
-                  <a:srgbClr val="FFFFFF"/>
-                </a:solidFill>
-                <a:latin typeface="Calibri" pitchFamily="34" charset="0"/>
-                <a:ea typeface="Calibri" pitchFamily="34" charset="-122"/>
-                <a:cs typeface="Calibri" pitchFamily="34" charset="-120"/>
-              </a:rPr>
-              <a:t>3</a:t>
-            </a:r>
-            <a:endParaRPr lang="en-US" sz="2400" dirty="0"/>
-          </a:p>
-        </p:txBody>
-      </p:sp>
-      <p:sp>
-        <p:nvSpPr>
-          <p:cNvPr id="28" name="Text 25"/>
-          <p:cNvSpPr/>
-          <p:nvPr/>
-        </p:nvSpPr>
-        <p:spPr>
-          <a:xfrm>
-            <a:off x="6437376" y="3886200"/>
-            <a:ext cx="2212848" cy="640080"/>
-          </a:xfrm>
-          <a:prstGeom prst="rect">
-            <a:avLst/>
-          </a:prstGeom>
-          <a:noFill/>
-          <a:ln/>
-        </p:spPr>
-        <p:txBody>
-          <a:bodyPr wrap="square" rtlCol="0" anchor="t"/>
-          <a:lstStyle/>
-          <a:p>
-            <a:pPr algn="ctr" indent="0" marL="0">
-              <a:buNone/>
-            </a:pPr>
-            <a:r>
-              <a:rPr lang="en-US" sz="1500" b="1" dirty="0">
-                <a:solidFill>
-                  <a:srgbClr val="003366"/>
-                </a:solidFill>
-                <a:latin typeface="Calibri" pitchFamily="34" charset="0"/>
-                <a:ea typeface="Calibri" pitchFamily="34" charset="-122"/>
-                <a:cs typeface="Calibri" pitchFamily="34" charset="-120"/>
-              </a:rPr>
-              <a:t>Uso diário</a:t>
-            </a:r>
-            <a:endParaRPr lang="en-US" sz="1500" dirty="0"/>
-          </a:p>
-        </p:txBody>
-      </p:sp>
-      <p:sp>
-        <p:nvSpPr>
-          <p:cNvPr id="29" name="Text 26"/>
-          <p:cNvSpPr/>
-          <p:nvPr/>
-        </p:nvSpPr>
-        <p:spPr>
-          <a:xfrm>
-            <a:off x="6483096" y="4526280"/>
-            <a:ext cx="2121408" cy="960120"/>
-          </a:xfrm>
-          <a:prstGeom prst="rect">
-            <a:avLst/>
-          </a:prstGeom>
-          <a:noFill/>
-          <a:ln/>
-        </p:spPr>
-        <p:txBody>
-          <a:bodyPr wrap="square" rtlCol="0" anchor="t"/>
-          <a:lstStyle/>
-          <a:p>
-            <a:pPr algn="ctr" indent="0" marL="0">
-              <a:buNone/>
-            </a:pPr>
-            <a:r>
-              <a:rPr lang="en-US" sz="1250" dirty="0">
-                <a:solidFill>
-                  <a:srgbClr val="55606E"/>
-                </a:solidFill>
-                <a:latin typeface="Calibri" pitchFamily="34" charset="0"/>
-                <a:ea typeface="Calibri" pitchFamily="34" charset="-122"/>
-                <a:cs typeface="Calibri" pitchFamily="34" charset="-120"/>
-              </a:rPr>
-              <a:t>Dashboard em tempo real, gestão de documentos, transparência total</a:t>
-            </a:r>
-            <a:endParaRPr lang="en-US" sz="1250" dirty="0"/>
-          </a:p>
-        </p:txBody>
-      </p:sp>
-      <p:sp>
-        <p:nvSpPr>
-          <p:cNvPr id="30" name="Shape 27"/>
-          <p:cNvSpPr/>
-          <p:nvPr/>
-        </p:nvSpPr>
-        <p:spPr>
-          <a:xfrm>
-            <a:off x="8842248" y="3991356"/>
-            <a:ext cx="301752" cy="292608"/>
-          </a:xfrm>
-          <a:prstGeom prst="rightArrow">
-            <a:avLst/>
-          </a:prstGeom>
-          <a:solidFill>
-            <a:srgbClr val="008542"/>
-          </a:solidFill>
-          <a:ln/>
-        </p:spPr>
-      </p:sp>
-      <p:sp>
-        <p:nvSpPr>
-          <p:cNvPr id="31" name="Shape 28"/>
-          <p:cNvSpPr/>
-          <p:nvPr/>
-        </p:nvSpPr>
-        <p:spPr>
-          <a:xfrm>
-            <a:off x="9198864" y="2697480"/>
-            <a:ext cx="2487168" cy="2880360"/>
-          </a:xfrm>
-          <a:prstGeom prst="rect">
-            <a:avLst/>
-          </a:prstGeom>
-          <a:solidFill>
-            <a:srgbClr val="FFFFFF"/>
-          </a:solidFill>
-          <a:ln w="12700">
-            <a:solidFill>
-              <a:srgbClr val="E6E9EE"/>
-            </a:solidFill>
-            <a:prstDash val="solid"/>
-          </a:ln>
-          <a:effectLst>
-            <a:outerShdw sx="100000" sy="100000" kx="0" ky="0" algn="bl" rotWithShape="0" blurRad="Infinity" dist="Infinity" dir="Infinity">
-              <a:srgbClr val="9AA7B4">
-                <a:alpha val="Infinity"/>
-              </a:srgbClr>
-            </a:outerShdw>
-          </a:effectLst>
-        </p:spPr>
-      </p:sp>
-      <p:sp>
-        <p:nvSpPr>
-          <p:cNvPr id="32" name="Shape 29"/>
-          <p:cNvSpPr/>
-          <p:nvPr/>
-        </p:nvSpPr>
-        <p:spPr>
-          <a:xfrm>
-            <a:off x="9198864" y="2697480"/>
-            <a:ext cx="2487168" cy="54864"/>
-          </a:xfrm>
-          <a:prstGeom prst="rect">
-            <a:avLst/>
-          </a:prstGeom>
-          <a:solidFill>
-            <a:srgbClr val="008542"/>
-          </a:solidFill>
-          <a:ln/>
-        </p:spPr>
-      </p:sp>
-      <p:sp>
-        <p:nvSpPr>
-          <p:cNvPr id="33" name="Shape 30"/>
-          <p:cNvSpPr/>
-          <p:nvPr/>
-        </p:nvSpPr>
-        <p:spPr>
-          <a:xfrm>
-            <a:off x="10122408" y="3081528"/>
-            <a:ext cx="640080" cy="640080"/>
-          </a:xfrm>
-          <a:prstGeom prst="ellipse">
-            <a:avLst/>
-          </a:prstGeom>
-          <a:solidFill>
-            <a:srgbClr val="003366"/>
-          </a:solidFill>
-          <a:ln/>
-        </p:spPr>
-      </p:sp>
-      <p:sp>
-        <p:nvSpPr>
-          <p:cNvPr id="34" name="Text 31"/>
-          <p:cNvSpPr/>
-          <p:nvPr/>
-        </p:nvSpPr>
-        <p:spPr>
-          <a:xfrm>
-            <a:off x="10122408" y="3081528"/>
-            <a:ext cx="640080" cy="640080"/>
-          </a:xfrm>
-          <a:prstGeom prst="rect">
-            <a:avLst/>
-          </a:prstGeom>
-          <a:noFill/>
-          <a:ln/>
-        </p:spPr>
-        <p:txBody>
-          <a:bodyPr wrap="square" rtlCol="0" anchor="ctr"/>
-          <a:lstStyle/>
-          <a:p>
-            <a:pPr algn="ctr" indent="0" marL="0">
-              <a:buNone/>
-            </a:pPr>
-            <a:r>
-              <a:rPr lang="en-US" sz="2400" b="1" dirty="0">
-                <a:solidFill>
-                  <a:srgbClr val="FFFFFF"/>
-                </a:solidFill>
-                <a:latin typeface="Calibri" pitchFamily="34" charset="0"/>
-                <a:ea typeface="Calibri" pitchFamily="34" charset="-122"/>
-                <a:cs typeface="Calibri" pitchFamily="34" charset="-120"/>
-              </a:rPr>
-              <a:t>4</a:t>
-            </a:r>
-            <a:endParaRPr lang="en-US" sz="2400" dirty="0"/>
-          </a:p>
-        </p:txBody>
-      </p:sp>
-      <p:sp>
-        <p:nvSpPr>
-          <p:cNvPr id="35" name="Text 32"/>
-          <p:cNvSpPr/>
-          <p:nvPr/>
-        </p:nvSpPr>
-        <p:spPr>
-          <a:xfrm>
-            <a:off x="9336024" y="3886200"/>
-            <a:ext cx="2212848" cy="640080"/>
-          </a:xfrm>
-          <a:prstGeom prst="rect">
-            <a:avLst/>
-          </a:prstGeom>
-          <a:noFill/>
-          <a:ln/>
-        </p:spPr>
-        <p:txBody>
-          <a:bodyPr wrap="square" rtlCol="0" anchor="t"/>
-          <a:lstStyle/>
-          <a:p>
-            <a:pPr algn="ctr" indent="0" marL="0">
-              <a:buNone/>
-            </a:pPr>
-            <a:r>
-              <a:rPr lang="en-US" sz="1500" b="1" dirty="0">
-                <a:solidFill>
-                  <a:srgbClr val="003366"/>
-                </a:solidFill>
-                <a:latin typeface="Calibri" pitchFamily="34" charset="0"/>
-                <a:ea typeface="Calibri" pitchFamily="34" charset="-122"/>
-                <a:cs typeface="Calibri" pitchFamily="34" charset="-120"/>
-              </a:rPr>
-              <a:t>Voz do cliente</a:t>
-            </a:r>
-            <a:endParaRPr lang="en-US" sz="1500" dirty="0"/>
-          </a:p>
-        </p:txBody>
-      </p:sp>
-      <p:sp>
-        <p:nvSpPr>
-          <p:cNvPr id="36" name="Text 33"/>
-          <p:cNvSpPr/>
-          <p:nvPr/>
-        </p:nvSpPr>
-        <p:spPr>
-          <a:xfrm>
-            <a:off x="9381744" y="4526280"/>
-            <a:ext cx="2121408" cy="960120"/>
-          </a:xfrm>
-          <a:prstGeom prst="rect">
-            <a:avLst/>
-          </a:prstGeom>
-          <a:noFill/>
-          <a:ln/>
-        </p:spPr>
-        <p:txBody>
-          <a:bodyPr wrap="square" rtlCol="0" anchor="t"/>
-          <a:lstStyle/>
-          <a:p>
-            <a:pPr algn="ctr" indent="0" marL="0">
-              <a:buNone/>
-            </a:pPr>
-            <a:r>
-              <a:rPr lang="en-US" sz="1250" dirty="0">
-                <a:solidFill>
-                  <a:srgbClr val="55606E"/>
-                </a:solidFill>
-                <a:latin typeface="Calibri" pitchFamily="34" charset="0"/>
-                <a:ea typeface="Calibri" pitchFamily="34" charset="-122"/>
-                <a:cs typeface="Calibri" pitchFamily="34" charset="-120"/>
-              </a:rPr>
-              <a:t>Biblioteca de prompts + system prompt portátil, feedback, direitos LGPD</a:t>
-            </a:r>
-            <a:endParaRPr lang="en-US" sz="1250" dirty="0"/>
-          </a:p>
-        </p:txBody>
-      </p:sp>
-      <p:sp>
-        <p:nvSpPr>
-          <p:cNvPr id="37" name="Shape 34"/>
           <p:cNvSpPr/>
           <p:nvPr/>
         </p:nvSpPr>
@@ -6762,7 +6377,7 @@
       </p:sp>
       <p:sp>
         <p:nvSpPr>
-          <p:cNvPr id="38" name="Text 35"/>
+          <p:cNvPr id="27" name="Text 24"/>
           <p:cNvSpPr/>
           <p:nvPr/>
         </p:nvSpPr>
@@ -6787,13 +6402,13 @@
             <a:r>
               <a:rPr lang="en-US" sz="1700" b="1" dirty="0">
                 <a:solidFill>
-                  <a:srgbClr val="003366"/>
-                </a:solidFill>
-                <a:latin typeface="Calibri" pitchFamily="34" charset="0"/>
-                <a:ea typeface="Calibri" pitchFamily="34" charset="-122"/>
-                <a:cs typeface="Calibri" pitchFamily="34" charset="-120"/>
-              </a:rPr>
-              <a:t>Da primeira tela ao hábito de estudo — mapeada para guiar as próximas decisões de produto.</a:t>
+                  <a:srgbClr val="FFFFFF"/>
+                </a:solidFill>
+                <a:latin typeface="Calibri" pitchFamily="34" charset="0"/>
+                <a:ea typeface="Calibri" pitchFamily="34" charset="-122"/>
+                <a:cs typeface="Calibri" pitchFamily="34" charset="-120"/>
+              </a:rPr>
+              <a:t>Menos abas abertas. Mais foco. Mais tempo pro aluno.</a:t>
             </a:r>
             <a:endParaRPr lang="en-US" sz="1700" dirty="0"/>
           </a:p>
@@ -6801,7 +6416,7 @@
       </p:sp>
       <p:sp>
         <p:nvSpPr>
-          <p:cNvPr id="39" name="Text 36"/>
+          <p:cNvPr id="28" name="Text 25"/>
           <p:cNvSpPr/>
           <p:nvPr/>
         </p:nvSpPr>
@@ -6879,7 +6494,7 @@
         <p:spPr>
           <a:xfrm>
             <a:off x="502920" y="457200"/>
-            <a:ext cx="2441448" cy="420624"/>
+            <a:ext cx="1915668" cy="420624"/>
           </a:xfrm>
           <a:prstGeom prst="rect">
             <a:avLst/>
@@ -6906,7 +6521,7 @@
         <p:spPr>
           <a:xfrm>
             <a:off x="502920" y="457200"/>
-            <a:ext cx="2441448" cy="420624"/>
+            <a:ext cx="1915668" cy="420624"/>
           </a:xfrm>
           <a:prstGeom prst="rect">
             <a:avLst/>
@@ -6930,7 +6545,7 @@
                 <a:ea typeface="Calibri" pitchFamily="34" charset="-122"/>
                 <a:cs typeface="Calibri" pitchFamily="34" charset="-120"/>
               </a:rPr>
-              <a:t>ALÉM DA DISCIPLINA</a:t>
+              <a:t>PARA ONDE VAI</a:t>
             </a:r>
             <a:endParaRPr lang="en-US" sz="1550" dirty="0"/>
           </a:p>
@@ -6993,7 +6608,7 @@
                 <a:ea typeface="Calibri" pitchFamily="34" charset="-122"/>
                 <a:cs typeface="Calibri" pitchFamily="34" charset="-120"/>
               </a:rPr>
-              <a:t>Sistema inteligente unificado do estudante</a:t>
+              <a:t>Como seguimos — e por que vira PIBIC</a:t>
             </a:r>
             <a:endParaRPr lang="en-US" sz="3800" dirty="0"/>
           </a:p>
@@ -7032,7 +6647,7 @@
                 <a:ea typeface="Calibri" pitchFamily="34" charset="-122"/>
                 <a:cs typeface="Calibri" pitchFamily="34" charset="-120"/>
               </a:rPr>
-              <a:t>O hub único onde o aluno UnB centraliza tudo que importa pro semestre.</a:t>
+              <a:t>Da disciplina à pesquisa científica continuada (ProIC/UnB).</a:t>
             </a:r>
             <a:endParaRPr lang="en-US" sz="1800" dirty="0"/>
           </a:p>
@@ -7118,7 +6733,7 @@
                 <a:ea typeface="Calibri" pitchFamily="34" charset="-122"/>
                 <a:cs typeface="Calibri" pitchFamily="34" charset="-120"/>
               </a:rPr>
-              <a:t>TUDO EM UM LUGAR SÓ</a:t>
+              <a:t>MACRO · DIREÇÃO</a:t>
             </a:r>
             <a:endParaRPr lang="en-US" sz="1500" dirty="0"/>
           </a:p>
@@ -7132,7 +6747,7 @@
         </p:nvSpPr>
         <p:spPr>
           <a:xfrm>
-            <a:off x="795528" y="3346704"/>
+            <a:off x="795528" y="3328416"/>
             <a:ext cx="118872" cy="118872"/>
           </a:xfrm>
           <a:prstGeom prst="ellipse">
@@ -7153,7 +6768,7 @@
         <p:spPr>
           <a:xfrm>
             <a:off x="1033272" y="3255264"/>
-            <a:ext cx="4572000" cy="594360"/>
+            <a:ext cx="4572000" cy="548640"/>
           </a:xfrm>
           <a:prstGeom prst="rect">
             <a:avLst/>
@@ -7169,7 +6784,7 @@
               <a:buNone/>
             </a:pPr>
             <a:r>
-              <a:rPr lang="en-US" sz="1400" dirty="0">
+              <a:rPr lang="en-US" sz="1350" dirty="0">
                 <a:solidFill>
                   <a:srgbClr val="FFFFFF"/>
                 </a:solidFill>
@@ -7177,9 +6792,9 @@
                 <a:ea typeface="Calibri" pitchFamily="34" charset="-122"/>
                 <a:cs typeface="Calibri" pitchFamily="34" charset="-120"/>
               </a:rPr>
-              <a:t>Plataformas acadêmicas: universidade, fórum, Drive, e-mail e calendário</a:t>
-            </a:r>
-            <a:endParaRPr lang="en-US" sz="1400" dirty="0"/>
+              <a:t>Rodar a validação técnica (50 docs) → números reais pro artigo</a:t>
+            </a:r>
+            <a:endParaRPr lang="en-US" sz="1350" dirty="0"/>
           </a:p>
         </p:txBody>
       </p:sp>
@@ -7191,7 +6806,7 @@
         </p:nvSpPr>
         <p:spPr>
           <a:xfrm>
-            <a:off x="795528" y="3950208"/>
+            <a:off x="795528" y="3858768"/>
             <a:ext cx="118872" cy="118872"/>
           </a:xfrm>
           <a:prstGeom prst="ellipse">
@@ -7211,8 +6826,8 @@
         </p:nvSpPr>
         <p:spPr>
           <a:xfrm>
-            <a:off x="1033272" y="3858768"/>
-            <a:ext cx="4572000" cy="594360"/>
+            <a:off x="1033272" y="3785616"/>
+            <a:ext cx="4572000" cy="548640"/>
           </a:xfrm>
           <a:prstGeom prst="rect">
             <a:avLst/>
@@ -7228,7 +6843,7 @@
               <a:buNone/>
             </a:pPr>
             <a:r>
-              <a:rPr lang="en-US" sz="1400" dirty="0">
+              <a:rPr lang="en-US" sz="1350" dirty="0">
                 <a:solidFill>
                   <a:srgbClr val="FFFFFF"/>
                 </a:solidFill>
@@ -7236,9 +6851,9 @@
                 <a:ea typeface="Calibri" pitchFamily="34" charset="-122"/>
                 <a:cs typeface="Calibri" pitchFamily="34" charset="-120"/>
               </a:rPr>
-              <a:t>Caixa de entrada única: avisos, prazos e mensagens consolidados</a:t>
-            </a:r>
-            <a:endParaRPr lang="en-US" sz="1400" dirty="0"/>
+              <a:t>Deploy em ambiente público</a:t>
+            </a:r>
+            <a:endParaRPr lang="en-US" sz="1350" dirty="0"/>
           </a:p>
         </p:txBody>
       </p:sp>
@@ -7250,7 +6865,7 @@
         </p:nvSpPr>
         <p:spPr>
           <a:xfrm>
-            <a:off x="795528" y="4553712"/>
+            <a:off x="795528" y="4389120"/>
             <a:ext cx="118872" cy="118872"/>
           </a:xfrm>
           <a:prstGeom prst="ellipse">
@@ -7270,8 +6885,8 @@
         </p:nvSpPr>
         <p:spPr>
           <a:xfrm>
-            <a:off x="1033272" y="4462272"/>
-            <a:ext cx="4572000" cy="594360"/>
+            <a:off x="1033272" y="4315968"/>
+            <a:ext cx="4572000" cy="548640"/>
           </a:xfrm>
           <a:prstGeom prst="rect">
             <a:avLst/>
@@ -7287,7 +6902,7 @@
               <a:buNone/>
             </a:pPr>
             <a:r>
-              <a:rPr lang="en-US" sz="1400" dirty="0">
+              <a:rPr lang="en-US" sz="1350" dirty="0">
                 <a:solidFill>
                   <a:srgbClr val="FFFFFF"/>
                 </a:solidFill>
@@ -7295,15 +6910,74 @@
                 <a:ea typeface="Calibri" pitchFamily="34" charset="-122"/>
                 <a:cs typeface="Calibri" pitchFamily="34" charset="-120"/>
               </a:rPr>
-              <a:t>Painel do semestre: matérias, notas, grade e progresso</a:t>
-            </a:r>
-            <a:endParaRPr lang="en-US" sz="1400" dirty="0"/>
+              <a:t>Seleção e acompanhamento de usuários-teste</a:t>
+            </a:r>
+            <a:endParaRPr lang="en-US" sz="1350" dirty="0"/>
           </a:p>
         </p:txBody>
       </p:sp>
       <p:sp>
         <p:nvSpPr>
           <p:cNvPr id="16" name="Shape 13"/>
+          <p:cNvSpPr/>
+          <p:nvPr/>
+        </p:nvSpPr>
+        <p:spPr>
+          <a:xfrm>
+            <a:off x="795528" y="4919472"/>
+            <a:ext cx="118872" cy="118872"/>
+          </a:xfrm>
+          <a:prstGeom prst="ellipse">
+            <a:avLst/>
+          </a:prstGeom>
+          <a:solidFill>
+            <a:srgbClr val="008542"/>
+          </a:solidFill>
+          <a:ln/>
+        </p:spPr>
+      </p:sp>
+      <p:sp>
+        <p:nvSpPr>
+          <p:cNvPr id="17" name="Text 14"/>
+          <p:cNvSpPr/>
+          <p:nvPr/>
+        </p:nvSpPr>
+        <p:spPr>
+          <a:xfrm>
+            <a:off x="1033272" y="4846320"/>
+            <a:ext cx="4572000" cy="548640"/>
+          </a:xfrm>
+          <a:prstGeom prst="rect">
+            <a:avLst/>
+          </a:prstGeom>
+          <a:noFill/>
+          <a:ln/>
+        </p:spPr>
+        <p:txBody>
+          <a:bodyPr wrap="square" rtlCol="0" anchor="t"/>
+          <a:lstStyle/>
+          <a:p>
+            <a:pPr indent="0" marL="0">
+              <a:buNone/>
+            </a:pPr>
+            <a:r>
+              <a:rPr lang="en-US" sz="1350" dirty="0">
+                <a:solidFill>
+                  <a:srgbClr val="FFFFFF"/>
+                </a:solidFill>
+                <a:latin typeface="Calibri" pitchFamily="34" charset="0"/>
+                <a:ea typeface="Calibri" pitchFamily="34" charset="-122"/>
+                <a:cs typeface="Calibri" pitchFamily="34" charset="-120"/>
+              </a:rPr>
+              <a:t>Transformar o processo em PIBIC</a:t>
+            </a:r>
+            <a:endParaRPr lang="en-US" sz="1350" dirty="0"/>
+          </a:p>
+        </p:txBody>
+      </p:sp>
+      <p:sp>
+        <p:nvSpPr>
+          <p:cNvPr id="18" name="Shape 15"/>
           <p:cNvSpPr/>
           <p:nvPr/>
         </p:nvSpPr>
@@ -7330,7 +7004,7 @@
       </p:sp>
       <p:sp>
         <p:nvSpPr>
-          <p:cNvPr id="17" name="Shape 14"/>
+          <p:cNvPr id="19" name="Shape 16"/>
           <p:cNvSpPr/>
           <p:nvPr/>
         </p:nvSpPr>
@@ -7350,7 +7024,7 @@
       </p:sp>
       <p:sp>
         <p:nvSpPr>
-          <p:cNvPr id="18" name="Text 15"/>
+          <p:cNvPr id="20" name="Text 17"/>
           <p:cNvSpPr/>
           <p:nvPr/>
         </p:nvSpPr>
@@ -7381,7 +7055,7 @@
                 <a:ea typeface="Calibri" pitchFamily="34" charset="-122"/>
                 <a:cs typeface="Calibri" pitchFamily="34" charset="-120"/>
               </a:rPr>
-              <a:t>IA QUE CONHECE O ALUNO</a:t>
+              <a:t>MICRO · PRÓXIMAS AÇÕES</a:t>
             </a:r>
             <a:endParaRPr lang="en-US" sz="1500" dirty="0"/>
           </a:p>
@@ -7389,13 +7063,13 @@
       </p:sp>
       <p:sp>
         <p:nvSpPr>
-          <p:cNvPr id="19" name="Shape 16"/>
-          <p:cNvSpPr/>
-          <p:nvPr/>
-        </p:nvSpPr>
-        <p:spPr>
-          <a:xfrm>
-            <a:off x="6570878" y="3346704"/>
+          <p:cNvPr id="21" name="Shape 18"/>
+          <p:cNvSpPr/>
+          <p:nvPr/>
+        </p:nvSpPr>
+        <p:spPr>
+          <a:xfrm>
+            <a:off x="6570878" y="3328416"/>
             <a:ext cx="118872" cy="118872"/>
           </a:xfrm>
           <a:prstGeom prst="ellipse">
@@ -7409,14 +7083,14 @@
       </p:sp>
       <p:sp>
         <p:nvSpPr>
-          <p:cNvPr id="20" name="Text 17"/>
+          <p:cNvPr id="22" name="Text 19"/>
           <p:cNvSpPr/>
           <p:nvPr/>
         </p:nvSpPr>
         <p:spPr>
           <a:xfrm>
             <a:off x="6808622" y="3255264"/>
-            <a:ext cx="4572000" cy="594360"/>
+            <a:ext cx="4572000" cy="548640"/>
           </a:xfrm>
           <a:prstGeom prst="rect">
             <a:avLst/>
@@ -7432,7 +7106,7 @@
               <a:buNone/>
             </a:pPr>
             <a:r>
-              <a:rPr lang="en-US" sz="1400" dirty="0">
+              <a:rPr lang="en-US" sz="1350" dirty="0">
                 <a:solidFill>
                   <a:srgbClr val="FFFFFF"/>
                 </a:solidFill>
@@ -7440,21 +7114,21 @@
                 <a:ea typeface="Calibri" pitchFamily="34" charset="-122"/>
                 <a:cs typeface="Calibri" pitchFamily="34" charset="-120"/>
               </a:rPr>
-              <a:t>Plano de estudo personalizado, sob medida pra carga do semestre</a:t>
-            </a:r>
-            <a:endParaRPr lang="en-US" sz="1400" dirty="0"/>
-          </a:p>
-        </p:txBody>
-      </p:sp>
-      <p:sp>
-        <p:nvSpPr>
-          <p:cNvPr id="21" name="Shape 18"/>
-          <p:cNvSpPr/>
-          <p:nvPr/>
-        </p:nvSpPr>
-        <p:spPr>
-          <a:xfrm>
-            <a:off x="6570878" y="3950208"/>
+              <a:t>Pesquisa de mercado em paralelo</a:t>
+            </a:r>
+            <a:endParaRPr lang="en-US" sz="1350" dirty="0"/>
+          </a:p>
+        </p:txBody>
+      </p:sp>
+      <p:sp>
+        <p:nvSpPr>
+          <p:cNvPr id="23" name="Shape 20"/>
+          <p:cNvSpPr/>
+          <p:nvPr/>
+        </p:nvSpPr>
+        <p:spPr>
+          <a:xfrm>
+            <a:off x="6570878" y="3858768"/>
             <a:ext cx="118872" cy="118872"/>
           </a:xfrm>
           <a:prstGeom prst="ellipse">
@@ -7468,14 +7142,14 @@
       </p:sp>
       <p:sp>
         <p:nvSpPr>
-          <p:cNvPr id="22" name="Text 19"/>
-          <p:cNvSpPr/>
-          <p:nvPr/>
-        </p:nvSpPr>
-        <p:spPr>
-          <a:xfrm>
-            <a:off x="6808622" y="3858768"/>
-            <a:ext cx="4572000" cy="594360"/>
+          <p:cNvPr id="24" name="Text 21"/>
+          <p:cNvSpPr/>
+          <p:nvPr/>
+        </p:nvSpPr>
+        <p:spPr>
+          <a:xfrm>
+            <a:off x="6808622" y="3785616"/>
+            <a:ext cx="4572000" cy="548640"/>
           </a:xfrm>
           <a:prstGeom prst="rect">
             <a:avLst/>
@@ -7491,7 +7165,7 @@
               <a:buNone/>
             </a:pPr>
             <a:r>
-              <a:rPr lang="en-US" sz="1400" dirty="0">
+              <a:rPr lang="en-US" sz="1350" dirty="0">
                 <a:solidFill>
                   <a:srgbClr val="FFFFFF"/>
                 </a:solidFill>
@@ -7499,21 +7173,21 @@
                 <a:ea typeface="Calibri" pitchFamily="34" charset="-122"/>
                 <a:cs typeface="Calibri" pitchFamily="34" charset="-120"/>
               </a:rPr>
-              <a:t>Reforço retroativo: identifica lacunas de semestres passados</a:t>
-            </a:r>
-            <a:endParaRPr lang="en-US" sz="1400" dirty="0"/>
-          </a:p>
-        </p:txBody>
-      </p:sp>
-      <p:sp>
-        <p:nvSpPr>
-          <p:cNvPr id="23" name="Shape 20"/>
-          <p:cNvSpPr/>
-          <p:nvPr/>
-        </p:nvSpPr>
-        <p:spPr>
-          <a:xfrm>
-            <a:off x="6570878" y="4553712"/>
+              <a:t>Testar a direção: novas features, testes e análise de dados</a:t>
+            </a:r>
+            <a:endParaRPr lang="en-US" sz="1350" dirty="0"/>
+          </a:p>
+        </p:txBody>
+      </p:sp>
+      <p:sp>
+        <p:nvSpPr>
+          <p:cNvPr id="25" name="Shape 22"/>
+          <p:cNvSpPr/>
+          <p:nvPr/>
+        </p:nvSpPr>
+        <p:spPr>
+          <a:xfrm>
+            <a:off x="6570878" y="4389120"/>
             <a:ext cx="118872" cy="118872"/>
           </a:xfrm>
           <a:prstGeom prst="ellipse">
@@ -7527,14 +7201,14 @@
       </p:sp>
       <p:sp>
         <p:nvSpPr>
-          <p:cNvPr id="24" name="Text 21"/>
-          <p:cNvSpPr/>
-          <p:nvPr/>
-        </p:nvSpPr>
-        <p:spPr>
-          <a:xfrm>
-            <a:off x="6808622" y="4462272"/>
-            <a:ext cx="4572000" cy="594360"/>
+          <p:cNvPr id="26" name="Text 23"/>
+          <p:cNvSpPr/>
+          <p:nvPr/>
+        </p:nvSpPr>
+        <p:spPr>
+          <a:xfrm>
+            <a:off x="6808622" y="4315968"/>
+            <a:ext cx="4572000" cy="548640"/>
           </a:xfrm>
           <a:prstGeom prst="rect">
             <a:avLst/>
@@ -7550,7 +7224,7 @@
               <a:buNone/>
             </a:pPr>
             <a:r>
-              <a:rPr lang="en-US" sz="1400" dirty="0">
+              <a:rPr lang="en-US" sz="1350" dirty="0">
                 <a:solidFill>
                   <a:srgbClr val="FFFFFF"/>
                 </a:solidFill>
@@ -7558,68 +7232,74 @@
                 <a:ea typeface="Calibri" pitchFamily="34" charset="-122"/>
                 <a:cs typeface="Calibri" pitchFamily="34" charset="-120"/>
               </a:rPr>
-              <a:t>Tutor pessoal por matéria, no nível do aluno</a:t>
-            </a:r>
-            <a:endParaRPr lang="en-US" sz="1400" dirty="0"/>
-          </a:p>
-        </p:txBody>
-      </p:sp>
-      <p:sp>
-        <p:nvSpPr>
-          <p:cNvPr id="25" name="Text 22"/>
-          <p:cNvSpPr/>
-          <p:nvPr/>
-        </p:nvSpPr>
-        <p:spPr>
-          <a:xfrm>
-            <a:off x="502920" y="5532120"/>
-            <a:ext cx="11183112" cy="365760"/>
-          </a:xfrm>
-          <a:prstGeom prst="rect">
-            <a:avLst/>
-          </a:prstGeom>
-          <a:noFill/>
-          <a:ln/>
-        </p:spPr>
-        <p:txBody>
-          <a:bodyPr wrap="square" rtlCol="0" anchor="ctr"/>
+              <a:t>Hardening contínuo: segurança, logs e banco</a:t>
+            </a:r>
+            <a:endParaRPr lang="en-US" sz="1350" dirty="0"/>
+          </a:p>
+        </p:txBody>
+      </p:sp>
+      <p:sp>
+        <p:nvSpPr>
+          <p:cNvPr id="27" name="Shape 24"/>
+          <p:cNvSpPr/>
+          <p:nvPr/>
+        </p:nvSpPr>
+        <p:spPr>
+          <a:xfrm>
+            <a:off x="6570878" y="4919472"/>
+            <a:ext cx="118872" cy="118872"/>
+          </a:xfrm>
+          <a:prstGeom prst="ellipse">
+            <a:avLst/>
+          </a:prstGeom>
+          <a:solidFill>
+            <a:srgbClr val="008542"/>
+          </a:solidFill>
+          <a:ln/>
+        </p:spPr>
+      </p:sp>
+      <p:sp>
+        <p:nvSpPr>
+          <p:cNvPr id="28" name="Text 25"/>
+          <p:cNvSpPr/>
+          <p:nvPr/>
+        </p:nvSpPr>
+        <p:spPr>
+          <a:xfrm>
+            <a:off x="6808622" y="4846320"/>
+            <a:ext cx="4572000" cy="548640"/>
+          </a:xfrm>
+          <a:prstGeom prst="rect">
+            <a:avLst/>
+          </a:prstGeom>
+          <a:noFill/>
+          <a:ln/>
+        </p:spPr>
+        <p:txBody>
+          <a:bodyPr wrap="square" rtlCol="0" anchor="t"/>
           <a:lstStyle/>
           <a:p>
             <a:pPr indent="0" marL="0">
               <a:buNone/>
             </a:pPr>
             <a:r>
-              <a:rPr lang="en-US" sz="1400" b="1" dirty="0">
-                <a:solidFill>
-                  <a:srgbClr val="BFD0E6"/>
-                </a:solidFill>
-                <a:latin typeface="Calibri" pitchFamily="34" charset="0"/>
-                <a:ea typeface="Calibri" pitchFamily="34" charset="-122"/>
-                <a:cs typeface="Calibri" pitchFamily="34" charset="-120"/>
-              </a:rPr>
-              <a:t>Também à frente: </a:t>
-            </a:r>
-            <a:pPr indent="0" marL="0">
-              <a:buNone/>
-            </a:pPr>
-            <a:r>
-              <a:rPr lang="en-US" sz="1400" dirty="0">
-                <a:solidFill>
-                  <a:srgbClr val="BFD0E6"/>
-                </a:solidFill>
-                <a:latin typeface="Calibri" pitchFamily="34" charset="0"/>
-                <a:ea typeface="Calibri" pitchFamily="34" charset="-122"/>
-                <a:cs typeface="Calibri" pitchFamily="34" charset="-120"/>
-              </a:rPr>
-              <a:t>planejamento e produtividade · acessibilidade · privacidade avançada · monetização sustentável.</a:t>
-            </a:r>
-            <a:endParaRPr lang="en-US" sz="1400" dirty="0"/>
-          </a:p>
-        </p:txBody>
-      </p:sp>
-      <p:sp>
-        <p:nvSpPr>
-          <p:cNvPr id="26" name="Shape 23"/>
+              <a:rPr lang="en-US" sz="1350" dirty="0">
+                <a:solidFill>
+                  <a:srgbClr val="FFFFFF"/>
+                </a:solidFill>
+                <a:latin typeface="Calibri" pitchFamily="34" charset="0"/>
+                <a:ea typeface="Calibri" pitchFamily="34" charset="-122"/>
+                <a:cs typeface="Calibri" pitchFamily="34" charset="-120"/>
+              </a:rPr>
+              <a:t>Entrar no edital: orientador(a), projeto + plano</a:t>
+            </a:r>
+            <a:endParaRPr lang="en-US" sz="1350" dirty="0"/>
+          </a:p>
+        </p:txBody>
+      </p:sp>
+      <p:sp>
+        <p:nvSpPr>
+          <p:cNvPr id="29" name="Shape 26"/>
           <p:cNvSpPr/>
           <p:nvPr/>
         </p:nvSpPr>
@@ -7639,7 +7319,7 @@
       </p:sp>
       <p:sp>
         <p:nvSpPr>
-          <p:cNvPr id="27" name="Text 24"/>
+          <p:cNvPr id="30" name="Text 27"/>
           <p:cNvSpPr/>
           <p:nvPr/>
         </p:nvSpPr>
@@ -7670,7 +7350,7 @@
                 <a:ea typeface="Calibri" pitchFamily="34" charset="-122"/>
                 <a:cs typeface="Calibri" pitchFamily="34" charset="-120"/>
               </a:rPr>
-              <a:t>Menos abas abertas. Mais foco. Mais tempo pro aluno.</a:t>
+              <a:t>A disciplina acaba; a pesquisa começa.</a:t>
             </a:r>
             <a:endParaRPr lang="en-US" sz="1700" dirty="0"/>
           </a:p>
@@ -7678,7 +7358,7 @@
       </p:sp>
       <p:sp>
         <p:nvSpPr>
-          <p:cNvPr id="28" name="Text 25"/>
+          <p:cNvPr id="31" name="Text 28"/>
           <p:cNvSpPr/>
           <p:nvPr/>
         </p:nvSpPr>
@@ -7710,948 +7390,6 @@
                 <a:cs typeface="Calibri" pitchFamily="34" charset="-120"/>
               </a:rPr>
               <a:t>14</a:t>
-            </a:r>
-            <a:endParaRPr lang="en-US" sz="1100" dirty="0"/>
-          </a:p>
-        </p:txBody>
-      </p:sp>
-    </p:spTree>
-  </p:cSld>
-  <p:clrMapOvr>
-    <a:masterClrMapping/>
-  </p:clrMapOvr>
-</p:sld>
-</file>
-
-<file path=ppt/slides/slide15.xml><?xml version="1.0" encoding="utf-8"?>
-<p:sld xmlns:a="http://schemas.openxmlformats.org/drawingml/2006/main" xmlns:r="http://schemas.openxmlformats.org/officeDocument/2006/relationships" xmlns:p="http://schemas.openxmlformats.org/presentationml/2006/main">
-  <p:cSld name="Slide 15">
-    <p:bg>
-      <p:bgPr>
-        <a:solidFill>
-          <a:srgbClr val="003366"/>
-        </a:solidFill>
-      </p:bgPr>
-    </p:bg>
-    <p:spTree>
-      <p:nvGrpSpPr>
-        <p:cNvPr id="1" name=""/>
-        <p:cNvGrpSpPr/>
-        <p:nvPr/>
-      </p:nvGrpSpPr>
-      <p:grpSpPr>
-        <a:xfrm>
-          <a:off x="0" y="0"/>
-          <a:ext cx="0" cy="0"/>
-          <a:chOff x="0" y="0"/>
-          <a:chExt cx="0" cy="0"/>
-        </a:xfrm>
-      </p:grpSpPr>
-      <p:sp>
-        <p:nvSpPr>
-          <p:cNvPr id="2" name="Shape 0"/>
-          <p:cNvSpPr/>
-          <p:nvPr/>
-        </p:nvSpPr>
-        <p:spPr>
-          <a:xfrm>
-            <a:off x="502920" y="457200"/>
-            <a:ext cx="1915668" cy="420624"/>
-          </a:xfrm>
-          <a:prstGeom prst="rect">
-            <a:avLst/>
-          </a:prstGeom>
-          <a:solidFill>
-            <a:srgbClr val="008542"/>
-          </a:solidFill>
-          <a:ln/>
-          <a:effectLst>
-            <a:outerShdw sx="100000" sy="100000" kx="0" ky="0" algn="bl" rotWithShape="0" blurRad="1.1358267293884988e+58" dist="5.679133646942494e+57" dir="7.052774768640002e+68">
-              <a:srgbClr val="7F8A99">
-                <a:alpha val="4.9999999999999996e+69"/>
-              </a:srgbClr>
-            </a:outerShdw>
-          </a:effectLst>
-        </p:spPr>
-      </p:sp>
-      <p:sp>
-        <p:nvSpPr>
-          <p:cNvPr id="3" name="Text 1"/>
-          <p:cNvSpPr/>
-          <p:nvPr/>
-        </p:nvSpPr>
-        <p:spPr>
-          <a:xfrm>
-            <a:off x="502920" y="457200"/>
-            <a:ext cx="1915668" cy="420624"/>
-          </a:xfrm>
-          <a:prstGeom prst="rect">
-            <a:avLst/>
-          </a:prstGeom>
-          <a:noFill/>
-          <a:ln/>
-        </p:spPr>
-        <p:txBody>
-          <a:bodyPr wrap="square" rtlCol="0" anchor="ctr"/>
-          <a:lstStyle/>
-          <a:p>
-            <a:pPr algn="ctr" indent="0" marL="0">
-              <a:buNone/>
-            </a:pPr>
-            <a:r>
-              <a:rPr lang="en-US" sz="1550" b="1" dirty="0">
-                <a:solidFill>
-                  <a:srgbClr val="FFFFFF"/>
-                </a:solidFill>
-                <a:latin typeface="Calibri" pitchFamily="34" charset="0"/>
-                <a:ea typeface="Calibri" pitchFamily="34" charset="-122"/>
-                <a:cs typeface="Calibri" pitchFamily="34" charset="-120"/>
-              </a:rPr>
-              <a:t>PARA ONDE VAI</a:t>
-            </a:r>
-            <a:endParaRPr lang="en-US" sz="1550" dirty="0"/>
-          </a:p>
-        </p:txBody>
-      </p:sp>
-      <p:pic>
-        <p:nvPicPr>
-          <p:cNvPr id="4" name="Image 0" descr="/tmp/psp2_pres/unb_white.png">    </p:cNvPr>
-          <p:cNvPicPr>
-            <a:picLocks noChangeAspect="1"/>
-          </p:cNvPicPr>
-          <p:nvPr/>
-        </p:nvPicPr>
-        <p:blipFill>
-          <a:blip r:embed="rId1"/>
-          <a:stretch>
-            <a:fillRect/>
-          </a:stretch>
-        </p:blipFill>
-        <p:spPr>
-          <a:xfrm>
-            <a:off x="11430000" y="310896"/>
-            <a:ext cx="548640" cy="502920"/>
-          </a:xfrm>
-          <a:prstGeom prst="rect">
-            <a:avLst/>
-          </a:prstGeom>
-        </p:spPr>
-      </p:pic>
-      <p:sp>
-        <p:nvSpPr>
-          <p:cNvPr id="5" name="Text 2"/>
-          <p:cNvSpPr/>
-          <p:nvPr/>
-        </p:nvSpPr>
-        <p:spPr>
-          <a:xfrm>
-            <a:off x="502920" y="1097280"/>
-            <a:ext cx="11183112" cy="777240"/>
-          </a:xfrm>
-          <a:prstGeom prst="rect">
-            <a:avLst/>
-          </a:prstGeom>
-          <a:noFill/>
-          <a:ln/>
-        </p:spPr>
-        <p:txBody>
-          <a:bodyPr wrap="square" rtlCol="0" anchor="ctr"/>
-          <a:lstStyle/>
-          <a:p>
-            <a:pPr indent="0" marL="0">
-              <a:buNone/>
-            </a:pPr>
-            <a:r>
-              <a:rPr lang="en-US" sz="3800" b="1" dirty="0">
-                <a:solidFill>
-                  <a:srgbClr val="FFFFFF"/>
-                </a:solidFill>
-                <a:latin typeface="Calibri" pitchFamily="34" charset="0"/>
-                <a:ea typeface="Calibri" pitchFamily="34" charset="-122"/>
-                <a:cs typeface="Calibri" pitchFamily="34" charset="-120"/>
-              </a:rPr>
-              <a:t>Como seguimos — e por que vira PIBIC</a:t>
-            </a:r>
-            <a:endParaRPr lang="en-US" sz="3800" dirty="0"/>
-          </a:p>
-        </p:txBody>
-      </p:sp>
-      <p:sp>
-        <p:nvSpPr>
-          <p:cNvPr id="6" name="Text 3"/>
-          <p:cNvSpPr/>
-          <p:nvPr/>
-        </p:nvSpPr>
-        <p:spPr>
-          <a:xfrm>
-            <a:off x="502920" y="1938528"/>
-            <a:ext cx="11183112" cy="365760"/>
-          </a:xfrm>
-          <a:prstGeom prst="rect">
-            <a:avLst/>
-          </a:prstGeom>
-          <a:noFill/>
-          <a:ln/>
-        </p:spPr>
-        <p:txBody>
-          <a:bodyPr wrap="square" rtlCol="0" anchor="ctr"/>
-          <a:lstStyle/>
-          <a:p>
-            <a:pPr indent="0" marL="0">
-              <a:buNone/>
-            </a:pPr>
-            <a:r>
-              <a:rPr lang="en-US" sz="1800" dirty="0">
-                <a:solidFill>
-                  <a:srgbClr val="BFD0E6"/>
-                </a:solidFill>
-                <a:latin typeface="Calibri" pitchFamily="34" charset="0"/>
-                <a:ea typeface="Calibri" pitchFamily="34" charset="-122"/>
-                <a:cs typeface="Calibri" pitchFamily="34" charset="-120"/>
-              </a:rPr>
-              <a:t>Da disciplina à pesquisa científica continuada (ProIC/UnB).</a:t>
-            </a:r>
-            <a:endParaRPr lang="en-US" sz="1800" dirty="0"/>
-          </a:p>
-        </p:txBody>
-      </p:sp>
-      <p:sp>
-        <p:nvSpPr>
-          <p:cNvPr id="7" name="Shape 4"/>
-          <p:cNvSpPr/>
-          <p:nvPr/>
-        </p:nvSpPr>
-        <p:spPr>
-          <a:xfrm>
-            <a:off x="502920" y="2560320"/>
-            <a:ext cx="5409590" cy="2743200"/>
-          </a:xfrm>
-          <a:prstGeom prst="roundRect">
-            <a:avLst>
-              <a:gd name="adj" fmla="val 2333"/>
-            </a:avLst>
-          </a:prstGeom>
-          <a:solidFill>
-            <a:srgbClr val="0A2A4A"/>
-          </a:solidFill>
-          <a:ln w="12700">
-            <a:solidFill>
-              <a:srgbClr val="2A527E"/>
-            </a:solidFill>
-            <a:prstDash val="solid"/>
-          </a:ln>
-        </p:spPr>
-      </p:sp>
-      <p:sp>
-        <p:nvSpPr>
-          <p:cNvPr id="8" name="Shape 5"/>
-          <p:cNvSpPr/>
-          <p:nvPr/>
-        </p:nvSpPr>
-        <p:spPr>
-          <a:xfrm>
-            <a:off x="502920" y="2560320"/>
-            <a:ext cx="5409590" cy="54864"/>
-          </a:xfrm>
-          <a:prstGeom prst="rect">
-            <a:avLst/>
-          </a:prstGeom>
-          <a:solidFill>
-            <a:srgbClr val="008542"/>
-          </a:solidFill>
-          <a:ln/>
-        </p:spPr>
-      </p:sp>
-      <p:sp>
-        <p:nvSpPr>
-          <p:cNvPr id="9" name="Text 6"/>
-          <p:cNvSpPr/>
-          <p:nvPr/>
-        </p:nvSpPr>
-        <p:spPr>
-          <a:xfrm>
-            <a:off x="777240" y="2743200"/>
-            <a:ext cx="4864608" cy="320040"/>
-          </a:xfrm>
-          <a:prstGeom prst="rect">
-            <a:avLst/>
-          </a:prstGeom>
-          <a:noFill/>
-          <a:ln/>
-        </p:spPr>
-        <p:txBody>
-          <a:bodyPr wrap="square" rtlCol="0" anchor="ctr"/>
-          <a:lstStyle/>
-          <a:p>
-            <a:pPr indent="0" marL="0">
-              <a:buNone/>
-            </a:pPr>
-            <a:r>
-              <a:rPr lang="en-US" sz="1500" b="1" dirty="0">
-                <a:solidFill>
-                  <a:srgbClr val="008542"/>
-                </a:solidFill>
-                <a:latin typeface="Calibri" pitchFamily="34" charset="0"/>
-                <a:ea typeface="Calibri" pitchFamily="34" charset="-122"/>
-                <a:cs typeface="Calibri" pitchFamily="34" charset="-120"/>
-              </a:rPr>
-              <a:t>MACRO · DIREÇÃO</a:t>
-            </a:r>
-            <a:endParaRPr lang="en-US" sz="1500" dirty="0"/>
-          </a:p>
-        </p:txBody>
-      </p:sp>
-      <p:sp>
-        <p:nvSpPr>
-          <p:cNvPr id="10" name="Shape 7"/>
-          <p:cNvSpPr/>
-          <p:nvPr/>
-        </p:nvSpPr>
-        <p:spPr>
-          <a:xfrm>
-            <a:off x="795528" y="3328416"/>
-            <a:ext cx="118872" cy="118872"/>
-          </a:xfrm>
-          <a:prstGeom prst="ellipse">
-            <a:avLst/>
-          </a:prstGeom>
-          <a:solidFill>
-            <a:srgbClr val="008542"/>
-          </a:solidFill>
-          <a:ln/>
-        </p:spPr>
-      </p:sp>
-      <p:sp>
-        <p:nvSpPr>
-          <p:cNvPr id="11" name="Text 8"/>
-          <p:cNvSpPr/>
-          <p:nvPr/>
-        </p:nvSpPr>
-        <p:spPr>
-          <a:xfrm>
-            <a:off x="1033272" y="3255264"/>
-            <a:ext cx="4572000" cy="548640"/>
-          </a:xfrm>
-          <a:prstGeom prst="rect">
-            <a:avLst/>
-          </a:prstGeom>
-          <a:noFill/>
-          <a:ln/>
-        </p:spPr>
-        <p:txBody>
-          <a:bodyPr wrap="square" rtlCol="0" anchor="t"/>
-          <a:lstStyle/>
-          <a:p>
-            <a:pPr indent="0" marL="0">
-              <a:buNone/>
-            </a:pPr>
-            <a:r>
-              <a:rPr lang="en-US" sz="1350" dirty="0">
-                <a:solidFill>
-                  <a:srgbClr val="FFFFFF"/>
-                </a:solidFill>
-                <a:latin typeface="Calibri" pitchFamily="34" charset="0"/>
-                <a:ea typeface="Calibri" pitchFamily="34" charset="-122"/>
-                <a:cs typeface="Calibri" pitchFamily="34" charset="-120"/>
-              </a:rPr>
-              <a:t>Rodar a validação técnica (50 docs) → números reais pro artigo</a:t>
-            </a:r>
-            <a:endParaRPr lang="en-US" sz="1350" dirty="0"/>
-          </a:p>
-        </p:txBody>
-      </p:sp>
-      <p:sp>
-        <p:nvSpPr>
-          <p:cNvPr id="12" name="Shape 9"/>
-          <p:cNvSpPr/>
-          <p:nvPr/>
-        </p:nvSpPr>
-        <p:spPr>
-          <a:xfrm>
-            <a:off x="795528" y="3858768"/>
-            <a:ext cx="118872" cy="118872"/>
-          </a:xfrm>
-          <a:prstGeom prst="ellipse">
-            <a:avLst/>
-          </a:prstGeom>
-          <a:solidFill>
-            <a:srgbClr val="008542"/>
-          </a:solidFill>
-          <a:ln/>
-        </p:spPr>
-      </p:sp>
-      <p:sp>
-        <p:nvSpPr>
-          <p:cNvPr id="13" name="Text 10"/>
-          <p:cNvSpPr/>
-          <p:nvPr/>
-        </p:nvSpPr>
-        <p:spPr>
-          <a:xfrm>
-            <a:off x="1033272" y="3785616"/>
-            <a:ext cx="4572000" cy="548640"/>
-          </a:xfrm>
-          <a:prstGeom prst="rect">
-            <a:avLst/>
-          </a:prstGeom>
-          <a:noFill/>
-          <a:ln/>
-        </p:spPr>
-        <p:txBody>
-          <a:bodyPr wrap="square" rtlCol="0" anchor="t"/>
-          <a:lstStyle/>
-          <a:p>
-            <a:pPr indent="0" marL="0">
-              <a:buNone/>
-            </a:pPr>
-            <a:r>
-              <a:rPr lang="en-US" sz="1350" dirty="0">
-                <a:solidFill>
-                  <a:srgbClr val="FFFFFF"/>
-                </a:solidFill>
-                <a:latin typeface="Calibri" pitchFamily="34" charset="0"/>
-                <a:ea typeface="Calibri" pitchFamily="34" charset="-122"/>
-                <a:cs typeface="Calibri" pitchFamily="34" charset="-120"/>
-              </a:rPr>
-              <a:t>Deploy em ambiente público</a:t>
-            </a:r>
-            <a:endParaRPr lang="en-US" sz="1350" dirty="0"/>
-          </a:p>
-        </p:txBody>
-      </p:sp>
-      <p:sp>
-        <p:nvSpPr>
-          <p:cNvPr id="14" name="Shape 11"/>
-          <p:cNvSpPr/>
-          <p:nvPr/>
-        </p:nvSpPr>
-        <p:spPr>
-          <a:xfrm>
-            <a:off x="795528" y="4389120"/>
-            <a:ext cx="118872" cy="118872"/>
-          </a:xfrm>
-          <a:prstGeom prst="ellipse">
-            <a:avLst/>
-          </a:prstGeom>
-          <a:solidFill>
-            <a:srgbClr val="008542"/>
-          </a:solidFill>
-          <a:ln/>
-        </p:spPr>
-      </p:sp>
-      <p:sp>
-        <p:nvSpPr>
-          <p:cNvPr id="15" name="Text 12"/>
-          <p:cNvSpPr/>
-          <p:nvPr/>
-        </p:nvSpPr>
-        <p:spPr>
-          <a:xfrm>
-            <a:off x="1033272" y="4315968"/>
-            <a:ext cx="4572000" cy="548640"/>
-          </a:xfrm>
-          <a:prstGeom prst="rect">
-            <a:avLst/>
-          </a:prstGeom>
-          <a:noFill/>
-          <a:ln/>
-        </p:spPr>
-        <p:txBody>
-          <a:bodyPr wrap="square" rtlCol="0" anchor="t"/>
-          <a:lstStyle/>
-          <a:p>
-            <a:pPr indent="0" marL="0">
-              <a:buNone/>
-            </a:pPr>
-            <a:r>
-              <a:rPr lang="en-US" sz="1350" dirty="0">
-                <a:solidFill>
-                  <a:srgbClr val="FFFFFF"/>
-                </a:solidFill>
-                <a:latin typeface="Calibri" pitchFamily="34" charset="0"/>
-                <a:ea typeface="Calibri" pitchFamily="34" charset="-122"/>
-                <a:cs typeface="Calibri" pitchFamily="34" charset="-120"/>
-              </a:rPr>
-              <a:t>Seleção e acompanhamento de usuários-teste</a:t>
-            </a:r>
-            <a:endParaRPr lang="en-US" sz="1350" dirty="0"/>
-          </a:p>
-        </p:txBody>
-      </p:sp>
-      <p:sp>
-        <p:nvSpPr>
-          <p:cNvPr id="16" name="Shape 13"/>
-          <p:cNvSpPr/>
-          <p:nvPr/>
-        </p:nvSpPr>
-        <p:spPr>
-          <a:xfrm>
-            <a:off x="795528" y="4919472"/>
-            <a:ext cx="118872" cy="118872"/>
-          </a:xfrm>
-          <a:prstGeom prst="ellipse">
-            <a:avLst/>
-          </a:prstGeom>
-          <a:solidFill>
-            <a:srgbClr val="008542"/>
-          </a:solidFill>
-          <a:ln/>
-        </p:spPr>
-      </p:sp>
-      <p:sp>
-        <p:nvSpPr>
-          <p:cNvPr id="17" name="Text 14"/>
-          <p:cNvSpPr/>
-          <p:nvPr/>
-        </p:nvSpPr>
-        <p:spPr>
-          <a:xfrm>
-            <a:off x="1033272" y="4846320"/>
-            <a:ext cx="4572000" cy="548640"/>
-          </a:xfrm>
-          <a:prstGeom prst="rect">
-            <a:avLst/>
-          </a:prstGeom>
-          <a:noFill/>
-          <a:ln/>
-        </p:spPr>
-        <p:txBody>
-          <a:bodyPr wrap="square" rtlCol="0" anchor="t"/>
-          <a:lstStyle/>
-          <a:p>
-            <a:pPr indent="0" marL="0">
-              <a:buNone/>
-            </a:pPr>
-            <a:r>
-              <a:rPr lang="en-US" sz="1350" dirty="0">
-                <a:solidFill>
-                  <a:srgbClr val="FFFFFF"/>
-                </a:solidFill>
-                <a:latin typeface="Calibri" pitchFamily="34" charset="0"/>
-                <a:ea typeface="Calibri" pitchFamily="34" charset="-122"/>
-                <a:cs typeface="Calibri" pitchFamily="34" charset="-120"/>
-              </a:rPr>
-              <a:t>Transformar o processo em PIBIC</a:t>
-            </a:r>
-            <a:endParaRPr lang="en-US" sz="1350" dirty="0"/>
-          </a:p>
-        </p:txBody>
-      </p:sp>
-      <p:sp>
-        <p:nvSpPr>
-          <p:cNvPr id="18" name="Shape 15"/>
-          <p:cNvSpPr/>
-          <p:nvPr/>
-        </p:nvSpPr>
-        <p:spPr>
-          <a:xfrm>
-            <a:off x="6278270" y="2560320"/>
-            <a:ext cx="5409590" cy="2743200"/>
-          </a:xfrm>
-          <a:prstGeom prst="roundRect">
-            <a:avLst>
-              <a:gd name="adj" fmla="val 2333"/>
-            </a:avLst>
-          </a:prstGeom>
-          <a:solidFill>
-            <a:srgbClr val="0A2A4A"/>
-          </a:solidFill>
-          <a:ln w="12700">
-            <a:solidFill>
-              <a:srgbClr val="2A527E"/>
-            </a:solidFill>
-            <a:prstDash val="solid"/>
-          </a:ln>
-        </p:spPr>
-      </p:sp>
-      <p:sp>
-        <p:nvSpPr>
-          <p:cNvPr id="19" name="Shape 16"/>
-          <p:cNvSpPr/>
-          <p:nvPr/>
-        </p:nvSpPr>
-        <p:spPr>
-          <a:xfrm>
-            <a:off x="6278270" y="2560320"/>
-            <a:ext cx="5409590" cy="54864"/>
-          </a:xfrm>
-          <a:prstGeom prst="rect">
-            <a:avLst/>
-          </a:prstGeom>
-          <a:solidFill>
-            <a:srgbClr val="FFB81C"/>
-          </a:solidFill>
-          <a:ln/>
-        </p:spPr>
-      </p:sp>
-      <p:sp>
-        <p:nvSpPr>
-          <p:cNvPr id="20" name="Text 17"/>
-          <p:cNvSpPr/>
-          <p:nvPr/>
-        </p:nvSpPr>
-        <p:spPr>
-          <a:xfrm>
-            <a:off x="6552590" y="2743200"/>
-            <a:ext cx="4864608" cy="320040"/>
-          </a:xfrm>
-          <a:prstGeom prst="rect">
-            <a:avLst/>
-          </a:prstGeom>
-          <a:noFill/>
-          <a:ln/>
-        </p:spPr>
-        <p:txBody>
-          <a:bodyPr wrap="square" rtlCol="0" anchor="ctr"/>
-          <a:lstStyle/>
-          <a:p>
-            <a:pPr indent="0" marL="0">
-              <a:buNone/>
-            </a:pPr>
-            <a:r>
-              <a:rPr lang="en-US" sz="1500" b="1" dirty="0">
-                <a:solidFill>
-                  <a:srgbClr val="FFB81C"/>
-                </a:solidFill>
-                <a:latin typeface="Calibri" pitchFamily="34" charset="0"/>
-                <a:ea typeface="Calibri" pitchFamily="34" charset="-122"/>
-                <a:cs typeface="Calibri" pitchFamily="34" charset="-120"/>
-              </a:rPr>
-              <a:t>MICRO · PRÓXIMAS AÇÕES</a:t>
-            </a:r>
-            <a:endParaRPr lang="en-US" sz="1500" dirty="0"/>
-          </a:p>
-        </p:txBody>
-      </p:sp>
-      <p:sp>
-        <p:nvSpPr>
-          <p:cNvPr id="21" name="Shape 18"/>
-          <p:cNvSpPr/>
-          <p:nvPr/>
-        </p:nvSpPr>
-        <p:spPr>
-          <a:xfrm>
-            <a:off x="6570878" y="3328416"/>
-            <a:ext cx="118872" cy="118872"/>
-          </a:xfrm>
-          <a:prstGeom prst="ellipse">
-            <a:avLst/>
-          </a:prstGeom>
-          <a:solidFill>
-            <a:srgbClr val="008542"/>
-          </a:solidFill>
-          <a:ln/>
-        </p:spPr>
-      </p:sp>
-      <p:sp>
-        <p:nvSpPr>
-          <p:cNvPr id="22" name="Text 19"/>
-          <p:cNvSpPr/>
-          <p:nvPr/>
-        </p:nvSpPr>
-        <p:spPr>
-          <a:xfrm>
-            <a:off x="6808622" y="3255264"/>
-            <a:ext cx="4572000" cy="548640"/>
-          </a:xfrm>
-          <a:prstGeom prst="rect">
-            <a:avLst/>
-          </a:prstGeom>
-          <a:noFill/>
-          <a:ln/>
-        </p:spPr>
-        <p:txBody>
-          <a:bodyPr wrap="square" rtlCol="0" anchor="t"/>
-          <a:lstStyle/>
-          <a:p>
-            <a:pPr indent="0" marL="0">
-              <a:buNone/>
-            </a:pPr>
-            <a:r>
-              <a:rPr lang="en-US" sz="1350" dirty="0">
-                <a:solidFill>
-                  <a:srgbClr val="FFFFFF"/>
-                </a:solidFill>
-                <a:latin typeface="Calibri" pitchFamily="34" charset="0"/>
-                <a:ea typeface="Calibri" pitchFamily="34" charset="-122"/>
-                <a:cs typeface="Calibri" pitchFamily="34" charset="-120"/>
-              </a:rPr>
-              <a:t>Pesquisa de mercado em paralelo</a:t>
-            </a:r>
-            <a:endParaRPr lang="en-US" sz="1350" dirty="0"/>
-          </a:p>
-        </p:txBody>
-      </p:sp>
-      <p:sp>
-        <p:nvSpPr>
-          <p:cNvPr id="23" name="Shape 20"/>
-          <p:cNvSpPr/>
-          <p:nvPr/>
-        </p:nvSpPr>
-        <p:spPr>
-          <a:xfrm>
-            <a:off x="6570878" y="3858768"/>
-            <a:ext cx="118872" cy="118872"/>
-          </a:xfrm>
-          <a:prstGeom prst="ellipse">
-            <a:avLst/>
-          </a:prstGeom>
-          <a:solidFill>
-            <a:srgbClr val="008542"/>
-          </a:solidFill>
-          <a:ln/>
-        </p:spPr>
-      </p:sp>
-      <p:sp>
-        <p:nvSpPr>
-          <p:cNvPr id="24" name="Text 21"/>
-          <p:cNvSpPr/>
-          <p:nvPr/>
-        </p:nvSpPr>
-        <p:spPr>
-          <a:xfrm>
-            <a:off x="6808622" y="3785616"/>
-            <a:ext cx="4572000" cy="548640"/>
-          </a:xfrm>
-          <a:prstGeom prst="rect">
-            <a:avLst/>
-          </a:prstGeom>
-          <a:noFill/>
-          <a:ln/>
-        </p:spPr>
-        <p:txBody>
-          <a:bodyPr wrap="square" rtlCol="0" anchor="t"/>
-          <a:lstStyle/>
-          <a:p>
-            <a:pPr indent="0" marL="0">
-              <a:buNone/>
-            </a:pPr>
-            <a:r>
-              <a:rPr lang="en-US" sz="1350" dirty="0">
-                <a:solidFill>
-                  <a:srgbClr val="FFFFFF"/>
-                </a:solidFill>
-                <a:latin typeface="Calibri" pitchFamily="34" charset="0"/>
-                <a:ea typeface="Calibri" pitchFamily="34" charset="-122"/>
-                <a:cs typeface="Calibri" pitchFamily="34" charset="-120"/>
-              </a:rPr>
-              <a:t>Testar a direção: novas features, testes e análise de dados</a:t>
-            </a:r>
-            <a:endParaRPr lang="en-US" sz="1350" dirty="0"/>
-          </a:p>
-        </p:txBody>
-      </p:sp>
-      <p:sp>
-        <p:nvSpPr>
-          <p:cNvPr id="25" name="Shape 22"/>
-          <p:cNvSpPr/>
-          <p:nvPr/>
-        </p:nvSpPr>
-        <p:spPr>
-          <a:xfrm>
-            <a:off x="6570878" y="4389120"/>
-            <a:ext cx="118872" cy="118872"/>
-          </a:xfrm>
-          <a:prstGeom prst="ellipse">
-            <a:avLst/>
-          </a:prstGeom>
-          <a:solidFill>
-            <a:srgbClr val="008542"/>
-          </a:solidFill>
-          <a:ln/>
-        </p:spPr>
-      </p:sp>
-      <p:sp>
-        <p:nvSpPr>
-          <p:cNvPr id="26" name="Text 23"/>
-          <p:cNvSpPr/>
-          <p:nvPr/>
-        </p:nvSpPr>
-        <p:spPr>
-          <a:xfrm>
-            <a:off x="6808622" y="4315968"/>
-            <a:ext cx="4572000" cy="548640"/>
-          </a:xfrm>
-          <a:prstGeom prst="rect">
-            <a:avLst/>
-          </a:prstGeom>
-          <a:noFill/>
-          <a:ln/>
-        </p:spPr>
-        <p:txBody>
-          <a:bodyPr wrap="square" rtlCol="0" anchor="t"/>
-          <a:lstStyle/>
-          <a:p>
-            <a:pPr indent="0" marL="0">
-              <a:buNone/>
-            </a:pPr>
-            <a:r>
-              <a:rPr lang="en-US" sz="1350" dirty="0">
-                <a:solidFill>
-                  <a:srgbClr val="FFFFFF"/>
-                </a:solidFill>
-                <a:latin typeface="Calibri" pitchFamily="34" charset="0"/>
-                <a:ea typeface="Calibri" pitchFamily="34" charset="-122"/>
-                <a:cs typeface="Calibri" pitchFamily="34" charset="-120"/>
-              </a:rPr>
-              <a:t>Hardening contínuo: segurança, logs e banco</a:t>
-            </a:r>
-            <a:endParaRPr lang="en-US" sz="1350" dirty="0"/>
-          </a:p>
-        </p:txBody>
-      </p:sp>
-      <p:sp>
-        <p:nvSpPr>
-          <p:cNvPr id="27" name="Shape 24"/>
-          <p:cNvSpPr/>
-          <p:nvPr/>
-        </p:nvSpPr>
-        <p:spPr>
-          <a:xfrm>
-            <a:off x="6570878" y="4919472"/>
-            <a:ext cx="118872" cy="118872"/>
-          </a:xfrm>
-          <a:prstGeom prst="ellipse">
-            <a:avLst/>
-          </a:prstGeom>
-          <a:solidFill>
-            <a:srgbClr val="008542"/>
-          </a:solidFill>
-          <a:ln/>
-        </p:spPr>
-      </p:sp>
-      <p:sp>
-        <p:nvSpPr>
-          <p:cNvPr id="28" name="Text 25"/>
-          <p:cNvSpPr/>
-          <p:nvPr/>
-        </p:nvSpPr>
-        <p:spPr>
-          <a:xfrm>
-            <a:off x="6808622" y="4846320"/>
-            <a:ext cx="4572000" cy="548640"/>
-          </a:xfrm>
-          <a:prstGeom prst="rect">
-            <a:avLst/>
-          </a:prstGeom>
-          <a:noFill/>
-          <a:ln/>
-        </p:spPr>
-        <p:txBody>
-          <a:bodyPr wrap="square" rtlCol="0" anchor="t"/>
-          <a:lstStyle/>
-          <a:p>
-            <a:pPr indent="0" marL="0">
-              <a:buNone/>
-            </a:pPr>
-            <a:r>
-              <a:rPr lang="en-US" sz="1350" dirty="0">
-                <a:solidFill>
-                  <a:srgbClr val="FFFFFF"/>
-                </a:solidFill>
-                <a:latin typeface="Calibri" pitchFamily="34" charset="0"/>
-                <a:ea typeface="Calibri" pitchFamily="34" charset="-122"/>
-                <a:cs typeface="Calibri" pitchFamily="34" charset="-120"/>
-              </a:rPr>
-              <a:t>Entrar no edital: orientador(a), projeto + plano</a:t>
-            </a:r>
-            <a:endParaRPr lang="en-US" sz="1350" dirty="0"/>
-          </a:p>
-        </p:txBody>
-      </p:sp>
-      <p:sp>
-        <p:nvSpPr>
-          <p:cNvPr id="29" name="Shape 26"/>
-          <p:cNvSpPr/>
-          <p:nvPr/>
-        </p:nvSpPr>
-        <p:spPr>
-          <a:xfrm>
-            <a:off x="502920" y="6336792"/>
-            <a:ext cx="548640" cy="45720"/>
-          </a:xfrm>
-          <a:prstGeom prst="rect">
-            <a:avLst/>
-          </a:prstGeom>
-          <a:solidFill>
-            <a:srgbClr val="008542"/>
-          </a:solidFill>
-          <a:ln/>
-        </p:spPr>
-      </p:sp>
-      <p:sp>
-        <p:nvSpPr>
-          <p:cNvPr id="30" name="Text 27"/>
-          <p:cNvSpPr/>
-          <p:nvPr/>
-        </p:nvSpPr>
-        <p:spPr>
-          <a:xfrm>
-            <a:off x="502920" y="6400800"/>
-            <a:ext cx="10058400" cy="365760"/>
-          </a:xfrm>
-          <a:prstGeom prst="rect">
-            <a:avLst/>
-          </a:prstGeom>
-          <a:noFill/>
-          <a:ln/>
-        </p:spPr>
-        <p:txBody>
-          <a:bodyPr wrap="square" rtlCol="0" anchor="ctr"/>
-          <a:lstStyle/>
-          <a:p>
-            <a:pPr indent="0" marL="0">
-              <a:buNone/>
-            </a:pPr>
-            <a:r>
-              <a:rPr lang="en-US" sz="1700" b="1" dirty="0">
-                <a:solidFill>
-                  <a:srgbClr val="FFFFFF"/>
-                </a:solidFill>
-                <a:latin typeface="Calibri" pitchFamily="34" charset="0"/>
-                <a:ea typeface="Calibri" pitchFamily="34" charset="-122"/>
-                <a:cs typeface="Calibri" pitchFamily="34" charset="-120"/>
-              </a:rPr>
-              <a:t>A disciplina acaba; a pesquisa começa.</a:t>
-            </a:r>
-            <a:endParaRPr lang="en-US" sz="1700" dirty="0"/>
-          </a:p>
-        </p:txBody>
-      </p:sp>
-      <p:sp>
-        <p:nvSpPr>
-          <p:cNvPr id="31" name="Text 28"/>
-          <p:cNvSpPr/>
-          <p:nvPr/>
-        </p:nvSpPr>
-        <p:spPr>
-          <a:xfrm>
-            <a:off x="11183112" y="6437376"/>
-            <a:ext cx="640080" cy="274320"/>
-          </a:xfrm>
-          <a:prstGeom prst="rect">
-            <a:avLst/>
-          </a:prstGeom>
-          <a:noFill/>
-          <a:ln/>
-        </p:spPr>
-        <p:txBody>
-          <a:bodyPr wrap="square" rtlCol="0" anchor="ctr"/>
-          <a:lstStyle/>
-          <a:p>
-            <a:pPr algn="r" indent="0" marL="0">
-              <a:buNone/>
-            </a:pPr>
-            <a:r>
-              <a:rPr lang="en-US" sz="1100" dirty="0">
-                <a:solidFill>
-                  <a:srgbClr val="8A939F"/>
-                </a:solidFill>
-                <a:latin typeface="Calibri" pitchFamily="34" charset="0"/>
-                <a:ea typeface="Calibri" pitchFamily="34" charset="-122"/>
-                <a:cs typeface="Calibri" pitchFamily="34" charset="-120"/>
-              </a:rPr>
-              <a:t>15</a:t>
             </a:r>
             <a:endParaRPr lang="en-US" sz="1100" dirty="0"/>
           </a:p>
@@ -8879,7 +7617,7 @@
                 <a:ea typeface="Calibri" pitchFamily="34" charset="-122"/>
                 <a:cs typeface="Calibri" pitchFamily="34" charset="-120"/>
               </a:rPr>
-              <a:t>POR QUÊ · A DOR DO ALUNO</a:t>
+              <a:t>POR QUE COMEÇAMOS · A DOR QUE A GENTE VIVE</a:t>
             </a:r>
             <a:endParaRPr lang="en-US" sz="1650" dirty="0"/>
           </a:p>
@@ -8918,7 +7656,7 @@
                 <a:ea typeface="Calibri" pitchFamily="34" charset="-122"/>
                 <a:cs typeface="Calibri" pitchFamily="34" charset="-120"/>
               </a:rPr>
-              <a:t>O aluno já usa IA — mas sem contexto e sem organização</a:t>
+              <a:t>A IA que a gente usa não conhece a nossa matéria</a:t>
             </a:r>
             <a:endParaRPr lang="en-US" sz="3700" dirty="0"/>
           </a:p>
@@ -9832,7 +8570,7 @@
                 <a:ea typeface="Calibri" pitchFamily="34" charset="-122"/>
                 <a:cs typeface="Calibri" pitchFamily="34" charset="-120"/>
               </a:rPr>
-              <a:t>VISÃO GERAL · O QUE QUEREMOS RESOLVER</a:t>
+              <a:t>NOSSA IDEIA · O QUE QUEREMOS RESOLVER</a:t>
             </a:r>
             <a:endParaRPr lang="en-US" sz="1650" dirty="0"/>
           </a:p>
@@ -9871,7 +8609,7 @@
                 <a:ea typeface="Calibri" pitchFamily="34" charset="-122"/>
                 <a:cs typeface="Calibri" pitchFamily="34" charset="-120"/>
               </a:rPr>
-              <a:t>Um hub que organiza o estudo do aluno UnB</a:t>
+              <a:t>Um lugar só pra organizar o estudo da gente</a:t>
             </a:r>
             <a:endParaRPr lang="en-US" sz="3700" dirty="0"/>
           </a:p>
@@ -9910,7 +8648,7 @@
                 <a:ea typeface="Calibri" pitchFamily="34" charset="-122"/>
                 <a:cs typeface="Calibri" pitchFamily="34" charset="-120"/>
               </a:rPr>
-              <a:t>O aluno recebe material solto — PDFs, slides, fotos, DOCX — em cinco sistemas diferentes. </a:t>
+              <a:t>A gente recebe material solto — PDFs, slides, fotos, DOCX — espalhado em cinco sistemas. </a:t>
             </a:r>
             <a:pPr indent="0" marL="0">
               <a:buNone/>
@@ -9924,7 +8662,7 @@
                 <a:ea typeface="Calibri" pitchFamily="34" charset="-122"/>
                 <a:cs typeface="Calibri" pitchFamily="34" charset="-120"/>
               </a:rPr>
-              <a:t>Resultado: perde tempo organizando em vez de estudar.</a:t>
+              <a:t>No fim, perde mais tempo organizando do que estudando.</a:t>
             </a:r>
             <a:endParaRPr lang="en-US" sz="1900" dirty="0"/>
           </a:p>
@@ -9963,7 +8701,7 @@
                 <a:ea typeface="Calibri" pitchFamily="34" charset="-122"/>
                 <a:cs typeface="Calibri" pitchFamily="34" charset="-120"/>
               </a:rPr>
-              <a:t>O que ele recebe de volta:</a:t>
+              <a:t>O que a gente recebe de volta:</a:t>
             </a:r>
             <a:endParaRPr lang="en-US" sz="1900" dirty="0"/>
           </a:p>
@@ -11050,7 +9788,7 @@
                 <a:ea typeface="Calibri" pitchFamily="34" charset="-122"/>
                 <a:cs typeface="Calibri" pitchFamily="34" charset="-120"/>
               </a:rPr>
-              <a:t>O QUE É · PIPELINE DE PONTA A PONTA</a:t>
+              <a:t>COMO FUNCIONA NA PRÁTICA</a:t>
             </a:r>
             <a:endParaRPr lang="en-US" sz="1650" dirty="0"/>
           </a:p>
@@ -11089,7 +9827,7 @@
                 <a:ea typeface="Calibri" pitchFamily="34" charset="-122"/>
                 <a:cs typeface="Calibri" pitchFamily="34" charset="-120"/>
               </a:rPr>
-              <a:t>O produto, em 5 passos</a:t>
+              <a:t>Do material bruto ao estudo pronto, em 5 passos</a:t>
             </a:r>
             <a:endParaRPr lang="en-US" sz="3700" dirty="0"/>
           </a:p>
@@ -12688,7 +11426,7 @@
                 <a:ea typeface="Calibri" pitchFamily="34" charset="-122"/>
                 <a:cs typeface="Calibri" pitchFamily="34" charset="-120"/>
               </a:rPr>
-              <a:t>O plano passou a refletir o que realmente foi feito</a:t>
+              <a:t>Mudamos o plano pra ele contar a verdade</a:t>
             </a:r>
             <a:endParaRPr lang="en-US" sz="3700" dirty="0"/>
           </a:p>
@@ -13224,7 +11962,7 @@
                 <a:ea typeface="Calibri" pitchFamily="34" charset="-122"/>
                 <a:cs typeface="Calibri" pitchFamily="34" charset="-120"/>
               </a:rPr>
-              <a:t>S4 · Elaboração e finalização do artigo</a:t>
+              <a:t>S4 · Artigo completo e revisado</a:t>
             </a:r>
             <a:endParaRPr lang="en-US" sz="1400" dirty="0"/>
           </a:p>
@@ -13336,7 +12074,7 @@
                 <a:ea typeface="Calibri" pitchFamily="34" charset="-122"/>
                 <a:cs typeface="Calibri" pitchFamily="34" charset="-120"/>
               </a:rPr>
-              <a:t>O produto cresceu na prática (segurança, LGPD, jornada). Agora plano e produto contam a mesma história.</a:t>
+              <a:t>O produto cresceu na prática (segurança, LGPD, jornada). Hoje o plano e o produto contam a mesma história.</a:t>
             </a:r>
             <a:endParaRPr lang="en-US" sz="1400" dirty="0"/>
           </a:p>
@@ -14889,7 +13627,7 @@
             <a:avLst/>
           </a:prstGeom>
           <a:solidFill>
-            <a:srgbClr val="FBE9D3"/>
+            <a:srgbClr val="DDF0E3"/>
           </a:solidFill>
           <a:ln/>
           <a:effectLst>
@@ -14928,13 +13666,13 @@
             <a:r>
               <a:rPr lang="en-US" sz="1100" b="1" dirty="0">
                 <a:solidFill>
-                  <a:srgbClr val="B85C00"/>
-                </a:solidFill>
-                <a:latin typeface="Calibri" pitchFamily="34" charset="0"/>
-                <a:ea typeface="Calibri" pitchFamily="34" charset="-122"/>
-                <a:cs typeface="Calibri" pitchFamily="34" charset="-120"/>
-              </a:rPr>
-              <a:t>EM FINALIZAÇÃO</a:t>
+                  <a:srgbClr val="005923"/>
+                </a:solidFill>
+                <a:latin typeface="Calibri" pitchFamily="34" charset="0"/>
+                <a:ea typeface="Calibri" pitchFamily="34" charset="-122"/>
+                <a:cs typeface="Calibri" pitchFamily="34" charset="-120"/>
+              </a:rPr>
+              <a:t>CONCLUÍDA</a:t>
             </a:r>
             <a:endParaRPr lang="en-US" sz="1100" dirty="0"/>
           </a:p>
@@ -17000,7 +15738,7 @@
                 <a:ea typeface="Calibri" pitchFamily="34" charset="-122"/>
                 <a:cs typeface="Calibri" pitchFamily="34" charset="-120"/>
               </a:rPr>
-              <a:t>Finalização &amp; submissão</a:t>
+              <a:t>Revisão &amp; submissão</a:t>
             </a:r>
             <a:endParaRPr lang="en-US" sz="1200" dirty="0"/>
           </a:p>
@@ -17021,7 +15759,7 @@
             <a:avLst/>
           </a:prstGeom>
           <a:solidFill>
-            <a:srgbClr val="FBE9D3"/>
+            <a:srgbClr val="DDF0E3"/>
           </a:solidFill>
           <a:ln/>
           <a:effectLst>
@@ -17060,13 +15798,13 @@
             <a:r>
               <a:rPr lang="en-US" sz="1100" b="1" dirty="0">
                 <a:solidFill>
-                  <a:srgbClr val="B85C00"/>
-                </a:solidFill>
-                <a:latin typeface="Calibri" pitchFamily="34" charset="0"/>
-                <a:ea typeface="Calibri" pitchFamily="34" charset="-122"/>
-                <a:cs typeface="Calibri" pitchFamily="34" charset="-120"/>
-              </a:rPr>
-              <a:t>EM FINALIZAÇÃO</a:t>
+                  <a:srgbClr val="005923"/>
+                </a:solidFill>
+                <a:latin typeface="Calibri" pitchFamily="34" charset="0"/>
+                <a:ea typeface="Calibri" pitchFamily="34" charset="-122"/>
+                <a:cs typeface="Calibri" pitchFamily="34" charset="-120"/>
+              </a:rPr>
+              <a:t>CONCLUÍDA</a:t>
             </a:r>
             <a:endParaRPr lang="en-US" sz="1100" dirty="0"/>
           </a:p>
@@ -17505,7 +16243,7 @@
                 <a:ea typeface="Calibri" pitchFamily="34" charset="-122"/>
                 <a:cs typeface="Calibri" pitchFamily="34" charset="-120"/>
               </a:rPr>
-              <a:t>Cinco etapas, uma linha contínua — da fundação técnica à entrega acadêmica.</a:t>
+              <a:t>Cinco sprints, todas concluídas — uma linha só, do começo ao fim.</a:t>
             </a:r>
             <a:endParaRPr lang="en-US" sz="1700" dirty="0"/>
           </a:p>
@@ -18697,7 +17435,7 @@
     <p:bg>
       <p:bgPr>
         <a:solidFill>
-          <a:srgbClr val="003366"/>
+          <a:srgbClr val="FFFFFF"/>
         </a:solidFill>
       </p:bgPr>
     </p:bg>
@@ -18715,9 +17453,75 @@
           <a:chExt cx="0" cy="0"/>
         </a:xfrm>
       </p:grpSpPr>
+      <p:sp>
+        <p:nvSpPr>
+          <p:cNvPr id="2" name="Shape 0"/>
+          <p:cNvSpPr/>
+          <p:nvPr/>
+        </p:nvSpPr>
+        <p:spPr>
+          <a:xfrm>
+            <a:off x="502920" y="292608"/>
+            <a:ext cx="1463040" cy="402336"/>
+          </a:xfrm>
+          <a:prstGeom prst="rect">
+            <a:avLst/>
+          </a:prstGeom>
+          <a:solidFill>
+            <a:srgbClr val="003366"/>
+          </a:solidFill>
+          <a:ln/>
+          <a:effectLst>
+            <a:outerShdw sx="100000" sy="100000" kx="0" ky="0" algn="bl" rotWithShape="0" blurRad="2.707009369640755e+33" dist="1.3535046848203775e+33" dir="1.5116544e+40">
+              <a:srgbClr val="7F8A99">
+                <a:alpha val="5.000000000000001e+39"/>
+              </a:srgbClr>
+            </a:outerShdw>
+          </a:effectLst>
+        </p:spPr>
+      </p:sp>
+      <p:sp>
+        <p:nvSpPr>
+          <p:cNvPr id="3" name="Text 1"/>
+          <p:cNvSpPr/>
+          <p:nvPr/>
+        </p:nvSpPr>
+        <p:spPr>
+          <a:xfrm>
+            <a:off x="502920" y="292608"/>
+            <a:ext cx="1463040" cy="402336"/>
+          </a:xfrm>
+          <a:prstGeom prst="rect">
+            <a:avLst/>
+          </a:prstGeom>
+          <a:noFill/>
+          <a:ln/>
+        </p:spPr>
+        <p:txBody>
+          <a:bodyPr wrap="square" rtlCol="0" anchor="ctr"/>
+          <a:lstStyle/>
+          <a:p>
+            <a:pPr algn="ctr" indent="0" marL="0">
+              <a:buNone/>
+            </a:pPr>
+            <a:r>
+              <a:rPr lang="en-US" sz="1550" b="1" dirty="0">
+                <a:solidFill>
+                  <a:srgbClr val="FFFFFF"/>
+                </a:solidFill>
+                <a:latin typeface="Calibri" pitchFamily="34" charset="0"/>
+                <a:ea typeface="Calibri" pitchFamily="34" charset="-122"/>
+                <a:cs typeface="Calibri" pitchFamily="34" charset="-120"/>
+              </a:rPr>
+              <a:t>EXTRAS</a:t>
+            </a:r>
+            <a:endParaRPr lang="en-US" sz="1550" dirty="0"/>
+          </a:p>
+        </p:txBody>
+      </p:sp>
       <p:pic>
         <p:nvPicPr>
-          <p:cNvPr id="2" name="Image 0" descr="/tmp/psp2_pres/unb_white.png">    </p:cNvPr>
+          <p:cNvPr id="4" name="Image 0" descr="/tmp/psp2_pres/unb_color.png">    </p:cNvPr>
           <p:cNvPicPr>
             <a:picLocks noChangeAspect="1"/>
           </p:cNvPicPr>
@@ -18731,8 +17535,8 @@
         </p:blipFill>
         <p:spPr>
           <a:xfrm>
-            <a:off x="11430000" y="310896"/>
-            <a:ext cx="548640" cy="502920"/>
+            <a:off x="11475720" y="164592"/>
+            <a:ext cx="566928" cy="566928"/>
           </a:xfrm>
           <a:prstGeom prst="rect">
             <a:avLst/>
@@ -18741,28 +17545,26 @@
       </p:pic>
       <p:sp>
         <p:nvSpPr>
-          <p:cNvPr id="3" name="Shape 0"/>
-          <p:cNvSpPr/>
-          <p:nvPr/>
-        </p:nvSpPr>
-        <p:spPr>
-          <a:xfrm>
-            <a:off x="502920" y="502920"/>
-            <a:ext cx="1554480" cy="411480"/>
-          </a:xfrm>
-          <a:prstGeom prst="roundRect">
-            <a:avLst>
-              <a:gd name="adj" fmla="val 48889"/>
-            </a:avLst>
-          </a:prstGeom>
-          <a:solidFill>
-            <a:srgbClr val="B91C1C"/>
+          <p:cNvPr id="5" name="Shape 2"/>
+          <p:cNvSpPr/>
+          <p:nvPr/>
+        </p:nvSpPr>
+        <p:spPr>
+          <a:xfrm>
+            <a:off x="502920" y="932688"/>
+            <a:ext cx="11183112" cy="16459"/>
+          </a:xfrm>
+          <a:prstGeom prst="rect">
+            <a:avLst/>
+          </a:prstGeom>
+          <a:solidFill>
+            <a:srgbClr val="E6E9EE"/>
           </a:solidFill>
           <a:ln/>
           <a:effectLst>
-            <a:outerShdw sx="100000" sy="100000" kx="0" ky="0" algn="bl" rotWithShape="0" blurRad="2.707009369640755e+33" dist="1.3535046848203775e+33" dir="1.5116544e+40">
-              <a:srgbClr val="7F8A99">
-                <a:alpha val="5.000000000000001e+39"/>
+            <a:outerShdw sx="100000" sy="100000" kx="0" ky="0" algn="bl" rotWithShape="0" blurRad="1.7322254881290324e+259" dist="1.0393352928774194e+259" dir="9.501042999445996e+302">
+              <a:srgbClr val="9AA7B4">
+                <a:alpha val="Infinity"/>
               </a:srgbClr>
             </a:outerShdw>
           </a:effectLst>
@@ -18770,34 +17572,184 @@
       </p:sp>
       <p:sp>
         <p:nvSpPr>
-          <p:cNvPr id="4" name="Shape 1"/>
-          <p:cNvSpPr/>
-          <p:nvPr/>
-        </p:nvSpPr>
-        <p:spPr>
-          <a:xfrm>
-            <a:off x="685800" y="640080"/>
-            <a:ext cx="146304" cy="146304"/>
-          </a:xfrm>
-          <a:prstGeom prst="ellipse">
+          <p:cNvPr id="6" name="Shape 3"/>
+          <p:cNvSpPr/>
+          <p:nvPr/>
+        </p:nvSpPr>
+        <p:spPr>
+          <a:xfrm>
+            <a:off x="502920" y="914400"/>
+            <a:ext cx="1371600" cy="45720"/>
+          </a:xfrm>
+          <a:prstGeom prst="rect">
+            <a:avLst/>
+          </a:prstGeom>
+          <a:solidFill>
+            <a:srgbClr val="008542"/>
+          </a:solidFill>
+          <a:ln/>
+        </p:spPr>
+      </p:sp>
+      <p:sp>
+        <p:nvSpPr>
+          <p:cNvPr id="7" name="Shape 4"/>
+          <p:cNvSpPr/>
+          <p:nvPr/>
+        </p:nvSpPr>
+        <p:spPr>
+          <a:xfrm>
+            <a:off x="502920" y="914400"/>
+            <a:ext cx="384048" cy="45720"/>
+          </a:xfrm>
+          <a:prstGeom prst="rect">
+            <a:avLst/>
+          </a:prstGeom>
+          <a:solidFill>
+            <a:srgbClr val="FFB81C"/>
+          </a:solidFill>
+          <a:ln/>
+        </p:spPr>
+      </p:sp>
+      <p:sp>
+        <p:nvSpPr>
+          <p:cNvPr id="8" name="Text 5"/>
+          <p:cNvSpPr/>
+          <p:nvPr/>
+        </p:nvSpPr>
+        <p:spPr>
+          <a:xfrm>
+            <a:off x="502920" y="1060704"/>
+            <a:ext cx="11183112" cy="310896"/>
+          </a:xfrm>
+          <a:prstGeom prst="rect">
+            <a:avLst/>
+          </a:prstGeom>
+          <a:noFill/>
+          <a:ln/>
+        </p:spPr>
+        <p:txBody>
+          <a:bodyPr wrap="square" rtlCol="0" anchor="ctr"/>
+          <a:lstStyle/>
+          <a:p>
+            <a:pPr indent="0" marL="0">
+              <a:buNone/>
+            </a:pPr>
+            <a:r>
+              <a:rPr lang="en-US" sz="1650" b="1" dirty="0">
+                <a:solidFill>
+                  <a:srgbClr val="008542"/>
+                </a:solidFill>
+                <a:latin typeface="Calibri" pitchFamily="34" charset="0"/>
+                <a:ea typeface="Calibri" pitchFamily="34" charset="-122"/>
+                <a:cs typeface="Calibri" pitchFamily="34" charset="-120"/>
+              </a:rPr>
+              <a:t>ALÉM DO COMBINADO · ENTREGAMOS MAIS DO QUE PROMETEMOS</a:t>
+            </a:r>
+            <a:endParaRPr lang="en-US" sz="1650" dirty="0"/>
+          </a:p>
+        </p:txBody>
+      </p:sp>
+      <p:sp>
+        <p:nvSpPr>
+          <p:cNvPr id="9" name="Text 6"/>
+          <p:cNvSpPr/>
+          <p:nvPr/>
+        </p:nvSpPr>
+        <p:spPr>
+          <a:xfrm>
+            <a:off x="502920" y="1389888"/>
+            <a:ext cx="11183112" cy="960120"/>
+          </a:xfrm>
+          <a:prstGeom prst="rect">
+            <a:avLst/>
+          </a:prstGeom>
+          <a:noFill/>
+          <a:ln/>
+        </p:spPr>
+        <p:txBody>
+          <a:bodyPr wrap="square" rtlCol="0" anchor="ctr"/>
+          <a:lstStyle/>
+          <a:p>
+            <a:pPr indent="0" marL="0">
+              <a:buNone/>
+            </a:pPr>
+            <a:r>
+              <a:rPr lang="en-US" sz="3700" b="1" dirty="0">
+                <a:solidFill>
+                  <a:srgbClr val="003366"/>
+                </a:solidFill>
+                <a:latin typeface="Calibri" pitchFamily="34" charset="0"/>
+                <a:ea typeface="Calibri" pitchFamily="34" charset="-122"/>
+                <a:cs typeface="Calibri" pitchFamily="34" charset="-120"/>
+              </a:rPr>
+              <a:t>O que a gente entregou além do combinado</a:t>
+            </a:r>
+            <a:endParaRPr lang="en-US" sz="3700" dirty="0"/>
+          </a:p>
+        </p:txBody>
+      </p:sp>
+      <p:sp>
+        <p:nvSpPr>
+          <p:cNvPr id="10" name="Shape 7"/>
+          <p:cNvSpPr/>
+          <p:nvPr/>
+        </p:nvSpPr>
+        <p:spPr>
+          <a:xfrm>
+            <a:off x="502920" y="2468880"/>
+            <a:ext cx="3575304" cy="1371600"/>
+          </a:xfrm>
+          <a:prstGeom prst="rect">
             <a:avLst/>
           </a:prstGeom>
           <a:solidFill>
             <a:srgbClr val="FFFFFF"/>
           </a:solidFill>
-          <a:ln/>
-        </p:spPr>
-      </p:sp>
-      <p:sp>
-        <p:nvSpPr>
-          <p:cNvPr id="5" name="Text 2"/>
-          <p:cNvSpPr/>
-          <p:nvPr/>
-        </p:nvSpPr>
-        <p:spPr>
-          <a:xfrm>
-            <a:off x="886968" y="502920"/>
-            <a:ext cx="1097280" cy="411480"/>
+          <a:ln w="12700">
+            <a:solidFill>
+              <a:srgbClr val="E6E9EE"/>
+            </a:solidFill>
+            <a:prstDash val="solid"/>
+          </a:ln>
+          <a:effectLst>
+            <a:outerShdw sx="100000" sy="100000" kx="0" ky="0" algn="bl" rotWithShape="0" blurRad="2.1999263699238713e+263" dist="1.3199558219543225e+263" dir="5.700625799667598e+307">
+              <a:srgbClr val="9AA7B4">
+                <a:alpha val="Infinity"/>
+              </a:srgbClr>
+            </a:outerShdw>
+          </a:effectLst>
+        </p:spPr>
+      </p:sp>
+      <p:sp>
+        <p:nvSpPr>
+          <p:cNvPr id="11" name="Shape 8"/>
+          <p:cNvSpPr/>
+          <p:nvPr/>
+        </p:nvSpPr>
+        <p:spPr>
+          <a:xfrm>
+            <a:off x="502920" y="2468880"/>
+            <a:ext cx="3575304" cy="54864"/>
+          </a:xfrm>
+          <a:prstGeom prst="rect">
+            <a:avLst/>
+          </a:prstGeom>
+          <a:solidFill>
+            <a:srgbClr val="008542"/>
+          </a:solidFill>
+          <a:ln/>
+        </p:spPr>
+      </p:sp>
+      <p:sp>
+        <p:nvSpPr>
+          <p:cNvPr id="12" name="Text 9"/>
+          <p:cNvSpPr/>
+          <p:nvPr/>
+        </p:nvSpPr>
+        <p:spPr>
+          <a:xfrm>
+            <a:off x="685800" y="2615184"/>
+            <a:ext cx="3209544" cy="365760"/>
           </a:xfrm>
           <a:prstGeom prst="rect">
             <a:avLst/>
@@ -18813,30 +17765,121 @@
               <a:buNone/>
             </a:pPr>
             <a:r>
-              <a:rPr lang="en-US" sz="1300" b="1" dirty="0">
-                <a:solidFill>
-                  <a:srgbClr val="FFFFFF"/>
-                </a:solidFill>
-                <a:latin typeface="Calibri" pitchFamily="34" charset="0"/>
-                <a:ea typeface="Calibri" pitchFamily="34" charset="-122"/>
-                <a:cs typeface="Calibri" pitchFamily="34" charset="-120"/>
-              </a:rPr>
-              <a:t>AO VIVO</a:t>
-            </a:r>
-            <a:endParaRPr lang="en-US" sz="1300" dirty="0"/>
-          </a:p>
-        </p:txBody>
-      </p:sp>
-      <p:sp>
-        <p:nvSpPr>
-          <p:cNvPr id="6" name="Text 3"/>
-          <p:cNvSpPr/>
-          <p:nvPr/>
-        </p:nvSpPr>
-        <p:spPr>
-          <a:xfrm>
-            <a:off x="502920" y="1097280"/>
-            <a:ext cx="11183112" cy="822960"/>
+              <a:rPr lang="en-US" sz="1600" b="1" dirty="0">
+                <a:solidFill>
+                  <a:srgbClr val="003366"/>
+                </a:solidFill>
+                <a:latin typeface="Calibri" pitchFamily="34" charset="0"/>
+                <a:ea typeface="Calibri" pitchFamily="34" charset="-122"/>
+                <a:cs typeface="Calibri" pitchFamily="34" charset="-120"/>
+              </a:rPr>
+              <a:t>Experiência do aluno</a:t>
+            </a:r>
+            <a:endParaRPr lang="en-US" sz="1600" dirty="0"/>
+          </a:p>
+        </p:txBody>
+      </p:sp>
+      <p:sp>
+        <p:nvSpPr>
+          <p:cNvPr id="13" name="Text 10"/>
+          <p:cNvSpPr/>
+          <p:nvPr/>
+        </p:nvSpPr>
+        <p:spPr>
+          <a:xfrm>
+            <a:off x="685800" y="3035808"/>
+            <a:ext cx="3209544" cy="731520"/>
+          </a:xfrm>
+          <a:prstGeom prst="rect">
+            <a:avLst/>
+          </a:prstGeom>
+          <a:noFill/>
+          <a:ln/>
+        </p:spPr>
+        <p:txBody>
+          <a:bodyPr wrap="square" rtlCol="0" anchor="t"/>
+          <a:lstStyle/>
+          <a:p>
+            <a:pPr indent="0" marL="0">
+              <a:buNone/>
+            </a:pPr>
+            <a:r>
+              <a:rPr lang="en-US" sz="1250" dirty="0">
+                <a:solidFill>
+                  <a:srgbClr val="55606E"/>
+                </a:solidFill>
+                <a:latin typeface="Calibri" pitchFamily="34" charset="0"/>
+                <a:ea typeface="Calibri" pitchFamily="34" charset="-122"/>
+                <a:cs typeface="Calibri" pitchFamily="34" charset="-120"/>
+              </a:rPr>
+              <a:t>Identidade UnB, onboarding, busca/filtros, arquivar/excluir, tema escuro</a:t>
+            </a:r>
+            <a:endParaRPr lang="en-US" sz="1250" dirty="0"/>
+          </a:p>
+        </p:txBody>
+      </p:sp>
+      <p:sp>
+        <p:nvSpPr>
+          <p:cNvPr id="14" name="Shape 11"/>
+          <p:cNvSpPr/>
+          <p:nvPr/>
+        </p:nvSpPr>
+        <p:spPr>
+          <a:xfrm>
+            <a:off x="4306824" y="2468880"/>
+            <a:ext cx="3575304" cy="1371600"/>
+          </a:xfrm>
+          <a:prstGeom prst="rect">
+            <a:avLst/>
+          </a:prstGeom>
+          <a:solidFill>
+            <a:srgbClr val="FFFFFF"/>
+          </a:solidFill>
+          <a:ln w="12700">
+            <a:solidFill>
+              <a:srgbClr val="E6E9EE"/>
+            </a:solidFill>
+            <a:prstDash val="solid"/>
+          </a:ln>
+          <a:effectLst>
+            <a:outerShdw sx="100000" sy="100000" kx="0" ky="0" algn="bl" rotWithShape="0" blurRad="2.7939064898033167e+267" dist="1.6763438938819895e+267" dir="Infinity">
+              <a:srgbClr val="9AA7B4">
+                <a:alpha val="Infinity"/>
+              </a:srgbClr>
+            </a:outerShdw>
+          </a:effectLst>
+        </p:spPr>
+      </p:sp>
+      <p:sp>
+        <p:nvSpPr>
+          <p:cNvPr id="15" name="Shape 12"/>
+          <p:cNvSpPr/>
+          <p:nvPr/>
+        </p:nvSpPr>
+        <p:spPr>
+          <a:xfrm>
+            <a:off x="4306824" y="2468880"/>
+            <a:ext cx="3575304" cy="54864"/>
+          </a:xfrm>
+          <a:prstGeom prst="rect">
+            <a:avLst/>
+          </a:prstGeom>
+          <a:solidFill>
+            <a:srgbClr val="008542"/>
+          </a:solidFill>
+          <a:ln/>
+        </p:spPr>
+      </p:sp>
+      <p:sp>
+        <p:nvSpPr>
+          <p:cNvPr id="16" name="Text 13"/>
+          <p:cNvSpPr/>
+          <p:nvPr/>
+        </p:nvSpPr>
+        <p:spPr>
+          <a:xfrm>
+            <a:off x="4489704" y="2615184"/>
+            <a:ext cx="3209544" cy="365760"/>
           </a:xfrm>
           <a:prstGeom prst="rect">
             <a:avLst/>
@@ -18852,30 +17895,121 @@
               <a:buNone/>
             </a:pPr>
             <a:r>
-              <a:rPr lang="en-US" sz="4000" b="1" dirty="0">
-                <a:solidFill>
-                  <a:srgbClr val="FFFFFF"/>
-                </a:solidFill>
-                <a:latin typeface="Calibri" pitchFamily="34" charset="0"/>
-                <a:ea typeface="Calibri" pitchFamily="34" charset="-122"/>
-                <a:cs typeface="Calibri" pitchFamily="34" charset="-120"/>
-              </a:rPr>
-              <a:t>Demonstração do produto</a:t>
-            </a:r>
-            <a:endParaRPr lang="en-US" sz="4000" dirty="0"/>
-          </a:p>
-        </p:txBody>
-      </p:sp>
-      <p:sp>
-        <p:nvSpPr>
-          <p:cNvPr id="7" name="Text 4"/>
-          <p:cNvSpPr/>
-          <p:nvPr/>
-        </p:nvSpPr>
-        <p:spPr>
-          <a:xfrm>
-            <a:off x="502920" y="1938528"/>
-            <a:ext cx="11183112" cy="411480"/>
+              <a:rPr lang="en-US" sz="1600" b="1" dirty="0">
+                <a:solidFill>
+                  <a:srgbClr val="003366"/>
+                </a:solidFill>
+                <a:latin typeface="Calibri" pitchFamily="34" charset="0"/>
+                <a:ea typeface="Calibri" pitchFamily="34" charset="-122"/>
+                <a:cs typeface="Calibri" pitchFamily="34" charset="-120"/>
+              </a:rPr>
+              <a:t>Acompanhamento</a:t>
+            </a:r>
+            <a:endParaRPr lang="en-US" sz="1600" dirty="0"/>
+          </a:p>
+        </p:txBody>
+      </p:sp>
+      <p:sp>
+        <p:nvSpPr>
+          <p:cNvPr id="17" name="Text 14"/>
+          <p:cNvSpPr/>
+          <p:nvPr/>
+        </p:nvSpPr>
+        <p:spPr>
+          <a:xfrm>
+            <a:off x="4489704" y="3035808"/>
+            <a:ext cx="3209544" cy="731520"/>
+          </a:xfrm>
+          <a:prstGeom prst="rect">
+            <a:avLst/>
+          </a:prstGeom>
+          <a:noFill/>
+          <a:ln/>
+        </p:spPr>
+        <p:txBody>
+          <a:bodyPr wrap="square" rtlCol="0" anchor="t"/>
+          <a:lstStyle/>
+          <a:p>
+            <a:pPr indent="0" marL="0">
+              <a:buNone/>
+            </a:pPr>
+            <a:r>
+              <a:rPr lang="en-US" sz="1250" dirty="0">
+                <a:solidFill>
+                  <a:srgbClr val="55606E"/>
+                </a:solidFill>
+                <a:latin typeface="Calibri" pitchFamily="34" charset="0"/>
+                <a:ea typeface="Calibri" pitchFamily="34" charset="-122"/>
+                <a:cs typeface="Calibri" pitchFamily="34" charset="-120"/>
+              </a:rPr>
+              <a:t>Página de atividade, métricas pessoais, painel administrativo</a:t>
+            </a:r>
+            <a:endParaRPr lang="en-US" sz="1250" dirty="0"/>
+          </a:p>
+        </p:txBody>
+      </p:sp>
+      <p:sp>
+        <p:nvSpPr>
+          <p:cNvPr id="18" name="Shape 15"/>
+          <p:cNvSpPr/>
+          <p:nvPr/>
+        </p:nvSpPr>
+        <p:spPr>
+          <a:xfrm>
+            <a:off x="8110728" y="2468880"/>
+            <a:ext cx="3575304" cy="1371600"/>
+          </a:xfrm>
+          <a:prstGeom prst="rect">
+            <a:avLst/>
+          </a:prstGeom>
+          <a:solidFill>
+            <a:srgbClr val="FFFFFF"/>
+          </a:solidFill>
+          <a:ln w="12700">
+            <a:solidFill>
+              <a:srgbClr val="E6E9EE"/>
+            </a:solidFill>
+            <a:prstDash val="solid"/>
+          </a:ln>
+          <a:effectLst>
+            <a:outerShdw sx="100000" sy="100000" kx="0" ky="0" algn="bl" rotWithShape="0" blurRad="3.548261242050212e+271" dist="2.1289567452301266e+271" dir="Infinity">
+              <a:srgbClr val="9AA7B4">
+                <a:alpha val="Infinity"/>
+              </a:srgbClr>
+            </a:outerShdw>
+          </a:effectLst>
+        </p:spPr>
+      </p:sp>
+      <p:sp>
+        <p:nvSpPr>
+          <p:cNvPr id="19" name="Shape 16"/>
+          <p:cNvSpPr/>
+          <p:nvPr/>
+        </p:nvSpPr>
+        <p:spPr>
+          <a:xfrm>
+            <a:off x="8110728" y="2468880"/>
+            <a:ext cx="3575304" cy="54864"/>
+          </a:xfrm>
+          <a:prstGeom prst="rect">
+            <a:avLst/>
+          </a:prstGeom>
+          <a:solidFill>
+            <a:srgbClr val="008542"/>
+          </a:solidFill>
+          <a:ln/>
+        </p:spPr>
+      </p:sp>
+      <p:sp>
+        <p:nvSpPr>
+          <p:cNvPr id="20" name="Text 17"/>
+          <p:cNvSpPr/>
+          <p:nvPr/>
+        </p:nvSpPr>
+        <p:spPr>
+          <a:xfrm>
+            <a:off x="8293608" y="2615184"/>
+            <a:ext cx="3209544" cy="365760"/>
           </a:xfrm>
           <a:prstGeom prst="rect">
             <a:avLst/>
@@ -18891,30 +18025,101 @@
               <a:buNone/>
             </a:pPr>
             <a:r>
-              <a:rPr lang="en-US" sz="1800" dirty="0">
-                <a:solidFill>
-                  <a:srgbClr val="BFD0E6"/>
-                </a:solidFill>
-                <a:latin typeface="Calibri" pitchFamily="34" charset="0"/>
-                <a:ea typeface="Calibri" pitchFamily="34" charset="-122"/>
-                <a:cs typeface="Calibri" pitchFamily="34" charset="-120"/>
-              </a:rPr>
-              <a:t>O produto rodando — do upload ao flashcard gerado por IA</a:t>
-            </a:r>
-            <a:endParaRPr lang="en-US" sz="1800" dirty="0"/>
-          </a:p>
-        </p:txBody>
-      </p:sp>
-      <p:sp>
-        <p:nvSpPr>
-          <p:cNvPr id="8" name="Shape 5"/>
-          <p:cNvSpPr/>
-          <p:nvPr/>
-        </p:nvSpPr>
-        <p:spPr>
-          <a:xfrm>
-            <a:off x="502920" y="2487168"/>
-            <a:ext cx="1097280" cy="45720"/>
+              <a:rPr lang="en-US" sz="1600" b="1" dirty="0">
+                <a:solidFill>
+                  <a:srgbClr val="003366"/>
+                </a:solidFill>
+                <a:latin typeface="Calibri" pitchFamily="34" charset="0"/>
+                <a:ea typeface="Calibri" pitchFamily="34" charset="-122"/>
+                <a:cs typeface="Calibri" pitchFamily="34" charset="-120"/>
+              </a:rPr>
+              <a:t>Segurança &amp; privacidade</a:t>
+            </a:r>
+            <a:endParaRPr lang="en-US" sz="1600" dirty="0"/>
+          </a:p>
+        </p:txBody>
+      </p:sp>
+      <p:sp>
+        <p:nvSpPr>
+          <p:cNvPr id="21" name="Text 18"/>
+          <p:cNvSpPr/>
+          <p:nvPr/>
+        </p:nvSpPr>
+        <p:spPr>
+          <a:xfrm>
+            <a:off x="8293608" y="3035808"/>
+            <a:ext cx="3209544" cy="731520"/>
+          </a:xfrm>
+          <a:prstGeom prst="rect">
+            <a:avLst/>
+          </a:prstGeom>
+          <a:noFill/>
+          <a:ln/>
+        </p:spPr>
+        <p:txBody>
+          <a:bodyPr wrap="square" rtlCol="0" anchor="t"/>
+          <a:lstStyle/>
+          <a:p>
+            <a:pPr indent="0" marL="0">
+              <a:buNone/>
+            </a:pPr>
+            <a:r>
+              <a:rPr lang="en-US" sz="1250" dirty="0">
+                <a:solidFill>
+                  <a:srgbClr val="55606E"/>
+                </a:solidFill>
+                <a:latin typeface="Calibri" pitchFamily="34" charset="0"/>
+                <a:ea typeface="Calibri" pitchFamily="34" charset="-122"/>
+                <a:cs typeface="Calibri" pitchFamily="34" charset="-120"/>
+              </a:rPr>
+              <a:t>Hardening de acesso, sandbox anti-injeção, LGPD completa</a:t>
+            </a:r>
+            <a:endParaRPr lang="en-US" sz="1250" dirty="0"/>
+          </a:p>
+        </p:txBody>
+      </p:sp>
+      <p:sp>
+        <p:nvSpPr>
+          <p:cNvPr id="22" name="Shape 19"/>
+          <p:cNvSpPr/>
+          <p:nvPr/>
+        </p:nvSpPr>
+        <p:spPr>
+          <a:xfrm>
+            <a:off x="502920" y="4041648"/>
+            <a:ext cx="3575304" cy="1371600"/>
+          </a:xfrm>
+          <a:prstGeom prst="rect">
+            <a:avLst/>
+          </a:prstGeom>
+          <a:solidFill>
+            <a:srgbClr val="FFFFFF"/>
+          </a:solidFill>
+          <a:ln w="12700">
+            <a:solidFill>
+              <a:srgbClr val="E6E9EE"/>
+            </a:solidFill>
+            <a:prstDash val="solid"/>
+          </a:ln>
+          <a:effectLst>
+            <a:outerShdw sx="100000" sy="100000" kx="0" ky="0" algn="bl" rotWithShape="0" blurRad="4.50629177740377e+275" dist="2.7037750664422608e+275" dir="Infinity">
+              <a:srgbClr val="9AA7B4">
+                <a:alpha val="Infinity"/>
+              </a:srgbClr>
+            </a:outerShdw>
+          </a:effectLst>
+        </p:spPr>
+      </p:sp>
+      <p:sp>
+        <p:nvSpPr>
+          <p:cNvPr id="23" name="Shape 20"/>
+          <p:cNvSpPr/>
+          <p:nvPr/>
+        </p:nvSpPr>
+        <p:spPr>
+          <a:xfrm>
+            <a:off x="502920" y="4041648"/>
+            <a:ext cx="3575304" cy="54864"/>
           </a:xfrm>
           <a:prstGeom prst="rect">
             <a:avLst/>
@@ -18927,36 +18132,126 @@
       </p:sp>
       <p:sp>
         <p:nvSpPr>
-          <p:cNvPr id="9" name="Shape 6"/>
-          <p:cNvSpPr/>
-          <p:nvPr/>
-        </p:nvSpPr>
-        <p:spPr>
-          <a:xfrm>
-            <a:off x="502920" y="2487168"/>
-            <a:ext cx="320040" cy="45720"/>
-          </a:xfrm>
-          <a:prstGeom prst="rect">
-            <a:avLst/>
-          </a:prstGeom>
-          <a:solidFill>
-            <a:srgbClr val="FFB81C"/>
-          </a:solidFill>
-          <a:ln/>
-        </p:spPr>
-      </p:sp>
-      <p:sp>
-        <p:nvSpPr>
-          <p:cNvPr id="10" name="Shape 7"/>
-          <p:cNvSpPr/>
-          <p:nvPr/>
-        </p:nvSpPr>
-        <p:spPr>
-          <a:xfrm>
-            <a:off x="502920" y="2926080"/>
-            <a:ext cx="502920" cy="502920"/>
-          </a:xfrm>
-          <a:prstGeom prst="ellipse">
+          <p:cNvPr id="24" name="Text 21"/>
+          <p:cNvSpPr/>
+          <p:nvPr/>
+        </p:nvSpPr>
+        <p:spPr>
+          <a:xfrm>
+            <a:off x="685800" y="4187952"/>
+            <a:ext cx="3209544" cy="365760"/>
+          </a:xfrm>
+          <a:prstGeom prst="rect">
+            <a:avLst/>
+          </a:prstGeom>
+          <a:noFill/>
+          <a:ln/>
+        </p:spPr>
+        <p:txBody>
+          <a:bodyPr wrap="square" rtlCol="0" anchor="ctr"/>
+          <a:lstStyle/>
+          <a:p>
+            <a:pPr indent="0" marL="0">
+              <a:buNone/>
+            </a:pPr>
+            <a:r>
+              <a:rPr lang="en-US" sz="1600" b="1" dirty="0">
+                <a:solidFill>
+                  <a:srgbClr val="003366"/>
+                </a:solidFill>
+                <a:latin typeface="Calibri" pitchFamily="34" charset="0"/>
+                <a:ea typeface="Calibri" pitchFamily="34" charset="-122"/>
+                <a:cs typeface="Calibri" pitchFamily="34" charset="-120"/>
+              </a:rPr>
+              <a:t>Inteligência do pipeline</a:t>
+            </a:r>
+            <a:endParaRPr lang="en-US" sz="1600" dirty="0"/>
+          </a:p>
+        </p:txBody>
+      </p:sp>
+      <p:sp>
+        <p:nvSpPr>
+          <p:cNvPr id="25" name="Text 22"/>
+          <p:cNvSpPr/>
+          <p:nvPr/>
+        </p:nvSpPr>
+        <p:spPr>
+          <a:xfrm>
+            <a:off x="685800" y="4608576"/>
+            <a:ext cx="3209544" cy="731520"/>
+          </a:xfrm>
+          <a:prstGeom prst="rect">
+            <a:avLst/>
+          </a:prstGeom>
+          <a:noFill/>
+          <a:ln/>
+        </p:spPr>
+        <p:txBody>
+          <a:bodyPr wrap="square" rtlCol="0" anchor="t"/>
+          <a:lstStyle/>
+          <a:p>
+            <a:pPr indent="0" marL="0">
+              <a:buNone/>
+            </a:pPr>
+            <a:r>
+              <a:rPr lang="en-US" sz="1250" dirty="0">
+                <a:solidFill>
+                  <a:srgbClr val="55606E"/>
+                </a:solidFill>
+                <a:latin typeface="Calibri" pitchFamily="34" charset="0"/>
+                <a:ea typeface="Calibri" pitchFamily="34" charset="-122"/>
+                <a:cs typeface="Calibri" pitchFamily="34" charset="-120"/>
+              </a:rPr>
+              <a:t>Validação em 4 camadas (LLM-as-judge), import SIGAA, flashcards por IA</a:t>
+            </a:r>
+            <a:endParaRPr lang="en-US" sz="1250" dirty="0"/>
+          </a:p>
+        </p:txBody>
+      </p:sp>
+      <p:sp>
+        <p:nvSpPr>
+          <p:cNvPr id="26" name="Shape 23"/>
+          <p:cNvSpPr/>
+          <p:nvPr/>
+        </p:nvSpPr>
+        <p:spPr>
+          <a:xfrm>
+            <a:off x="4306824" y="4041648"/>
+            <a:ext cx="3575304" cy="1371600"/>
+          </a:xfrm>
+          <a:prstGeom prst="rect">
+            <a:avLst/>
+          </a:prstGeom>
+          <a:solidFill>
+            <a:srgbClr val="FFFFFF"/>
+          </a:solidFill>
+          <a:ln w="12700">
+            <a:solidFill>
+              <a:srgbClr val="E6E9EE"/>
+            </a:solidFill>
+            <a:prstDash val="solid"/>
+          </a:ln>
+          <a:effectLst>
+            <a:outerShdw sx="100000" sy="100000" kx="0" ky="0" algn="bl" rotWithShape="0" blurRad="5.722990557302787e+279" dist="3.433794334381671e+279" dir="Infinity">
+              <a:srgbClr val="9AA7B4">
+                <a:alpha val="Infinity"/>
+              </a:srgbClr>
+            </a:outerShdw>
+          </a:effectLst>
+        </p:spPr>
+      </p:sp>
+      <p:sp>
+        <p:nvSpPr>
+          <p:cNvPr id="27" name="Shape 24"/>
+          <p:cNvSpPr/>
+          <p:nvPr/>
+        </p:nvSpPr>
+        <p:spPr>
+          <a:xfrm>
+            <a:off x="4306824" y="4041648"/>
+            <a:ext cx="3575304" cy="54864"/>
+          </a:xfrm>
+          <a:prstGeom prst="rect">
             <a:avLst/>
           </a:prstGeom>
           <a:solidFill>
@@ -18967,14 +18262,14 @@
       </p:sp>
       <p:sp>
         <p:nvSpPr>
-          <p:cNvPr id="11" name="Text 8"/>
-          <p:cNvSpPr/>
-          <p:nvPr/>
-        </p:nvSpPr>
-        <p:spPr>
-          <a:xfrm>
-            <a:off x="502920" y="2926080"/>
-            <a:ext cx="502920" cy="502920"/>
+          <p:cNvPr id="28" name="Text 25"/>
+          <p:cNvSpPr/>
+          <p:nvPr/>
+        </p:nvSpPr>
+        <p:spPr>
+          <a:xfrm>
+            <a:off x="4489704" y="4187952"/>
+            <a:ext cx="3209544" cy="365760"/>
           </a:xfrm>
           <a:prstGeom prst="rect">
             <a:avLst/>
@@ -18986,34 +18281,290 @@
           <a:bodyPr wrap="square" rtlCol="0" anchor="ctr"/>
           <a:lstStyle/>
           <a:p>
+            <a:pPr indent="0" marL="0">
+              <a:buNone/>
+            </a:pPr>
+            <a:r>
+              <a:rPr lang="en-US" sz="1600" b="1" dirty="0">
+                <a:solidFill>
+                  <a:srgbClr val="003366"/>
+                </a:solidFill>
+                <a:latin typeface="Calibri" pitchFamily="34" charset="0"/>
+                <a:ea typeface="Calibri" pitchFamily="34" charset="-122"/>
+                <a:cs typeface="Calibri" pitchFamily="34" charset="-120"/>
+              </a:rPr>
+              <a:t>Confiabilidade</a:t>
+            </a:r>
+            <a:endParaRPr lang="en-US" sz="1600" dirty="0"/>
+          </a:p>
+        </p:txBody>
+      </p:sp>
+      <p:sp>
+        <p:nvSpPr>
+          <p:cNvPr id="29" name="Text 26"/>
+          <p:cNvSpPr/>
+          <p:nvPr/>
+        </p:nvSpPr>
+        <p:spPr>
+          <a:xfrm>
+            <a:off x="4489704" y="4608576"/>
+            <a:ext cx="3209544" cy="731520"/>
+          </a:xfrm>
+          <a:prstGeom prst="rect">
+            <a:avLst/>
+          </a:prstGeom>
+          <a:noFill/>
+          <a:ln/>
+        </p:spPr>
+        <p:txBody>
+          <a:bodyPr wrap="square" rtlCol="0" anchor="t"/>
+          <a:lstStyle/>
+          <a:p>
+            <a:pPr indent="0" marL="0">
+              <a:buNone/>
+            </a:pPr>
+            <a:r>
+              <a:rPr lang="en-US" sz="1250" dirty="0">
+                <a:solidFill>
+                  <a:srgbClr val="55606E"/>
+                </a:solidFill>
+                <a:latin typeface="Calibri" pitchFamily="34" charset="0"/>
+                <a:ea typeface="Calibri" pitchFamily="34" charset="-122"/>
+                <a:cs typeface="Calibri" pitchFamily="34" charset="-120"/>
+              </a:rPr>
+              <a:t>Logs sem PII, tempo real, CI/CD com gate, auditoria multi-frente</a:t>
+            </a:r>
+            <a:endParaRPr lang="en-US" sz="1250" dirty="0"/>
+          </a:p>
+        </p:txBody>
+      </p:sp>
+      <p:sp>
+        <p:nvSpPr>
+          <p:cNvPr id="30" name="Shape 27"/>
+          <p:cNvSpPr/>
+          <p:nvPr/>
+        </p:nvSpPr>
+        <p:spPr>
+          <a:xfrm>
+            <a:off x="8110728" y="4041648"/>
+            <a:ext cx="3575304" cy="1371600"/>
+          </a:xfrm>
+          <a:prstGeom prst="rect">
+            <a:avLst/>
+          </a:prstGeom>
+          <a:solidFill>
+            <a:srgbClr val="FFFFFF"/>
+          </a:solidFill>
+          <a:ln w="12700">
+            <a:solidFill>
+              <a:srgbClr val="E6E9EE"/>
+            </a:solidFill>
+            <a:prstDash val="solid"/>
+          </a:ln>
+          <a:effectLst>
+            <a:outerShdw sx="100000" sy="100000" kx="0" ky="0" algn="bl" rotWithShape="0" blurRad="7.26819800777454e+283" dist="4.360918804664722e+283" dir="Infinity">
+              <a:srgbClr val="9AA7B4">
+                <a:alpha val="Infinity"/>
+              </a:srgbClr>
+            </a:outerShdw>
+          </a:effectLst>
+        </p:spPr>
+      </p:sp>
+      <p:sp>
+        <p:nvSpPr>
+          <p:cNvPr id="31" name="Shape 28"/>
+          <p:cNvSpPr/>
+          <p:nvPr/>
+        </p:nvSpPr>
+        <p:spPr>
+          <a:xfrm>
+            <a:off x="8110728" y="4041648"/>
+            <a:ext cx="3575304" cy="54864"/>
+          </a:xfrm>
+          <a:prstGeom prst="rect">
+            <a:avLst/>
+          </a:prstGeom>
+          <a:solidFill>
+            <a:srgbClr val="008542"/>
+          </a:solidFill>
+          <a:ln/>
+        </p:spPr>
+      </p:sp>
+      <p:sp>
+        <p:nvSpPr>
+          <p:cNvPr id="32" name="Text 29"/>
+          <p:cNvSpPr/>
+          <p:nvPr/>
+        </p:nvSpPr>
+        <p:spPr>
+          <a:xfrm>
+            <a:off x="8293608" y="4187952"/>
+            <a:ext cx="3209544" cy="365760"/>
+          </a:xfrm>
+          <a:prstGeom prst="rect">
+            <a:avLst/>
+          </a:prstGeom>
+          <a:noFill/>
+          <a:ln/>
+        </p:spPr>
+        <p:txBody>
+          <a:bodyPr wrap="square" rtlCol="0" anchor="ctr"/>
+          <a:lstStyle/>
+          <a:p>
+            <a:pPr indent="0" marL="0">
+              <a:buNone/>
+            </a:pPr>
+            <a:r>
+              <a:rPr lang="en-US" sz="1600" b="1" dirty="0">
+                <a:solidFill>
+                  <a:srgbClr val="003366"/>
+                </a:solidFill>
+                <a:latin typeface="Calibri" pitchFamily="34" charset="0"/>
+                <a:ea typeface="Calibri" pitchFamily="34" charset="-122"/>
+                <a:cs typeface="Calibri" pitchFamily="34" charset="-120"/>
+              </a:rPr>
+              <a:t>Flexibilidade</a:t>
+            </a:r>
+            <a:endParaRPr lang="en-US" sz="1600" dirty="0"/>
+          </a:p>
+        </p:txBody>
+      </p:sp>
+      <p:sp>
+        <p:nvSpPr>
+          <p:cNvPr id="33" name="Text 30"/>
+          <p:cNvSpPr/>
+          <p:nvPr/>
+        </p:nvSpPr>
+        <p:spPr>
+          <a:xfrm>
+            <a:off x="8293608" y="4608576"/>
+            <a:ext cx="3209544" cy="731520"/>
+          </a:xfrm>
+          <a:prstGeom prst="rect">
+            <a:avLst/>
+          </a:prstGeom>
+          <a:noFill/>
+          <a:ln/>
+        </p:spPr>
+        <p:txBody>
+          <a:bodyPr wrap="square" rtlCol="0" anchor="t"/>
+          <a:lstStyle/>
+          <a:p>
+            <a:pPr indent="0" marL="0">
+              <a:buNone/>
+            </a:pPr>
+            <a:r>
+              <a:rPr lang="en-US" sz="1250" dirty="0">
+                <a:solidFill>
+                  <a:srgbClr val="55606E"/>
+                </a:solidFill>
+                <a:latin typeface="Calibri" pitchFamily="34" charset="0"/>
+                <a:ea typeface="Calibri" pitchFamily="34" charset="-122"/>
+                <a:cs typeface="Calibri" pitchFamily="34" charset="-120"/>
+              </a:rPr>
+              <a:t>Troca de modelo sem deploy, multi-provider de IA, biblioteca de prompts</a:t>
+            </a:r>
+            <a:endParaRPr lang="en-US" sz="1250" dirty="0"/>
+          </a:p>
+        </p:txBody>
+      </p:sp>
+      <p:sp>
+        <p:nvSpPr>
+          <p:cNvPr id="34" name="Shape 31"/>
+          <p:cNvSpPr/>
+          <p:nvPr/>
+        </p:nvSpPr>
+        <p:spPr>
+          <a:xfrm>
+            <a:off x="502920" y="5989320"/>
+            <a:ext cx="11183112" cy="457200"/>
+          </a:xfrm>
+          <a:prstGeom prst="roundRect">
+            <a:avLst>
+              <a:gd name="adj" fmla="val 32000"/>
+            </a:avLst>
+          </a:prstGeom>
+          <a:solidFill>
+            <a:srgbClr val="DDF0E3"/>
+          </a:solidFill>
+          <a:ln w="12700">
+            <a:solidFill>
+              <a:srgbClr val="E6E9EE"/>
+            </a:solidFill>
+            <a:prstDash val="solid"/>
+          </a:ln>
+          <a:effectLst>
+            <a:outerShdw sx="100000" sy="100000" kx="0" ky="0" algn="bl" rotWithShape="0" blurRad="9.230611469873665e+287" dist="5.538366881924197e+287" dir="Infinity">
+              <a:srgbClr val="9AA7B4">
+                <a:alpha val="Infinity"/>
+              </a:srgbClr>
+            </a:outerShdw>
+          </a:effectLst>
+        </p:spPr>
+      </p:sp>
+      <p:sp>
+        <p:nvSpPr>
+          <p:cNvPr id="35" name="Text 32"/>
+          <p:cNvSpPr/>
+          <p:nvPr/>
+        </p:nvSpPr>
+        <p:spPr>
+          <a:xfrm>
+            <a:off x="502920" y="5989320"/>
+            <a:ext cx="11183112" cy="457200"/>
+          </a:xfrm>
+          <a:prstGeom prst="rect">
+            <a:avLst/>
+          </a:prstGeom>
+          <a:noFill/>
+          <a:ln/>
+        </p:spPr>
+        <p:txBody>
+          <a:bodyPr wrap="square" rtlCol="0" anchor="ctr"/>
+          <a:lstStyle/>
+          <a:p>
             <a:pPr algn="ctr" indent="0" marL="0">
               <a:buNone/>
             </a:pPr>
             <a:r>
-              <a:rPr lang="en-US" sz="2000" b="1" dirty="0">
-                <a:solidFill>
-                  <a:srgbClr val="FFFFFF"/>
-                </a:solidFill>
-                <a:latin typeface="Calibri" pitchFamily="34" charset="0"/>
-                <a:ea typeface="Calibri" pitchFamily="34" charset="-122"/>
-                <a:cs typeface="Calibri" pitchFamily="34" charset="-120"/>
-              </a:rPr>
-              <a:t>1</a:t>
-            </a:r>
-            <a:endParaRPr lang="en-US" sz="2000" dirty="0"/>
-          </a:p>
-        </p:txBody>
-      </p:sp>
-      <p:sp>
-        <p:nvSpPr>
-          <p:cNvPr id="12" name="Text 9"/>
-          <p:cNvSpPr/>
-          <p:nvPr/>
-        </p:nvSpPr>
-        <p:spPr>
-          <a:xfrm>
-            <a:off x="1188720" y="2898648"/>
-            <a:ext cx="5029200" cy="822960"/>
+              <a:rPr lang="en-US" sz="1400" b="1" dirty="0">
+                <a:solidFill>
+                  <a:srgbClr val="005923"/>
+                </a:solidFill>
+                <a:latin typeface="Calibri" pitchFamily="34" charset="0"/>
+                <a:ea typeface="Calibri" pitchFamily="34" charset="-122"/>
+                <a:cs typeface="Calibri" pitchFamily="34" charset="-120"/>
+              </a:rPr>
+              <a:t>O produto cresceu — e o plano acompanhou. </a:t>
+            </a:r>
+            <a:pPr algn="ctr" indent="0" marL="0">
+              <a:buNone/>
+            </a:pPr>
+            <a:r>
+              <a:rPr lang="en-US" sz="1300" dirty="0">
+                <a:solidFill>
+                  <a:srgbClr val="1F2937"/>
+                </a:solidFill>
+                <a:latin typeface="Calibri" pitchFamily="34" charset="0"/>
+                <a:ea typeface="Calibri" pitchFamily="34" charset="-122"/>
+                <a:cs typeface="Calibri" pitchFamily="34" charset="-120"/>
+              </a:rPr>
+              <a:t>Mais de 25 entregas fora do backlog original.</a:t>
+            </a:r>
+            <a:endParaRPr lang="en-US" sz="1400" dirty="0"/>
+          </a:p>
+        </p:txBody>
+      </p:sp>
+      <p:sp>
+        <p:nvSpPr>
+          <p:cNvPr id="36" name="Text 33"/>
+          <p:cNvSpPr/>
+          <p:nvPr/>
+        </p:nvSpPr>
+        <p:spPr>
+          <a:xfrm>
+            <a:off x="11183112" y="6437376"/>
+            <a:ext cx="640080" cy="274320"/>
           </a:xfrm>
           <a:prstGeom prst="rect">
             <a:avLst/>
@@ -19025,660 +18576,21 @@
           <a:bodyPr wrap="square" rtlCol="0" anchor="ctr"/>
           <a:lstStyle/>
           <a:p>
-            <a:pPr indent="0" marL="0">
-              <a:buNone/>
-            </a:pPr>
-            <a:r>
-              <a:rPr lang="en-US" sz="1700" b="1" dirty="0">
-                <a:solidFill>
-                  <a:srgbClr val="FFFFFF"/>
-                </a:solidFill>
-                <a:latin typeface="Calibri" pitchFamily="34" charset="0"/>
-                <a:ea typeface="Calibri" pitchFamily="34" charset="-122"/>
-                <a:cs typeface="Calibri" pitchFamily="34" charset="-120"/>
-              </a:rPr>
-              <a:t>Login e dashboard
-</a:t>
-            </a:r>
-            <a:pPr indent="0" marL="0">
-              <a:buNone/>
-            </a:pPr>
-            <a:r>
-              <a:rPr lang="en-US" sz="1300" dirty="0">
-                <a:solidFill>
-                  <a:srgbClr val="BFD0E6"/>
-                </a:solidFill>
-                <a:latin typeface="Calibri" pitchFamily="34" charset="0"/>
-                <a:ea typeface="Calibri" pitchFamily="34" charset="-122"/>
-                <a:cs typeface="Calibri" pitchFamily="34" charset="-120"/>
-              </a:rPr>
-              <a:t>Entrada segura, visão geral em tempo real</a:t>
-            </a:r>
-            <a:endParaRPr lang="en-US" sz="1700" dirty="0"/>
-          </a:p>
-        </p:txBody>
-      </p:sp>
-      <p:sp>
-        <p:nvSpPr>
-          <p:cNvPr id="13" name="Shape 10"/>
-          <p:cNvSpPr/>
-          <p:nvPr/>
-        </p:nvSpPr>
-        <p:spPr>
-          <a:xfrm>
-            <a:off x="502920" y="3950208"/>
-            <a:ext cx="502920" cy="502920"/>
-          </a:xfrm>
-          <a:prstGeom prst="ellipse">
-            <a:avLst/>
-          </a:prstGeom>
-          <a:solidFill>
-            <a:srgbClr val="008542"/>
-          </a:solidFill>
-          <a:ln/>
-        </p:spPr>
-      </p:sp>
-      <p:sp>
-        <p:nvSpPr>
-          <p:cNvPr id="14" name="Text 11"/>
-          <p:cNvSpPr/>
-          <p:nvPr/>
-        </p:nvSpPr>
-        <p:spPr>
-          <a:xfrm>
-            <a:off x="502920" y="3950208"/>
-            <a:ext cx="502920" cy="502920"/>
-          </a:xfrm>
-          <a:prstGeom prst="rect">
-            <a:avLst/>
-          </a:prstGeom>
-          <a:noFill/>
-          <a:ln/>
-        </p:spPr>
-        <p:txBody>
-          <a:bodyPr wrap="square" rtlCol="0" anchor="ctr"/>
-          <a:lstStyle/>
-          <a:p>
-            <a:pPr algn="ctr" indent="0" marL="0">
-              <a:buNone/>
-            </a:pPr>
-            <a:r>
-              <a:rPr lang="en-US" sz="2000" b="1" dirty="0">
-                <a:solidFill>
-                  <a:srgbClr val="FFFFFF"/>
-                </a:solidFill>
-                <a:latin typeface="Calibri" pitchFamily="34" charset="0"/>
-                <a:ea typeface="Calibri" pitchFamily="34" charset="-122"/>
-                <a:cs typeface="Calibri" pitchFamily="34" charset="-120"/>
-              </a:rPr>
-              <a:t>2</a:t>
-            </a:r>
-            <a:endParaRPr lang="en-US" sz="2000" dirty="0"/>
-          </a:p>
-        </p:txBody>
-      </p:sp>
-      <p:sp>
-        <p:nvSpPr>
-          <p:cNvPr id="15" name="Text 12"/>
-          <p:cNvSpPr/>
-          <p:nvPr/>
-        </p:nvSpPr>
-        <p:spPr>
-          <a:xfrm>
-            <a:off x="1188720" y="3922776"/>
-            <a:ext cx="5029200" cy="822960"/>
-          </a:xfrm>
-          <a:prstGeom prst="rect">
-            <a:avLst/>
-          </a:prstGeom>
-          <a:noFill/>
-          <a:ln/>
-        </p:spPr>
-        <p:txBody>
-          <a:bodyPr wrap="square" rtlCol="0" anchor="ctr"/>
-          <a:lstStyle/>
-          <a:p>
-            <a:pPr indent="0" marL="0">
-              <a:buNone/>
-            </a:pPr>
-            <a:r>
-              <a:rPr lang="en-US" sz="1700" b="1" dirty="0">
-                <a:solidFill>
-                  <a:srgbClr val="FFFFFF"/>
-                </a:solidFill>
-                <a:latin typeface="Calibri" pitchFamily="34" charset="0"/>
-                <a:ea typeface="Calibri" pitchFamily="34" charset="-122"/>
-                <a:cs typeface="Calibri" pitchFamily="34" charset="-120"/>
-              </a:rPr>
-              <a:t>Upload de um documento
-</a:t>
-            </a:r>
-            <a:pPr indent="0" marL="0">
-              <a:buNone/>
-            </a:pPr>
-            <a:r>
-              <a:rPr lang="en-US" sz="1300" dirty="0">
-                <a:solidFill>
-                  <a:srgbClr val="BFD0E6"/>
-                </a:solidFill>
-                <a:latin typeface="Calibri" pitchFamily="34" charset="0"/>
-                <a:ea typeface="Calibri" pitchFamily="34" charset="-122"/>
-                <a:cs typeface="Calibri" pitchFamily="34" charset="-120"/>
-              </a:rPr>
-              <a:t>Acompanhar o status processando ao vivo</a:t>
-            </a:r>
-            <a:endParaRPr lang="en-US" sz="1700" dirty="0"/>
-          </a:p>
-        </p:txBody>
-      </p:sp>
-      <p:sp>
-        <p:nvSpPr>
-          <p:cNvPr id="16" name="Shape 13"/>
-          <p:cNvSpPr/>
-          <p:nvPr/>
-        </p:nvSpPr>
-        <p:spPr>
-          <a:xfrm>
-            <a:off x="502920" y="4974336"/>
-            <a:ext cx="502920" cy="502920"/>
-          </a:xfrm>
-          <a:prstGeom prst="ellipse">
-            <a:avLst/>
-          </a:prstGeom>
-          <a:solidFill>
-            <a:srgbClr val="008542"/>
-          </a:solidFill>
-          <a:ln/>
-        </p:spPr>
-      </p:sp>
-      <p:sp>
-        <p:nvSpPr>
-          <p:cNvPr id="17" name="Text 14"/>
-          <p:cNvSpPr/>
-          <p:nvPr/>
-        </p:nvSpPr>
-        <p:spPr>
-          <a:xfrm>
-            <a:off x="502920" y="4974336"/>
-            <a:ext cx="502920" cy="502920"/>
-          </a:xfrm>
-          <a:prstGeom prst="rect">
-            <a:avLst/>
-          </a:prstGeom>
-          <a:noFill/>
-          <a:ln/>
-        </p:spPr>
-        <p:txBody>
-          <a:bodyPr wrap="square" rtlCol="0" anchor="ctr"/>
-          <a:lstStyle/>
-          <a:p>
-            <a:pPr algn="ctr" indent="0" marL="0">
-              <a:buNone/>
-            </a:pPr>
-            <a:r>
-              <a:rPr lang="en-US" sz="2000" b="1" dirty="0">
-                <a:solidFill>
-                  <a:srgbClr val="FFFFFF"/>
-                </a:solidFill>
-                <a:latin typeface="Calibri" pitchFamily="34" charset="0"/>
-                <a:ea typeface="Calibri" pitchFamily="34" charset="-122"/>
-                <a:cs typeface="Calibri" pitchFamily="34" charset="-120"/>
-              </a:rPr>
-              <a:t>3</a:t>
-            </a:r>
-            <a:endParaRPr lang="en-US" sz="2000" dirty="0"/>
-          </a:p>
-        </p:txBody>
-      </p:sp>
-      <p:sp>
-        <p:nvSpPr>
-          <p:cNvPr id="18" name="Text 15"/>
-          <p:cNvSpPr/>
-          <p:nvPr/>
-        </p:nvSpPr>
-        <p:spPr>
-          <a:xfrm>
-            <a:off x="1188720" y="4946904"/>
-            <a:ext cx="5029200" cy="822960"/>
-          </a:xfrm>
-          <a:prstGeom prst="rect">
-            <a:avLst/>
-          </a:prstGeom>
-          <a:noFill/>
-          <a:ln/>
-        </p:spPr>
-        <p:txBody>
-          <a:bodyPr wrap="square" rtlCol="0" anchor="ctr"/>
-          <a:lstStyle/>
-          <a:p>
-            <a:pPr indent="0" marL="0">
-              <a:buNone/>
-            </a:pPr>
-            <a:r>
-              <a:rPr lang="en-US" sz="1700" b="1" dirty="0">
-                <a:solidFill>
-                  <a:srgbClr val="FFFFFF"/>
-                </a:solidFill>
-                <a:latin typeface="Calibri" pitchFamily="34" charset="0"/>
-                <a:ea typeface="Calibri" pitchFamily="34" charset="-122"/>
-                <a:cs typeface="Calibri" pitchFamily="34" charset="-120"/>
-              </a:rPr>
-              <a:t>Resumo gerado
-</a:t>
-            </a:r>
-            <a:pPr indent="0" marL="0">
-              <a:buNone/>
-            </a:pPr>
-            <a:r>
-              <a:rPr lang="en-US" sz="1300" dirty="0">
-                <a:solidFill>
-                  <a:srgbClr val="BFD0E6"/>
-                </a:solidFill>
-                <a:latin typeface="Calibri" pitchFamily="34" charset="0"/>
-                <a:ea typeface="Calibri" pitchFamily="34" charset="-122"/>
-                <a:cs typeface="Calibri" pitchFamily="34" charset="-120"/>
-              </a:rPr>
-              <a:t>Preview do markdown, fórmulas preservadas</a:t>
-            </a:r>
-            <a:endParaRPr lang="en-US" sz="1700" dirty="0"/>
-          </a:p>
-        </p:txBody>
-      </p:sp>
-      <p:sp>
-        <p:nvSpPr>
-          <p:cNvPr id="19" name="Shape 16"/>
-          <p:cNvSpPr/>
-          <p:nvPr/>
-        </p:nvSpPr>
-        <p:spPr>
-          <a:xfrm>
-            <a:off x="6263640" y="2926080"/>
-            <a:ext cx="502920" cy="502920"/>
-          </a:xfrm>
-          <a:prstGeom prst="ellipse">
-            <a:avLst/>
-          </a:prstGeom>
-          <a:solidFill>
-            <a:srgbClr val="008542"/>
-          </a:solidFill>
-          <a:ln/>
-        </p:spPr>
-      </p:sp>
-      <p:sp>
-        <p:nvSpPr>
-          <p:cNvPr id="20" name="Text 17"/>
-          <p:cNvSpPr/>
-          <p:nvPr/>
-        </p:nvSpPr>
-        <p:spPr>
-          <a:xfrm>
-            <a:off x="6263640" y="2926080"/>
-            <a:ext cx="502920" cy="502920"/>
-          </a:xfrm>
-          <a:prstGeom prst="rect">
-            <a:avLst/>
-          </a:prstGeom>
-          <a:noFill/>
-          <a:ln/>
-        </p:spPr>
-        <p:txBody>
-          <a:bodyPr wrap="square" rtlCol="0" anchor="ctr"/>
-          <a:lstStyle/>
-          <a:p>
-            <a:pPr algn="ctr" indent="0" marL="0">
-              <a:buNone/>
-            </a:pPr>
-            <a:r>
-              <a:rPr lang="en-US" sz="2000" b="1" dirty="0">
-                <a:solidFill>
-                  <a:srgbClr val="FFFFFF"/>
-                </a:solidFill>
-                <a:latin typeface="Calibri" pitchFamily="34" charset="0"/>
-                <a:ea typeface="Calibri" pitchFamily="34" charset="-122"/>
-                <a:cs typeface="Calibri" pitchFamily="34" charset="-120"/>
-              </a:rPr>
-              <a:t>4</a:t>
-            </a:r>
-            <a:endParaRPr lang="en-US" sz="2000" dirty="0"/>
-          </a:p>
-        </p:txBody>
-      </p:sp>
-      <p:sp>
-        <p:nvSpPr>
-          <p:cNvPr id="21" name="Text 18"/>
-          <p:cNvSpPr/>
-          <p:nvPr/>
-        </p:nvSpPr>
-        <p:spPr>
-          <a:xfrm>
-            <a:off x="6949440" y="2898648"/>
-            <a:ext cx="5029200" cy="822960"/>
-          </a:xfrm>
-          <a:prstGeom prst="rect">
-            <a:avLst/>
-          </a:prstGeom>
-          <a:noFill/>
-          <a:ln/>
-        </p:spPr>
-        <p:txBody>
-          <a:bodyPr wrap="square" rtlCol="0" anchor="ctr"/>
-          <a:lstStyle/>
-          <a:p>
-            <a:pPr indent="0" marL="0">
-              <a:buNone/>
-            </a:pPr>
-            <a:r>
-              <a:rPr lang="en-US" sz="1700" b="1" dirty="0">
-                <a:solidFill>
-                  <a:srgbClr val="FFFFFF"/>
-                </a:solidFill>
-                <a:latin typeface="Calibri" pitchFamily="34" charset="0"/>
-                <a:ea typeface="Calibri" pitchFamily="34" charset="-122"/>
-                <a:cs typeface="Calibri" pitchFamily="34" charset="-120"/>
-              </a:rPr>
-              <a:t>Organização no Drive
-</a:t>
-            </a:r>
-            <a:pPr indent="0" marL="0">
-              <a:buNone/>
-            </a:pPr>
-            <a:r>
-              <a:rPr lang="en-US" sz="1300" dirty="0">
-                <a:solidFill>
-                  <a:srgbClr val="BFD0E6"/>
-                </a:solidFill>
-                <a:latin typeface="Calibri" pitchFamily="34" charset="0"/>
-                <a:ea typeface="Calibri" pitchFamily="34" charset="-122"/>
-                <a:cs typeface="Calibri" pitchFamily="34" charset="-120"/>
-              </a:rPr>
-              <a:t>Pastas automáticas por matéria</a:t>
-            </a:r>
-            <a:endParaRPr lang="en-US" sz="1700" dirty="0"/>
-          </a:p>
-        </p:txBody>
-      </p:sp>
-      <p:sp>
-        <p:nvSpPr>
-          <p:cNvPr id="22" name="Shape 19"/>
-          <p:cNvSpPr/>
-          <p:nvPr/>
-        </p:nvSpPr>
-        <p:spPr>
-          <a:xfrm>
-            <a:off x="6263640" y="3950208"/>
-            <a:ext cx="502920" cy="502920"/>
-          </a:xfrm>
-          <a:prstGeom prst="ellipse">
-            <a:avLst/>
-          </a:prstGeom>
-          <a:solidFill>
-            <a:srgbClr val="008542"/>
-          </a:solidFill>
-          <a:ln/>
-        </p:spPr>
-      </p:sp>
-      <p:sp>
-        <p:nvSpPr>
-          <p:cNvPr id="23" name="Text 20"/>
-          <p:cNvSpPr/>
-          <p:nvPr/>
-        </p:nvSpPr>
-        <p:spPr>
-          <a:xfrm>
-            <a:off x="6263640" y="3950208"/>
-            <a:ext cx="502920" cy="502920"/>
-          </a:xfrm>
-          <a:prstGeom prst="rect">
-            <a:avLst/>
-          </a:prstGeom>
-          <a:noFill/>
-          <a:ln/>
-        </p:spPr>
-        <p:txBody>
-          <a:bodyPr wrap="square" rtlCol="0" anchor="ctr"/>
-          <a:lstStyle/>
-          <a:p>
-            <a:pPr algn="ctr" indent="0" marL="0">
-              <a:buNone/>
-            </a:pPr>
-            <a:r>
-              <a:rPr lang="en-US" sz="2000" b="1" dirty="0">
-                <a:solidFill>
-                  <a:srgbClr val="FFFFFF"/>
-                </a:solidFill>
-                <a:latin typeface="Calibri" pitchFamily="34" charset="0"/>
-                <a:ea typeface="Calibri" pitchFamily="34" charset="-122"/>
-                <a:cs typeface="Calibri" pitchFamily="34" charset="-120"/>
-              </a:rPr>
-              <a:t>5</a:t>
-            </a:r>
-            <a:endParaRPr lang="en-US" sz="2000" dirty="0"/>
-          </a:p>
-        </p:txBody>
-      </p:sp>
-      <p:sp>
-        <p:nvSpPr>
-          <p:cNvPr id="24" name="Text 21"/>
-          <p:cNvSpPr/>
-          <p:nvPr/>
-        </p:nvSpPr>
-        <p:spPr>
-          <a:xfrm>
-            <a:off x="6949440" y="3922776"/>
-            <a:ext cx="5029200" cy="822960"/>
-          </a:xfrm>
-          <a:prstGeom prst="rect">
-            <a:avLst/>
-          </a:prstGeom>
-          <a:noFill/>
-          <a:ln/>
-        </p:spPr>
-        <p:txBody>
-          <a:bodyPr wrap="square" rtlCol="0" anchor="ctr"/>
-          <a:lstStyle/>
-          <a:p>
-            <a:pPr indent="0" marL="0">
-              <a:buNone/>
-            </a:pPr>
-            <a:r>
-              <a:rPr lang="en-US" sz="1700" b="1" dirty="0">
-                <a:solidFill>
-                  <a:srgbClr val="FFFFFF"/>
-                </a:solidFill>
-                <a:latin typeface="Calibri" pitchFamily="34" charset="0"/>
-                <a:ea typeface="Calibri" pitchFamily="34" charset="-122"/>
-                <a:cs typeface="Calibri" pitchFamily="34" charset="-120"/>
-              </a:rPr>
-              <a:t>Flashcards por IA
-</a:t>
-            </a:r>
-            <a:pPr indent="0" marL="0">
-              <a:buNone/>
-            </a:pPr>
-            <a:r>
-              <a:rPr lang="en-US" sz="1300" dirty="0">
-                <a:solidFill>
-                  <a:srgbClr val="BFD0E6"/>
-                </a:solidFill>
-                <a:latin typeface="Calibri" pitchFamily="34" charset="0"/>
-                <a:ea typeface="Calibri" pitchFamily="34" charset="-122"/>
-                <a:cs typeface="Calibri" pitchFamily="34" charset="-120"/>
-              </a:rPr>
-              <a:t>Geração com LaTeX + estudo em repetição espaçada</a:t>
-            </a:r>
-            <a:endParaRPr lang="en-US" sz="1700" dirty="0"/>
-          </a:p>
-        </p:txBody>
-      </p:sp>
-      <p:sp>
-        <p:nvSpPr>
-          <p:cNvPr id="25" name="Shape 22"/>
-          <p:cNvSpPr/>
-          <p:nvPr/>
-        </p:nvSpPr>
-        <p:spPr>
-          <a:xfrm>
-            <a:off x="6263640" y="4974336"/>
-            <a:ext cx="502920" cy="502920"/>
-          </a:xfrm>
-          <a:prstGeom prst="ellipse">
-            <a:avLst/>
-          </a:prstGeom>
-          <a:solidFill>
-            <a:srgbClr val="008542"/>
-          </a:solidFill>
-          <a:ln/>
-        </p:spPr>
-      </p:sp>
-      <p:sp>
-        <p:nvSpPr>
-          <p:cNvPr id="26" name="Text 23"/>
-          <p:cNvSpPr/>
-          <p:nvPr/>
-        </p:nvSpPr>
-        <p:spPr>
-          <a:xfrm>
-            <a:off x="6263640" y="4974336"/>
-            <a:ext cx="502920" cy="502920"/>
-          </a:xfrm>
-          <a:prstGeom prst="rect">
-            <a:avLst/>
-          </a:prstGeom>
-          <a:noFill/>
-          <a:ln/>
-        </p:spPr>
-        <p:txBody>
-          <a:bodyPr wrap="square" rtlCol="0" anchor="ctr"/>
-          <a:lstStyle/>
-          <a:p>
-            <a:pPr algn="ctr" indent="0" marL="0">
-              <a:buNone/>
-            </a:pPr>
-            <a:r>
-              <a:rPr lang="en-US" sz="2000" b="1" dirty="0">
-                <a:solidFill>
-                  <a:srgbClr val="FFFFFF"/>
-                </a:solidFill>
-                <a:latin typeface="Calibri" pitchFamily="34" charset="0"/>
-                <a:ea typeface="Calibri" pitchFamily="34" charset="-122"/>
-                <a:cs typeface="Calibri" pitchFamily="34" charset="-120"/>
-              </a:rPr>
-              <a:t>6</a:t>
-            </a:r>
-            <a:endParaRPr lang="en-US" sz="2000" dirty="0"/>
-          </a:p>
-        </p:txBody>
-      </p:sp>
-      <p:sp>
-        <p:nvSpPr>
-          <p:cNvPr id="27" name="Text 24"/>
-          <p:cNvSpPr/>
-          <p:nvPr/>
-        </p:nvSpPr>
-        <p:spPr>
-          <a:xfrm>
-            <a:off x="6949440" y="4946904"/>
-            <a:ext cx="5029200" cy="822960"/>
-          </a:xfrm>
-          <a:prstGeom prst="rect">
-            <a:avLst/>
-          </a:prstGeom>
-          <a:noFill/>
-          <a:ln/>
-        </p:spPr>
-        <p:txBody>
-          <a:bodyPr wrap="square" rtlCol="0" anchor="ctr"/>
-          <a:lstStyle/>
-          <a:p>
-            <a:pPr indent="0" marL="0">
-              <a:buNone/>
-            </a:pPr>
-            <a:r>
-              <a:rPr lang="en-US" sz="1700" b="1" dirty="0">
-                <a:solidFill>
-                  <a:srgbClr val="FFFFFF"/>
-                </a:solidFill>
-                <a:latin typeface="Calibri" pitchFamily="34" charset="0"/>
-                <a:ea typeface="Calibri" pitchFamily="34" charset="-122"/>
-                <a:cs typeface="Calibri" pitchFamily="34" charset="-120"/>
-              </a:rPr>
-              <a:t>Prompts personalizados
-</a:t>
-            </a:r>
-            <a:pPr indent="0" marL="0">
-              <a:buNone/>
-            </a:pPr>
-            <a:r>
-              <a:rPr lang="en-US" sz="1300" dirty="0">
-                <a:solidFill>
-                  <a:srgbClr val="BFD0E6"/>
-                </a:solidFill>
-                <a:latin typeface="Calibri" pitchFamily="34" charset="0"/>
-                <a:ea typeface="Calibri" pitchFamily="34" charset="-122"/>
-                <a:cs typeface="Calibri" pitchFamily="34" charset="-120"/>
-              </a:rPr>
-              <a:t>System prompt + biblioteca pronta</a:t>
-            </a:r>
-            <a:endParaRPr lang="en-US" sz="1700" dirty="0"/>
-          </a:p>
-        </p:txBody>
-      </p:sp>
-      <p:sp>
-        <p:nvSpPr>
-          <p:cNvPr id="28" name="Shape 25"/>
-          <p:cNvSpPr/>
-          <p:nvPr/>
-        </p:nvSpPr>
-        <p:spPr>
-          <a:xfrm>
-            <a:off x="502920" y="6336792"/>
-            <a:ext cx="548640" cy="45720"/>
-          </a:xfrm>
-          <a:prstGeom prst="rect">
-            <a:avLst/>
-          </a:prstGeom>
-          <a:solidFill>
-            <a:srgbClr val="008542"/>
-          </a:solidFill>
-          <a:ln/>
-        </p:spPr>
-      </p:sp>
-      <p:sp>
-        <p:nvSpPr>
-          <p:cNvPr id="29" name="Text 26"/>
-          <p:cNvSpPr/>
-          <p:nvPr/>
-        </p:nvSpPr>
-        <p:spPr>
-          <a:xfrm>
-            <a:off x="502920" y="6400800"/>
-            <a:ext cx="10058400" cy="365760"/>
-          </a:xfrm>
-          <a:prstGeom prst="rect">
-            <a:avLst/>
-          </a:prstGeom>
-          <a:noFill/>
-          <a:ln/>
-        </p:spPr>
-        <p:txBody>
-          <a:bodyPr wrap="square" rtlCol="0" anchor="ctr"/>
-          <a:lstStyle/>
-          <a:p>
-            <a:pPr indent="0" marL="0">
-              <a:buNone/>
-            </a:pPr>
-            <a:r>
-              <a:rPr lang="en-US" sz="1700" b="1" dirty="0">
-                <a:solidFill>
-                  <a:srgbClr val="FFFFFF"/>
-                </a:solidFill>
-                <a:latin typeface="Calibri" pitchFamily="34" charset="0"/>
-                <a:ea typeface="Calibri" pitchFamily="34" charset="-122"/>
-                <a:cs typeface="Calibri" pitchFamily="34" charset="-120"/>
-              </a:rPr>
-              <a:t>Em vez de só falar — vou mostrar.</a:t>
-            </a:r>
-            <a:endParaRPr lang="en-US" sz="1700" dirty="0"/>
+            <a:pPr algn="r" indent="0" marL="0">
+              <a:buNone/>
+            </a:pPr>
+            <a:r>
+              <a:rPr lang="en-US" sz="1100" dirty="0">
+                <a:solidFill>
+                  <a:srgbClr val="8A939F"/>
+                </a:solidFill>
+                <a:latin typeface="Calibri" pitchFamily="34" charset="0"/>
+                <a:ea typeface="Calibri" pitchFamily="34" charset="-122"/>
+                <a:cs typeface="Calibri" pitchFamily="34" charset="-120"/>
+              </a:rPr>
+              <a:t>09</a:t>
+            </a:r>
+            <a:endParaRPr lang="en-US" sz="1100" dirty="0"/>
           </a:p>
         </p:txBody>
       </p:sp>
